--- a/Curso Gas B/08 - ITC-ICG 11 - Relacion de normas UNE de referencia/08 - ITC-ICG 11 - Relacion de normas UNE de referencia - Vídeo 1.pptx
+++ b/Curso Gas B/08 - ITC-ICG 11 - Relacion de normas UNE de referencia/08 - ITC-ICG 11 - Relacion de normas UNE de referencia - Vídeo 1.pptx
@@ -23,6 +23,7 @@
     <p:sldId id="271" r:id="rId23"/>
     <p:sldId id="272" r:id="rId24"/>
     <p:sldId id="273" r:id="rId25"/>
+    <p:sldId id="274" r:id="rId26"/>
   </p:sldIdLst>
   <p:sldSz cx="12191695" cy="6858000" type="screen4x3"/>
   <p:notesSz cx="6858000" cy="9144000"/>
@@ -594,12 +595,12 @@
           <a:lstStyle/>
           <a:p>
             <a:r>
-              <a:t>N1: De todas estas, ¿cuál voy a usar de verdad en el día a día?</a:t>
-            </a:r>
-          </a:p>
-          <a:p>
-            <a:r>
-              <a:t>N2: La familia seis mil seiscientos setenta, sin duda. Es la norma de las instalaciones receptoras hasta cinco bar, es decir, lo doméstico y lo comercial de siempre, el núcleo de tu categoría B. Y viene troceada en trece partes muy prácticas, cada una previene una avería concreta. La parte ocho son las pruebas de estanquidad: la que evita la fuga que si no aparece luego con olor y riesgo. La parte seis, la ventilación y evacuación de humos del local: la que evita la intoxicación por monóxido y que el aparato se apague por falta de aire. La parte siete, la conexión de aparatos. Y la parte nueve, las pruebas previas para dar gas por primera vez. Memoriza qué hace cada parte y tendrás medio examen ganado.</a:t>
+              <a:t>N1: Dentro de las nacionales, ¿cómo me oriento entre tantos números?</a:t>
+            </a:r>
+          </a:p>
+          <a:p>
+            <a:r>
+              <a:t>N2: Agrúpalas por lo que hacen, no las memorices sueltas. La serie sesenta mil es la de las normas nacionales del gas. Dentro, hay tres bloques que te conviene distinguir. Distribución, la red de la calle: seis mil trescientos diez, trescientos once y trescientos doce, según la presión. Instalaciones receptoras, lo que va dentro del edificio: seis mil seiscientos veinte para gas natural por encima de cinco bar, y seis mil seiscientos setenta hasta cinco bar. Y luego el GLP en depósito, la seis mil doscientos cincuenta. La ciento veintitrés mil uno es chimeneas. Con esos bloques ya no te pierdes.</a:t>
             </a:r>
           </a:p>
         </p:txBody>
@@ -669,12 +670,12 @@
           <a:lstStyle/>
           <a:p>
             <a:r>
-              <a:t>N1: Veo seis mil seiscientos setenta y seis mil seiscientos veinte y me hago un lío. ¿Cómo las separo?</a:t>
-            </a:r>
-          </a:p>
-          <a:p>
-            <a:r>
-              <a:t>N2: Por la presión, y aquí entra una sigla que verás mil veces: MOP, la máxima presión de operación, la presión más alta a la que la instalación trabaja de forma normal y continuada. Cuando leas MOP menor o igual a cinco bar, piensa instalación de vivienda y comercio. Ese umbral de cinco bar es la frontera: la seis mil seiscientos setenta es hasta cinco bar, lo tuyo; la seis mil seiscientos veinte es por encima de cinco bar, industrial. Un truco para no fallar: el número más alto, seiscientos setenta, es la presión más baja. Y ojo, la trescientos diez, once y doce ya no son receptoras, son distribución, la red de la calle. Meter una norma de distribución en el boletín de una vivienda es un error que salta a la primera revisión.</a:t>
+              <a:t>N1: De todas estas, ¿cuál voy a usar de verdad en el día a día?</a:t>
+            </a:r>
+          </a:p>
+          <a:p>
+            <a:r>
+              <a:t>N2: La familia seis mil seiscientos setenta, sin duda. Es la norma de las instalaciones receptoras hasta cinco bar, es decir, lo doméstico y lo comercial de siempre, el núcleo de tu categoría B. Y viene troceada en trece partes muy prácticas, cada una previene una avería concreta. La parte ocho son las pruebas de estanquidad: la que evita la fuga que si no aparece luego con olor y riesgo. La parte seis, la ventilación y evacuación de humos del local: la que evita la intoxicación por monóxido y que el aparato se apague por falta de aire. La parte siete, la conexión de aparatos. Y la parte nueve, las pruebas previas para dar gas por primera vez. Memoriza qué hace cada parte y tendrás medio examen ganado.</a:t>
             </a:r>
           </a:p>
         </p:txBody>
@@ -744,12 +745,12 @@
           <a:lstStyle/>
           <a:p>
             <a:r>
-              <a:t>N1: Y todas esas une-en, ¿de qué van en general?</a:t>
-            </a:r>
-          </a:p>
-          <a:p>
-            <a:r>
-              <a:t>N2: Son las de origen europeo e internacional, y también se agrupan por temas. Para la distribución europea tienes la doce mil siete, la mil quinientos noventa y cuatro y la doce mil trescientos veintisiete, esta última de ensayos de presión y puesta en servicio de la red. Para chimeneas y humos, la mil ochocientos cincuenta y seis y la trece mil trescientos ochenta y cuatro, que es la de cálculo. Para comportamiento frente al fuego, la mil trescientos sesenta y tres y la trece mil quinientos uno. Y la iso nueve mil uno es la de gestión de la calidad. No hace falta que te las sepas de carrerilla: basta con que sepas a qué cajón temático pertenece cada una.</a:t>
+              <a:t>N1: Veo seis mil seiscientos setenta y seis mil seiscientos veinte y me hago un lío. ¿Cómo las separo?</a:t>
+            </a:r>
+          </a:p>
+          <a:p>
+            <a:r>
+              <a:t>N2: Por la presión, y aquí entra una sigla que verás mil veces: MOP, la máxima presión de operación, la presión más alta a la que la instalación trabaja de forma normal y continuada. Cuando leas MOP menor o igual a cinco bar, piensa instalación de vivienda y comercio. Ese umbral de cinco bar es la frontera: la seis mil seiscientos setenta es hasta cinco bar, lo tuyo; la seis mil seiscientos veinte es por encima de cinco bar, industrial. Un truco para no fallar: el número más alto, seiscientos setenta, es la presión más baja. Y ojo, la trescientos diez, once y doce ya no son receptoras, son distribución, la red de la calle. Meter una norma de distribución en el boletín de una vivienda es un error que salta a la primera revisión.</a:t>
             </a:r>
           </a:p>
         </p:txBody>
@@ -819,12 +820,12 @@
           <a:lstStyle/>
           <a:p>
             <a:r>
-              <a:t>N1: Has dicho que la cuatrocientos treinta y siete la cito mil veces. ¿Por qué es tan importante?</a:t>
-            </a:r>
-          </a:p>
-          <a:p>
-            <a:r>
-              <a:t>N2: Porque define las tres familias de gas y las categorías de aparatos. Las tres familias son: primera, gases manufacturados y aire propanado; segunda, gas natural; tercera, los GLP, butano y propano. Cada vez que en el curso oigas tres familias, detrás está la cuatrocientos treinta y siete. Y tiene una compañera inseparable, la cen barra te erre mil setecientos cuarenta y nueve, que clasifica los aparatos por tipos: tipo A, tipo B y tipo C, según cómo evacúan los humos de la combustión. Esto no es teoría de adorno: equivocar el tipo de aparato, poner un tipo A donde hace falta un C estanco, es diseñar una intoxicación por monóxido desde el papel.</a:t>
+              <a:t>N1: Y todas esas une-en, ¿de qué van en general?</a:t>
+            </a:r>
+          </a:p>
+          <a:p>
+            <a:r>
+              <a:t>N2: Son las de origen europeo e internacional, y también se agrupan por temas. Para la distribución europea tienes la doce mil siete, la mil quinientos noventa y cuatro y la doce mil trescientos veintisiete, esta última de ensayos de presión y puesta en servicio de la red. Para chimeneas y humos, la mil ochocientos cincuenta y seis y la trece mil trescientos ochenta y cuatro, que es la de cálculo. Para comportamiento frente al fuego, la mil trescientos sesenta y tres y la trece mil quinientos uno. Y la iso nueve mil uno es la de gestión de la calidad. No hace falta que te las sepas de carrerilla: basta con que sepas a qué cajón temático pertenece cada una.</a:t>
             </a:r>
           </a:p>
         </p:txBody>
@@ -894,12 +895,12 @@
           <a:lstStyle/>
           <a:p>
             <a:r>
-              <a:t>N1: De todo el listado, ¿qué normas voy a tener en las manos de verdad con el GLP?</a:t>
-            </a:r>
-          </a:p>
-          <a:p>
-            <a:r>
-              <a:t>N2: Tres muy concretas. La doce mil ochocientos sesenta y cuatro es la de los reguladores, esa pieza que baja la presión de la bombona a la de trabajo. La trece mil setecientos ochenta y seis, la de los inversores automáticos, que cambian solos de una bombona vacía a otra llena. Y la dieciséis mil cuatrocientos treinta y seis, la de las mangueras y tubos flexibles. Esta última es puro día a día: la manguera caducada o agrietada es de las fugas más típicas en las cocinas de butano, cámbiala en cada revisión. Y un regulador mal tarado da presión incorrecta, y con ella llama amarilla y mala combustión. Ves cómo el listado, que parecía un rollo de papel, se convierte en averías concretas.</a:t>
+              <a:t>N1: Has dicho que la cuatrocientos treinta y siete la cito mil veces. ¿Por qué es tan importante?</a:t>
+            </a:r>
+          </a:p>
+          <a:p>
+            <a:r>
+              <a:t>N2: Porque define las tres familias de gas y las categorías de aparatos. Las tres familias son: primera, gases manufacturados y aire propanado; segunda, gas natural; tercera, los GLP, butano y propano. Cada vez que en el curso oigas tres familias, detrás está la cuatrocientos treinta y siete. Y tiene una compañera inseparable, la cen barra te erre mil setecientos cuarenta y nueve, que clasifica los aparatos por tipos: tipo A, tipo B y tipo C, según cómo evacúan los humos de la combustión. Esto no es teoría de adorno: equivocar el tipo de aparato, poner un tipo A donde hace falta un C estanco, es diseñar una intoxicación por monóxido desde el papel.</a:t>
             </a:r>
           </a:p>
         </p:txBody>
@@ -969,12 +970,12 @@
           <a:lstStyle/>
           <a:p>
             <a:r>
-              <a:t>N1: En la tabla veo la misma norma repetida con barra a uno, barra a dos... ¿son normas distintas?</a:t>
-            </a:r>
-          </a:p>
-          <a:p>
-            <a:r>
-              <a:t>N2: No, y esto confunde a mucha gente. Esas marcas son la misma norma retocada. La barra uno eme o la barra a uno es un parche que corrige o amplía la norma base; salió después para arreglar o completar algo. Y la marca más a uno significa que la enmienda ya viene incorporada, consolidada, en la versión que se cita. Por eso ves varias entradas de la doce mil ochocientos sesenta y cuatro, con barra a uno, a dos y a tres: es la misma norma de reguladores con tres parches sucesivos. En obra tú citas la norma base; el parche va implícito en la edición vigente. No cuentes cada marca como si fuera una norma nueva.</a:t>
+              <a:t>N1: De todo el listado, ¿qué normas voy a tener en las manos de verdad con el GLP?</a:t>
+            </a:r>
+          </a:p>
+          <a:p>
+            <a:r>
+              <a:t>N2: Tres muy concretas. La doce mil ochocientos sesenta y cuatro es la de los reguladores, esa pieza que baja la presión de la bombona a la de trabajo. La trece mil setecientos ochenta y seis, la de los inversores automáticos, que cambian solos de una bombona vacía a otra llena. Y la dieciséis mil cuatrocientos treinta y seis, la de las mangueras y tubos flexibles. Esta última es puro día a día: la manguera caducada o agrietada es de las fugas más típicas en las cocinas de butano, cámbiala en cada revisión. Y un regulador mal tarado da presión incorrecta, y con ella llama amarilla y mala combustión. Ves cómo el listado, que parecía un rollo de papel, se convierte en averías concretas.</a:t>
             </a:r>
           </a:p>
         </p:txBody>
@@ -1044,12 +1045,12 @@
           <a:lstStyle/>
           <a:p>
             <a:r>
-              <a:t>N1: En el examen, cuando me den una tarea, ¿cómo encuentro rápido la norma?</a:t>
-            </a:r>
-          </a:p>
-          <a:p>
-            <a:r>
-              <a:t>N2: Con unos cuantos cajones mentales. Pregúntate primero qué tipo de trabajo es. ¿Es tubería de la calle, distribución? Series trescientos diez, once y doce si son nacionales, o doce mil siete, mil quinientos noventa y cuatro y doce mil trescientos veintisiete si son europeas. ¿Es instalación dentro del edificio hasta cinco bar? La seis mil seiscientos setenta, casi seguro. ¿Chimeneas y humos? Ciento veintitrés mil uno, mil ochocientos cincuenta y seis y trece mil trescientos ochenta y cuatro. ¿Reguladores, inversores o mangueras de GLP? Doce mil ochocientos sesenta y cuatro, trece mil setecientos ochenta y seis y dieciséis mil cuatrocientos treinta y seis. Con esos cajones colocas casi cualquier norma del listado sin habértela aprendido de memoria.</a:t>
+              <a:t>N1: En la tabla veo la misma norma repetida con barra a uno, barra a dos... ¿son normas distintas?</a:t>
+            </a:r>
+          </a:p>
+          <a:p>
+            <a:r>
+              <a:t>N2: No, y esto confunde a mucha gente. Esas marcas son la misma norma retocada. La barra uno eme o la barra a uno es un parche que corrige o amplía la norma base; salió después para arreglar o completar algo. Y la marca más a uno significa que la enmienda ya viene incorporada, consolidada, en la versión que se cita. Por eso ves varias entradas de la doce mil ochocientos sesenta y cuatro, con barra a uno, a dos y a tres: es la misma norma de reguladores con tres parches sucesivos. En obra tú citas la norma base; el parche va implícito en la edición vigente. No cuentes cada marca como si fuera una norma nueva.</a:t>
             </a:r>
           </a:p>
         </p:txBody>
@@ -1119,12 +1120,12 @@
           <a:lstStyle/>
           <a:p>
             <a:r>
-              <a:t>N1: Y todo esto de las normas, al final, ¿en qué papel se nota?</a:t>
-            </a:r>
-          </a:p>
-          <a:p>
-            <a:r>
-              <a:t>N2: En el certificado de instalación de gas, lo que en obra llamamos el boletín, del tipo I erre ge según tu comunidad autónoma. Lo firma el instalador o la empresa instaladora habilitada de la categoría que corresponda, y se entrega a la empresa distribuidora para el alta y la puesta en servicio, con copia para el usuario y registro ante el órgano de industria de tu comunidad. Aquí es donde todo lo del vídeo cobra sentido: si en ese boletín pones la referencia equivocada, o citas una edición caducada, o metes una norma de distribución en una vivienda, la distribuidora te lo rechaza y te deja la instalación sin dar de alta hasta que lo corrijas. Y las revisiones periódicas, apoyadas en la sesenta y seis setenta parte doce y parte trece, generan su propio certificado. Manejar bien el índice de normas es, literalmente, que no te tumben el trabajo.</a:t>
+              <a:t>N1: En el examen, cuando me den una tarea, ¿cómo encuentro rápido la norma?</a:t>
+            </a:r>
+          </a:p>
+          <a:p>
+            <a:r>
+              <a:t>N2: Con unos cuantos cajones mentales. Pregúntate primero qué tipo de trabajo es. ¿Es tubería de la calle, distribución? Series trescientos diez, once y doce si son nacionales, o doce mil siete, mil quinientos noventa y cuatro y doce mil trescientos veintisiete si son europeas. ¿Es instalación dentro del edificio hasta cinco bar? La seis mil seiscientos setenta, casi seguro. ¿Chimeneas y humos? Ciento veintitrés mil uno, mil ochocientos cincuenta y seis y trece mil trescientos ochenta y cuatro. ¿Reguladores, inversores o mangueras de GLP? Doce mil ochocientos sesenta y cuatro, trece mil setecientos ochenta y seis y dieciséis mil cuatrocientos treinta y seis. Con esos cajones colocas casi cualquier norma del listado sin habértela aprendido de memoria.</a:t>
             </a:r>
           </a:p>
         </p:txBody>
@@ -1194,6 +1195,81 @@
           <a:lstStyle/>
           <a:p>
             <a:r>
+              <a:t>N1: Y todo esto de las normas, al final, ¿en qué papel se nota?</a:t>
+            </a:r>
+          </a:p>
+          <a:p>
+            <a:r>
+              <a:t>N2: En el certificado de instalación de gas, lo que en obra llamamos el boletín, del tipo I erre ge según tu comunidad autónoma. Lo firma el instalador o la empresa instaladora habilitada de la categoría que corresponda, y se entrega a la empresa distribuidora para el alta y la puesta en servicio, con copia para el usuario y registro ante el órgano de industria de tu comunidad. Aquí es donde todo lo del vídeo cobra sentido: si en ese boletín pones la referencia equivocada, o citas una edición caducada, o metes una norma de distribución en una vivienda, la distribuidora te lo rechaza y te deja la instalación sin dar de alta hasta que lo corrijas. Y las revisiones periódicas, apoyadas en la sesenta y seis setenta parte doce y parte trece, generan su propio certificado. Manejar bien el índice de normas es, literalmente, que no te tumben el trabajo.</a:t>
+            </a:r>
+          </a:p>
+        </p:txBody>
+      </p:sp>
+      <p:sp>
+        <p:nvSpPr>
+          <p:cNvPr id="4" name="Slide Number Placeholder 3"/>
+          <p:cNvSpPr>
+            <a:spLocks noGrp="1"/>
+          </p:cNvSpPr>
+          <p:nvPr>
+            <p:ph type="sldNum" idx="5" sz="quarter"/>
+          </p:nvPr>
+        </p:nvSpPr>
+        <p:spPr/>
+      </p:sp>
+    </p:spTree>
+  </p:cSld>
+  <p:clrMapOvr>
+    <a:masterClrMapping/>
+  </p:clrMapOvr>
+</p:notes>
+</file>
+
+<file path=ppt/notesSlides/notesSlide19.xml><?xml version="1.0" encoding="utf-8"?>
+<p:notes xmlns:a="http://schemas.openxmlformats.org/drawingml/2006/main" xmlns:p="http://schemas.openxmlformats.org/presentationml/2006/main" xmlns:r="http://schemas.openxmlformats.org/officeDocument/2006/relationships">
+  <p:cSld>
+    <p:spTree>
+      <p:nvGrpSpPr>
+        <p:cNvPr id="1" name=""/>
+        <p:cNvGrpSpPr/>
+        <p:nvPr/>
+      </p:nvGrpSpPr>
+      <p:grpSpPr>
+        <a:xfrm>
+          <a:off x="0" y="0"/>
+          <a:ext cx="0" cy="0"/>
+          <a:chOff x="0" y="0"/>
+          <a:chExt cx="0" cy="0"/>
+        </a:xfrm>
+      </p:grpSpPr>
+      <p:sp>
+        <p:nvSpPr>
+          <p:cNvPr id="2" name="Slide Image Placeholder 1"/>
+          <p:cNvSpPr>
+            <a:spLocks noGrp="1"/>
+          </p:cNvSpPr>
+          <p:nvPr>
+            <p:ph type="sldImg" idx="2"/>
+          </p:nvPr>
+        </p:nvSpPr>
+        <p:spPr/>
+      </p:sp>
+      <p:sp>
+        <p:nvSpPr>
+          <p:cNvPr id="3" name="Notes Placeholder 2"/>
+          <p:cNvSpPr>
+            <a:spLocks noGrp="1"/>
+          </p:cNvSpPr>
+          <p:nvPr>
+            <p:ph type="body" idx="3" sz="quarter"/>
+          </p:nvPr>
+        </p:nvSpPr>
+        <p:spPr/>
+        <p:txBody>
+          <a:bodyPr/>
+          <a:lstStyle/>
+          <a:p>
+            <a:r>
               <a:t>N1: Cerramos. Si me quedo con lo esencial, ¿qué me llevo?</a:t>
             </a:r>
           </a:p>
@@ -1352,16 +1428,7 @@
         <p:txBody>
           <a:bodyPr/>
           <a:lstStyle/>
-          <a:p>
-            <a:r>
-              <a:t>N1: Entonces, ¿la ICG once es una norma más de las que hay que cumplir?</a:t>
-            </a:r>
-          </a:p>
-          <a:p>
-            <a:r>
-              <a:t>N2: No, y esta distinción es clave. La ICG once no te manda hacer nada nuevo. Su único trabajo es guardar, en un solo sitio, la lista de todas las normas UNE que el Reglamento y sus ITC te obligan a cumplir. El artículo doce del Reglamento es el que dice donde vive esa lista, y la lista es la ICG once. Míralo así: cuando cualquier ITC te suelta cúmplase la une tal, tú vas a la ICG once y ahí está esa norma, con su número y su título. Es la lista maestra. Por eso no te enseña a hacer una prueba ni a calcular una ventilación: solo te dice qué normas existen y de qué van.</a:t>
-            </a:r>
-          </a:p>
+          <a:p/>
         </p:txBody>
       </p:sp>
       <p:sp>
@@ -1429,12 +1496,12 @@
           <a:lstStyle/>
           <a:p>
             <a:r>
-              <a:t>N1: Vale, pero si necesito saber cómo se hace una prueba de estanquidad, ¿la busco en la ICG once?</a:t>
-            </a:r>
-          </a:p>
-          <a:p>
-            <a:r>
-              <a:t>N2: Ahí está el error típico. No. En la ICG once no busques cómo se hace una prueba de estanquidad, ni qué ventilación lleva una caldera. Eso está en la norma concreta, por ejemplo la seis mil seiscientos setenta. Estanquidad, por cierto, quiere decir que no se escape ni una burbuja de gas. La ICG once es como el índice telefónico o como la contraportada de un libro con la lista de capítulos: te dice que el capítulo existe y en qué página está, pero para leer el capítulo tienes que abrir la norma. El índice te lleva; el contenido está en la norma.</a:t>
+              <a:t>N1: Entonces, ¿la ICG once es una norma más de las que hay que cumplir?</a:t>
+            </a:r>
+          </a:p>
+          <a:p>
+            <a:r>
+              <a:t>N2: No, y esta distinción es clave. La ICG once no te manda hacer nada nuevo. Su único trabajo es guardar, en un solo sitio, la lista de todas las normas UNE que el Reglamento y sus ITC te obligan a cumplir. El artículo doce del Reglamento es el que dice donde vive esa lista, y la lista es la ICG once. Míralo así: cuando cualquier ITC te suelta cúmplase la une tal, tú vas a la ICG once y ahí está esa norma, con su número y su título. Es la lista maestra. Por eso no te enseña a hacer una prueba ni a calcular una ventilación: solo te dice qué normas existen y de qué van.</a:t>
             </a:r>
           </a:p>
         </p:txBody>
@@ -1504,12 +1571,12 @@
           <a:lstStyle/>
           <a:p>
             <a:r>
-              <a:t>N1: ¿Y por qué montar una ITC entera solo para una lista? Parece un lío.</a:t>
-            </a:r>
-          </a:p>
-          <a:p>
-            <a:r>
-              <a:t>N2: Es justo al revés, es lo práctico. Las normas cambian a menudo: sale una edición nueva, se retoca otra. Si esa lista estuviera metida dentro del Reglamento, cada vez que cambiara una une habría que reformar el Reglamento entero, y eso es un proceso lento y pesado. Al tener la lista en una ITC aparte, se actualiza con una simple Resolución de la Dirección General de Industria, sin tocar el mueble grande. Piénsalo como un cajón que puedes reordenar cuando quieras sin desmontar el armario. Por eso la lista siempre está al día.</a:t>
+              <a:t>N1: Vale, pero si necesito saber cómo se hace una prueba de estanquidad, ¿la busco en la ICG once?</a:t>
+            </a:r>
+          </a:p>
+          <a:p>
+            <a:r>
+              <a:t>N2: Ahí está el error típico. No. En la ICG once no busques cómo se hace una prueba de estanquidad, ni qué ventilación lleva una caldera. Eso está en la norma concreta, por ejemplo la seis mil seiscientos setenta. Estanquidad, por cierto, quiere decir que no se escape ni una burbuja de gas. La ICG once es como el índice telefónico o como la contraportada de un libro con la lista de capítulos: te dice que el capítulo existe y en qué página está, pero para leer el capítulo tienes que abrir la norma. El índice te lleva; el contenido está en la norma.</a:t>
             </a:r>
           </a:p>
         </p:txBody>
@@ -1579,12 +1646,12 @@
           <a:lstStyle/>
           <a:p>
             <a:r>
-              <a:t>N1: Una cosa que me chirría: en el curso siempre veo une seis mil seiscientos setenta sin fecha. ¿Es un despiste?</a:t>
-            </a:r>
-          </a:p>
-          <a:p>
-            <a:r>
-              <a:t>N2: No, es exactamente como manda el Reglamento, y cae en el examen. Fíjate en la lógica: si una ITC citara la norma con su año, en cuanto saliera una edición nueva la ITC quedaría anticuada. Para evitarlo, las ITC citan la norma sin año. El único sitio donde el año figura de forma oficial es la ICG once, junto al número y el título. ¿Y qué haces tú en obra? Usar siempre la edición vigente según el listado actualizado. Por eso en las tablas del curso tampoco ponemos año: reproducimos número y título, tal como se cita en el trabajo real.</a:t>
+              <a:t>N1: ¿Y por qué montar una ITC entera solo para una lista? Parece un lío.</a:t>
+            </a:r>
+          </a:p>
+          <a:p>
+            <a:r>
+              <a:t>N2: Es justo al revés, es lo práctico. Las normas cambian a menudo: sale una edición nueva, se retoca otra. Si esa lista estuviera metida dentro del Reglamento, cada vez que cambiara una une habría que reformar el Reglamento entero, y eso es un proceso lento y pesado. Al tener la lista en una ITC aparte, se actualiza con una simple Resolución de la Dirección General de Industria, sin tocar el mueble grande. Piénsalo como un cajón que puedes reordenar cuando quieras sin desmontar el armario. Por eso la lista siempre está al día.</a:t>
             </a:r>
           </a:p>
         </p:txBody>
@@ -1654,12 +1721,12 @@
           <a:lstStyle/>
           <a:p>
             <a:r>
-              <a:t>N1: Y cuando sacan una edición nueva, ¿de un día para otro la vieja ya no vale?</a:t>
-            </a:r>
-          </a:p>
-          <a:p>
-            <a:r>
-              <a:t>N2: No, no es un corte seco, y esto tranquiliza mucho. Cuando sale una edición nueva, hay un tramo en el que valen las dos a la vez: es el periodo de coexistencia. Durante ese tiempo, un trabajo hecho con la edición anterior sigue siendo válido, hasta una fecha en la que la vieja deja de aplicar. Quien fija esas fechas, desde cuándo vale la nueva y hasta cuándo la antigua, es la Resolución de actualización. La regla práctica para ti es sencilla: usa siempre la edición vigente. Así nunca te pillan con una norma caducada.</a:t>
+              <a:t>N1: Una cosa que me chirría: en el curso siempre veo une seis mil seiscientos setenta sin fecha. ¿Es un despiste?</a:t>
+            </a:r>
+          </a:p>
+          <a:p>
+            <a:r>
+              <a:t>N2: No, es exactamente como manda el Reglamento, y cae en el examen. Fíjate en la lógica: si una ITC citara la norma con su año, en cuanto saliera una edición nueva la ITC quedaría anticuada. Para evitarlo, las ITC citan la norma sin año. El único sitio donde el año figura de forma oficial es la ICG once, junto al número y el título. ¿Y qué haces tú en obra? Usar siempre la edición vigente según el listado actualizado. Por eso en las tablas del curso tampoco ponemos año: reproducimos número y título, tal como se cita en el trabajo real.</a:t>
             </a:r>
           </a:p>
         </p:txBody>
@@ -1729,12 +1796,12 @@
           <a:lstStyle/>
           <a:p>
             <a:r>
-              <a:t>N1: Me lío con tanta sigla: une, une-en, une-en iso... ¿qué diferencia hay?</a:t>
-            </a:r>
-          </a:p>
-          <a:p>
-            <a:r>
-              <a:t>N2: Hay un truco muy fácil: cuantas más siglas, más lejos viene la norma. Une, a secas, es de casa, española, la elabora AENOR. Une-en es europea, una norma europea adoptada como española. Une-en iso es internacional, del mundo entero, iso adoptada como europea y española. Y une-cen barra te erre es un informe técnico europeo, documentación de apoyo, no una especificación de obligado cumplimiento pleno como una norma. Fíjate que todas empiezan por une: al final todas son españolas. Lo que cambia es el origen, y el origen te dice el alcance. Si te preguntan si la seis mil seiscientos setenta es europea, no: la serie sesenta mil es nacional.</a:t>
+              <a:t>N1: Y cuando sacan una edición nueva, ¿de un día para otro la vieja ya no vale?</a:t>
+            </a:r>
+          </a:p>
+          <a:p>
+            <a:r>
+              <a:t>N2: No, no es un corte seco, y esto tranquiliza mucho. Cuando sale una edición nueva, hay un tramo en el que valen las dos a la vez: es el periodo de coexistencia. Durante ese tiempo, un trabajo hecho con la edición anterior sigue siendo válido, hasta una fecha en la que la vieja deja de aplicar. Quien fija esas fechas, desde cuándo vale la nueva y hasta cuándo la antigua, es la Resolución de actualización. La regla práctica para ti es sencilla: usa siempre la edición vigente. Así nunca te pillan con una norma caducada.</a:t>
             </a:r>
           </a:p>
         </p:txBody>
@@ -1804,12 +1871,12 @@
           <a:lstStyle/>
           <a:p>
             <a:r>
-              <a:t>N1: Dentro de las nacionales, ¿cómo me oriento entre tantos números?</a:t>
-            </a:r>
-          </a:p>
-          <a:p>
-            <a:r>
-              <a:t>N2: Agrúpalas por lo que hacen, no las memorices sueltas. La serie sesenta mil es la de las normas nacionales del gas. Dentro, hay tres bloques que te conviene distinguir. Distribución, la red de la calle: seis mil trescientos diez, trescientos once y trescientos doce, según la presión. Instalaciones receptoras, lo que va dentro del edificio: seis mil seiscientos veinte para gas natural por encima de cinco bar, y seis mil seiscientos setenta hasta cinco bar. Y luego el GLP en depósito, la seis mil doscientos cincuenta. La ciento veintitrés mil uno es chimeneas. Con esos bloques ya no te pierdes.</a:t>
+              <a:t>N1: Me lío con tanta sigla: une, une-en, une-en iso... ¿qué diferencia hay?</a:t>
+            </a:r>
+          </a:p>
+          <a:p>
+            <a:r>
+              <a:t>N2: Hay un truco muy fácil: cuantas más siglas, más lejos viene la norma. Une, a secas, es de casa, española, la elabora AENOR. Une-en es europea, una norma europea adoptada como española. Une-en iso es internacional, del mundo entero, iso adoptada como europea y española. Y une-cen barra te erre es un informe técnico europeo, documentación de apoyo, no una especificación de obligado cumplimiento pleno como una norma. Fíjate que todas empiezan por une: al final todas son españolas. Lo que cambia es el origen, y el origen te dice el alcance. Si te preguntan si la seis mil seiscientos setenta es europea, no: la serie sesenta mil es nacional.</a:t>
             </a:r>
           </a:p>
         </p:txBody>
@@ -4884,7 +4951,7 @@
             <a:r>
               <a:rPr sz="1400" b="1" i="0">
                 <a:solidFill>
-                  <a:srgbClr val="CADCFC"/>
+                  <a:srgbClr val="F4A24C"/>
                 </a:solidFill>
                 <a:latin typeface="Montserrat"/>
               </a:rPr>
@@ -4895,13 +4962,57 @@
       </p:sp>
       <p:sp>
         <p:nvSpPr>
-          <p:cNvPr id="4" name="TextBox 3"/>
+          <p:cNvPr id="4" name="Rounded Rectangle 3"/>
+          <p:cNvSpPr/>
+          <p:nvPr/>
+        </p:nvSpPr>
+        <p:spPr>
+          <a:xfrm>
+            <a:off x="868680" y="2057400"/>
+            <a:ext cx="1463040" cy="82296"/>
+          </a:xfrm>
+          <a:prstGeom prst="roundRect">
+            <a:avLst/>
+          </a:prstGeom>
+          <a:solidFill>
+            <a:srgbClr val="E8801A"/>
+          </a:solidFill>
+          <a:ln>
+            <a:noFill/>
+          </a:ln>
+          <a:effectLst/>
+        </p:spPr>
+        <p:style>
+          <a:lnRef idx="1">
+            <a:schemeClr val="accent1"/>
+          </a:lnRef>
+          <a:fillRef idx="3">
+            <a:schemeClr val="accent1"/>
+          </a:fillRef>
+          <a:effectRef idx="2">
+            <a:schemeClr val="accent1"/>
+          </a:effectRef>
+          <a:fontRef idx="minor">
+            <a:schemeClr val="lt1"/>
+          </a:fontRef>
+        </p:style>
+        <p:txBody>
+          <a:bodyPr rtlCol="0" anchor="ctr"/>
+          <a:lstStyle/>
+          <a:p>
+            <a:pPr algn="ctr"/>
+          </a:p>
+        </p:txBody>
+      </p:sp>
+      <p:sp>
+        <p:nvSpPr>
+          <p:cNvPr id="5" name="TextBox 4"/>
           <p:cNvSpPr txBox="1"/>
           <p:nvPr/>
         </p:nvSpPr>
         <p:spPr>
           <a:xfrm>
-            <a:off x="822960" y="2194560"/>
+            <a:off x="822960" y="2286000"/>
             <a:ext cx="10515600" cy="2011680"/>
           </a:xfrm>
           <a:prstGeom prst="rect">
@@ -4940,7 +5051,7 @@
       </p:sp>
       <p:sp>
         <p:nvSpPr>
-          <p:cNvPr id="5" name="TextBox 4"/>
+          <p:cNvPr id="6" name="TextBox 5"/>
           <p:cNvSpPr txBox="1"/>
           <p:nvPr/>
         </p:nvSpPr>
@@ -5064,7 +5175,7 @@
                 </a:solidFill>
                 <a:latin typeface="Montserrat"/>
               </a:rPr>
-              <a:t>010 / 018</a:t>
+              <a:t>010 / 019</a:t>
             </a:r>
           </a:p>
         </p:txBody>
@@ -5112,7 +5223,7 @@
         <p:spPr>
           <a:xfrm>
             <a:off x="822960" y="457200"/>
-            <a:ext cx="8229600" cy="365760"/>
+            <a:ext cx="10058400" cy="365760"/>
           </a:xfrm>
           <a:prstGeom prst="rect">
             <a:avLst/>
@@ -5126,13 +5237,13 @@
           <a:lstStyle/>
           <a:p>
             <a:r>
-              <a:rPr sz="1200" b="1" i="0">
-                <a:solidFill>
-                  <a:srgbClr val="64748B"/>
-                </a:solidFill>
-                <a:latin typeface="Montserrat"/>
-              </a:rPr>
-              <a:t>TU CATEGORÍA B</a:t>
+              <a:rPr sz="1300" b="1" i="0">
+                <a:solidFill>
+                  <a:srgbClr val="E8801A"/>
+                </a:solidFill>
+                <a:latin typeface="Montserrat"/>
+              </a:rPr>
+              <a:t>SERIE 60XXX Y 123XXX</a:t>
             </a:r>
           </a:p>
         </p:txBody>
@@ -5160,26 +5271,70 @@
           <a:lstStyle/>
           <a:p>
             <a:r>
-              <a:rPr sz="2700" b="1" i="0">
+              <a:rPr sz="2800" b="1" i="0">
                 <a:solidFill>
                   <a:srgbClr val="1E2761"/>
                 </a:solidFill>
                 <a:latin typeface="Montserrat"/>
               </a:rPr>
-              <a:t>La serie 60670, tu pan de cada día</a:t>
-            </a:r>
-          </a:p>
-        </p:txBody>
-      </p:sp>
-      <p:sp>
-        <p:nvSpPr>
-          <p:cNvPr id="7" name="TextBox 6"/>
+              <a:t>Normas UNE nacionales</a:t>
+            </a:r>
+          </a:p>
+        </p:txBody>
+      </p:sp>
+      <p:sp>
+        <p:nvSpPr>
+          <p:cNvPr id="7" name="Rounded Rectangle 6"/>
+          <p:cNvSpPr/>
+          <p:nvPr/>
+        </p:nvSpPr>
+        <p:spPr>
+          <a:xfrm>
+            <a:off x="868680" y="1627632"/>
+            <a:ext cx="2011680" cy="73152"/>
+          </a:xfrm>
+          <a:prstGeom prst="roundRect">
+            <a:avLst/>
+          </a:prstGeom>
+          <a:solidFill>
+            <a:srgbClr val="E8801A"/>
+          </a:solidFill>
+          <a:ln>
+            <a:noFill/>
+          </a:ln>
+          <a:effectLst/>
+        </p:spPr>
+        <p:style>
+          <a:lnRef idx="1">
+            <a:schemeClr val="accent1"/>
+          </a:lnRef>
+          <a:fillRef idx="3">
+            <a:schemeClr val="accent1"/>
+          </a:fillRef>
+          <a:effectRef idx="2">
+            <a:schemeClr val="accent1"/>
+          </a:effectRef>
+          <a:fontRef idx="minor">
+            <a:schemeClr val="lt1"/>
+          </a:fontRef>
+        </p:style>
+        <p:txBody>
+          <a:bodyPr rtlCol="0" anchor="ctr"/>
+          <a:lstStyle/>
+          <a:p>
+            <a:pPr algn="ctr"/>
+          </a:p>
+        </p:txBody>
+      </p:sp>
+      <p:sp>
+        <p:nvSpPr>
+          <p:cNvPr id="8" name="TextBox 7"/>
           <p:cNvSpPr txBox="1"/>
           <p:nvPr/>
         </p:nvSpPr>
         <p:spPr>
           <a:xfrm>
-            <a:off x="822960" y="1920240"/>
+            <a:off x="822960" y="1965960"/>
             <a:ext cx="4983480" cy="4206240"/>
           </a:xfrm>
           <a:prstGeom prst="rect">
@@ -5195,17 +5350,17 @@
           <a:p>
             <a:pPr>
               <a:spcAft>
-                <a:spcPts val="1000"/>
+                <a:spcPts val="1100"/>
               </a:spcAft>
             </a:pPr>
             <a:r>
               <a:rPr sz="1600" b="1" i="0">
                 <a:solidFill>
-                  <a:srgbClr val="2E3A80"/>
-                </a:solidFill>
-                <a:latin typeface="Montserrat"/>
-              </a:rPr>
-              <a:t>•  </a:t>
+                  <a:srgbClr val="E8801A"/>
+                </a:solidFill>
+                <a:latin typeface="Montserrat"/>
+              </a:rPr>
+              <a:t>▸  </a:t>
             </a:r>
             <a:r>
               <a:rPr sz="1600" b="0" i="0">
@@ -5214,23 +5369,23 @@
                 </a:solidFill>
                 <a:latin typeface="Montserrat"/>
               </a:rPr>
-              <a:t>Instalaciones receptoras hasta 5 bar</a:t>
+              <a:t>60xxx: núcleo nacional del gas</a:t>
             </a:r>
           </a:p>
           <a:p>
             <a:pPr>
               <a:spcAft>
-                <a:spcPts val="1000"/>
+                <a:spcPts val="1100"/>
               </a:spcAft>
             </a:pPr>
             <a:r>
               <a:rPr sz="1600" b="1" i="0">
                 <a:solidFill>
-                  <a:srgbClr val="2E3A80"/>
-                </a:solidFill>
-                <a:latin typeface="Montserrat"/>
-              </a:rPr>
-              <a:t>•  </a:t>
+                  <a:srgbClr val="E8801A"/>
+                </a:solidFill>
+                <a:latin typeface="Montserrat"/>
+              </a:rPr>
+              <a:t>▸  </a:t>
             </a:r>
             <a:r>
               <a:rPr sz="1600" b="0" i="0">
@@ -5239,23 +5394,23 @@
                 </a:solidFill>
                 <a:latin typeface="Montserrat"/>
               </a:rPr>
-              <a:t>Lo doméstico y comercial</a:t>
+              <a:t>Distribución: 60310 / 60311 / 60312</a:t>
             </a:r>
           </a:p>
           <a:p>
             <a:pPr>
               <a:spcAft>
-                <a:spcPts val="1000"/>
+                <a:spcPts val="1100"/>
               </a:spcAft>
             </a:pPr>
             <a:r>
               <a:rPr sz="1600" b="1" i="0">
                 <a:solidFill>
-                  <a:srgbClr val="2E3A80"/>
-                </a:solidFill>
-                <a:latin typeface="Montserrat"/>
-              </a:rPr>
-              <a:t>•  </a:t>
+                  <a:srgbClr val="E8801A"/>
+                </a:solidFill>
+                <a:latin typeface="Montserrat"/>
+              </a:rPr>
+              <a:t>▸  </a:t>
             </a:r>
             <a:r>
               <a:rPr sz="1600" b="0" i="0">
@@ -5264,23 +5419,23 @@
                 </a:solidFill>
                 <a:latin typeface="Montserrat"/>
               </a:rPr>
-              <a:t>Troceada en 13 partes</a:t>
+              <a:t>Receptoras y GLP: 60620, 60670, 60250</a:t>
             </a:r>
           </a:p>
           <a:p>
             <a:pPr>
               <a:spcAft>
-                <a:spcPts val="1000"/>
+                <a:spcPts val="1100"/>
               </a:spcAft>
             </a:pPr>
             <a:r>
               <a:rPr sz="1600" b="1" i="0">
                 <a:solidFill>
-                  <a:srgbClr val="2E3A80"/>
-                </a:solidFill>
-                <a:latin typeface="Montserrat"/>
-              </a:rPr>
-              <a:t>•  </a:t>
+                  <a:srgbClr val="E8801A"/>
+                </a:solidFill>
+                <a:latin typeface="Montserrat"/>
+              </a:rPr>
+              <a:t>▸  </a:t>
             </a:r>
             <a:r>
               <a:rPr sz="1600" b="0" i="0">
@@ -5289,14 +5444,14 @@
                 </a:solidFill>
                 <a:latin typeface="Montserrat"/>
               </a:rPr>
-              <a:t>60670-8: estanquidad · 60670-6: ventilación</a:t>
-            </a:r>
-          </a:p>
-        </p:txBody>
-      </p:sp>
-      <p:sp>
-        <p:nvSpPr>
-          <p:cNvPr id="8" name="imgph" descr="IMGQ:technician checking gas boiler in kitchen"/>
+              <a:t>Chimeneas: 123001</a:t>
+            </a:r>
+          </a:p>
+        </p:txBody>
+      </p:sp>
+      <p:sp>
+        <p:nvSpPr>
+          <p:cNvPr id="9" name="imgph" descr="IMGQ:gas meter cabinet outdoor wall"/>
           <p:cNvSpPr/>
           <p:nvPr/>
         </p:nvSpPr>
@@ -5342,7 +5497,7 @@
       </p:sp>
       <p:sp>
         <p:nvSpPr>
-          <p:cNvPr id="9" name="TextBox 8"/>
+          <p:cNvPr id="10" name="TextBox 9"/>
           <p:cNvSpPr txBox="1"/>
           <p:nvPr/>
         </p:nvSpPr>
@@ -5382,7 +5537,7 @@
                 </a:solidFill>
                 <a:latin typeface="Montserrat"/>
               </a:rPr>
-              <a:t>technician checking gas boiler in kitchen</a:t>
+              <a:t>gas meter cabinet outdoor wall</a:t>
             </a:r>
           </a:p>
         </p:txBody>
@@ -5479,7 +5634,7 @@
                 </a:solidFill>
                 <a:latin typeface="Montserrat"/>
               </a:rPr>
-              <a:t>011 / 018</a:t>
+              <a:t>011 / 019</a:t>
             </a:r>
           </a:p>
         </p:txBody>
@@ -5527,7 +5682,7 @@
         <p:spPr>
           <a:xfrm>
             <a:off x="822960" y="457200"/>
-            <a:ext cx="8229600" cy="365760"/>
+            <a:ext cx="10058400" cy="365760"/>
           </a:xfrm>
           <a:prstGeom prst="rect">
             <a:avLst/>
@@ -5541,13 +5696,13 @@
           <a:lstStyle/>
           <a:p>
             <a:r>
-              <a:rPr sz="1200" b="1" i="0">
-                <a:solidFill>
-                  <a:srgbClr val="64748B"/>
-                </a:solidFill>
-                <a:latin typeface="Montserrat"/>
-              </a:rPr>
-              <a:t>NO LAS CONFUNDAS</a:t>
+              <a:rPr sz="1300" b="1" i="0">
+                <a:solidFill>
+                  <a:srgbClr val="E8801A"/>
+                </a:solidFill>
+                <a:latin typeface="Montserrat"/>
+              </a:rPr>
+              <a:t>TU CATEGORÍA B</a:t>
             </a:r>
           </a:p>
         </p:txBody>
@@ -5575,26 +5730,70 @@
           <a:lstStyle/>
           <a:p>
             <a:r>
-              <a:rPr sz="2700" b="1" i="0">
+              <a:rPr sz="2800" b="1" i="0">
                 <a:solidFill>
                   <a:srgbClr val="1E2761"/>
                 </a:solidFill>
                 <a:latin typeface="Montserrat"/>
               </a:rPr>
-              <a:t>MOP: la presión lo decide todo</a:t>
-            </a:r>
-          </a:p>
-        </p:txBody>
-      </p:sp>
-      <p:sp>
-        <p:nvSpPr>
-          <p:cNvPr id="7" name="TextBox 6"/>
+              <a:t>La serie 60670, tu pan de cada día</a:t>
+            </a:r>
+          </a:p>
+        </p:txBody>
+      </p:sp>
+      <p:sp>
+        <p:nvSpPr>
+          <p:cNvPr id="7" name="Rounded Rectangle 6"/>
+          <p:cNvSpPr/>
+          <p:nvPr/>
+        </p:nvSpPr>
+        <p:spPr>
+          <a:xfrm>
+            <a:off x="868680" y="1627632"/>
+            <a:ext cx="2011680" cy="73152"/>
+          </a:xfrm>
+          <a:prstGeom prst="roundRect">
+            <a:avLst/>
+          </a:prstGeom>
+          <a:solidFill>
+            <a:srgbClr val="E8801A"/>
+          </a:solidFill>
+          <a:ln>
+            <a:noFill/>
+          </a:ln>
+          <a:effectLst/>
+        </p:spPr>
+        <p:style>
+          <a:lnRef idx="1">
+            <a:schemeClr val="accent1"/>
+          </a:lnRef>
+          <a:fillRef idx="3">
+            <a:schemeClr val="accent1"/>
+          </a:fillRef>
+          <a:effectRef idx="2">
+            <a:schemeClr val="accent1"/>
+          </a:effectRef>
+          <a:fontRef idx="minor">
+            <a:schemeClr val="lt1"/>
+          </a:fontRef>
+        </p:style>
+        <p:txBody>
+          <a:bodyPr rtlCol="0" anchor="ctr"/>
+          <a:lstStyle/>
+          <a:p>
+            <a:pPr algn="ctr"/>
+          </a:p>
+        </p:txBody>
+      </p:sp>
+      <p:sp>
+        <p:nvSpPr>
+          <p:cNvPr id="8" name="TextBox 7"/>
           <p:cNvSpPr txBox="1"/>
           <p:nvPr/>
         </p:nvSpPr>
         <p:spPr>
           <a:xfrm>
-            <a:off x="822960" y="1920240"/>
+            <a:off x="822960" y="1965960"/>
             <a:ext cx="4983480" cy="4206240"/>
           </a:xfrm>
           <a:prstGeom prst="rect">
@@ -5610,17 +5809,17 @@
           <a:p>
             <a:pPr>
               <a:spcAft>
-                <a:spcPts val="1000"/>
+                <a:spcPts val="1100"/>
               </a:spcAft>
             </a:pPr>
             <a:r>
               <a:rPr sz="1600" b="1" i="0">
                 <a:solidFill>
-                  <a:srgbClr val="2E3A80"/>
-                </a:solidFill>
-                <a:latin typeface="Montserrat"/>
-              </a:rPr>
-              <a:t>•  </a:t>
+                  <a:srgbClr val="E8801A"/>
+                </a:solidFill>
+                <a:latin typeface="Montserrat"/>
+              </a:rPr>
+              <a:t>▸  </a:t>
             </a:r>
             <a:r>
               <a:rPr sz="1600" b="0" i="0">
@@ -5629,23 +5828,23 @@
                 </a:solidFill>
                 <a:latin typeface="Montserrat"/>
               </a:rPr>
-              <a:t>MOP = máxima presión de operación</a:t>
+              <a:t>Instalaciones receptoras hasta 5 bar</a:t>
             </a:r>
           </a:p>
           <a:p>
             <a:pPr>
               <a:spcAft>
-                <a:spcPts val="1000"/>
+                <a:spcPts val="1100"/>
               </a:spcAft>
             </a:pPr>
             <a:r>
               <a:rPr sz="1600" b="1" i="0">
                 <a:solidFill>
-                  <a:srgbClr val="2E3A80"/>
-                </a:solidFill>
-                <a:latin typeface="Montserrat"/>
-              </a:rPr>
-              <a:t>•  </a:t>
+                  <a:srgbClr val="E8801A"/>
+                </a:solidFill>
+                <a:latin typeface="Montserrat"/>
+              </a:rPr>
+              <a:t>▸  </a:t>
             </a:r>
             <a:r>
               <a:rPr sz="1600" b="0" i="0">
@@ -5654,23 +5853,23 @@
                 </a:solidFill>
                 <a:latin typeface="Montserrat"/>
               </a:rPr>
-              <a:t>60670: hasta 5 bar (lo tuyo)</a:t>
+              <a:t>Lo doméstico y comercial</a:t>
             </a:r>
           </a:p>
           <a:p>
             <a:pPr>
               <a:spcAft>
-                <a:spcPts val="1000"/>
+                <a:spcPts val="1100"/>
               </a:spcAft>
             </a:pPr>
             <a:r>
               <a:rPr sz="1600" b="1" i="0">
                 <a:solidFill>
-                  <a:srgbClr val="2E3A80"/>
-                </a:solidFill>
-                <a:latin typeface="Montserrat"/>
-              </a:rPr>
-              <a:t>•  </a:t>
+                  <a:srgbClr val="E8801A"/>
+                </a:solidFill>
+                <a:latin typeface="Montserrat"/>
+              </a:rPr>
+              <a:t>▸  </a:t>
             </a:r>
             <a:r>
               <a:rPr sz="1600" b="0" i="0">
@@ -5679,23 +5878,23 @@
                 </a:solidFill>
                 <a:latin typeface="Montserrat"/>
               </a:rPr>
-              <a:t>60620: más de 5 bar (industrial)</a:t>
+              <a:t>Troceada en 13 partes</a:t>
             </a:r>
           </a:p>
           <a:p>
             <a:pPr>
               <a:spcAft>
-                <a:spcPts val="1000"/>
+                <a:spcPts val="1100"/>
               </a:spcAft>
             </a:pPr>
             <a:r>
               <a:rPr sz="1600" b="1" i="0">
                 <a:solidFill>
-                  <a:srgbClr val="2E3A80"/>
-                </a:solidFill>
-                <a:latin typeface="Montserrat"/>
-              </a:rPr>
-              <a:t>•  </a:t>
+                  <a:srgbClr val="E8801A"/>
+                </a:solidFill>
+                <a:latin typeface="Montserrat"/>
+              </a:rPr>
+              <a:t>▸  </a:t>
             </a:r>
             <a:r>
               <a:rPr sz="1600" b="0" i="0">
@@ -5704,14 +5903,14 @@
                 </a:solidFill>
                 <a:latin typeface="Montserrat"/>
               </a:rPr>
-              <a:t>310/311/312: distribución, no receptora</a:t>
-            </a:r>
-          </a:p>
-        </p:txBody>
-      </p:sp>
-      <p:sp>
-        <p:nvSpPr>
-          <p:cNvPr id="8" name="imgph" descr="IMGQ:industrial gas pressure regulator station"/>
+              <a:t>60670-8: estanquidad · 60670-6: ventilación</a:t>
+            </a:r>
+          </a:p>
+        </p:txBody>
+      </p:sp>
+      <p:sp>
+        <p:nvSpPr>
+          <p:cNvPr id="9" name="imgph" descr="IMGQ:technician checking gas boiler in kitchen"/>
           <p:cNvSpPr/>
           <p:nvPr/>
         </p:nvSpPr>
@@ -5757,7 +5956,7 @@
       </p:sp>
       <p:sp>
         <p:nvSpPr>
-          <p:cNvPr id="9" name="TextBox 8"/>
+          <p:cNvPr id="10" name="TextBox 9"/>
           <p:cNvSpPr txBox="1"/>
           <p:nvPr/>
         </p:nvSpPr>
@@ -5797,7 +5996,7 @@
                 </a:solidFill>
                 <a:latin typeface="Montserrat"/>
               </a:rPr>
-              <a:t>industrial gas pressure regulator station</a:t>
+              <a:t>technician checking gas boiler in kitchen</a:t>
             </a:r>
           </a:p>
         </p:txBody>
@@ -5894,7 +6093,7 @@
                 </a:solidFill>
                 <a:latin typeface="Montserrat"/>
               </a:rPr>
-              <a:t>012 / 018</a:t>
+              <a:t>012 / 019</a:t>
             </a:r>
           </a:p>
         </p:txBody>
@@ -5942,7 +6141,7 @@
         <p:spPr>
           <a:xfrm>
             <a:off x="822960" y="457200"/>
-            <a:ext cx="8229600" cy="365760"/>
+            <a:ext cx="10058400" cy="365760"/>
           </a:xfrm>
           <a:prstGeom prst="rect">
             <a:avLst/>
@@ -5956,13 +6155,13 @@
           <a:lstStyle/>
           <a:p>
             <a:r>
-              <a:rPr sz="1200" b="1" i="0">
-                <a:solidFill>
-                  <a:srgbClr val="64748B"/>
-                </a:solidFill>
-                <a:latin typeface="Montserrat"/>
-              </a:rPr>
-              <a:t>EUROPEAS E INTERNACIONALES</a:t>
+              <a:rPr sz="1300" b="1" i="0">
+                <a:solidFill>
+                  <a:srgbClr val="E8801A"/>
+                </a:solidFill>
+                <a:latin typeface="Montserrat"/>
+              </a:rPr>
+              <a:t>NO LAS CONFUNDAS</a:t>
             </a:r>
           </a:p>
         </p:txBody>
@@ -5990,26 +6189,70 @@
           <a:lstStyle/>
           <a:p>
             <a:r>
-              <a:rPr sz="2700" b="1" i="0">
+              <a:rPr sz="2800" b="1" i="0">
                 <a:solidFill>
                   <a:srgbClr val="1E2761"/>
                 </a:solidFill>
                 <a:latin typeface="Montserrat"/>
               </a:rPr>
-              <a:t>Normas UNE-EN, ISO y CEN/TR</a:t>
-            </a:r>
-          </a:p>
-        </p:txBody>
-      </p:sp>
-      <p:sp>
-        <p:nvSpPr>
-          <p:cNvPr id="7" name="TextBox 6"/>
+              <a:t>MOP: la presión lo decide todo</a:t>
+            </a:r>
+          </a:p>
+        </p:txBody>
+      </p:sp>
+      <p:sp>
+        <p:nvSpPr>
+          <p:cNvPr id="7" name="Rounded Rectangle 6"/>
+          <p:cNvSpPr/>
+          <p:nvPr/>
+        </p:nvSpPr>
+        <p:spPr>
+          <a:xfrm>
+            <a:off x="868680" y="1627632"/>
+            <a:ext cx="2011680" cy="73152"/>
+          </a:xfrm>
+          <a:prstGeom prst="roundRect">
+            <a:avLst/>
+          </a:prstGeom>
+          <a:solidFill>
+            <a:srgbClr val="E8801A"/>
+          </a:solidFill>
+          <a:ln>
+            <a:noFill/>
+          </a:ln>
+          <a:effectLst/>
+        </p:spPr>
+        <p:style>
+          <a:lnRef idx="1">
+            <a:schemeClr val="accent1"/>
+          </a:lnRef>
+          <a:fillRef idx="3">
+            <a:schemeClr val="accent1"/>
+          </a:fillRef>
+          <a:effectRef idx="2">
+            <a:schemeClr val="accent1"/>
+          </a:effectRef>
+          <a:fontRef idx="minor">
+            <a:schemeClr val="lt1"/>
+          </a:fontRef>
+        </p:style>
+        <p:txBody>
+          <a:bodyPr rtlCol="0" anchor="ctr"/>
+          <a:lstStyle/>
+          <a:p>
+            <a:pPr algn="ctr"/>
+          </a:p>
+        </p:txBody>
+      </p:sp>
+      <p:sp>
+        <p:nvSpPr>
+          <p:cNvPr id="8" name="TextBox 7"/>
           <p:cNvSpPr txBox="1"/>
           <p:nvPr/>
         </p:nvSpPr>
         <p:spPr>
           <a:xfrm>
-            <a:off x="822960" y="1920240"/>
+            <a:off x="822960" y="1965960"/>
             <a:ext cx="4983480" cy="4206240"/>
           </a:xfrm>
           <a:prstGeom prst="rect">
@@ -6025,17 +6268,17 @@
           <a:p>
             <a:pPr>
               <a:spcAft>
-                <a:spcPts val="1000"/>
+                <a:spcPts val="1100"/>
               </a:spcAft>
             </a:pPr>
             <a:r>
               <a:rPr sz="1600" b="1" i="0">
                 <a:solidFill>
-                  <a:srgbClr val="2E3A80"/>
-                </a:solidFill>
-                <a:latin typeface="Montserrat"/>
-              </a:rPr>
-              <a:t>•  </a:t>
+                  <a:srgbClr val="E8801A"/>
+                </a:solidFill>
+                <a:latin typeface="Montserrat"/>
+              </a:rPr>
+              <a:t>▸  </a:t>
             </a:r>
             <a:r>
               <a:rPr sz="1600" b="0" i="0">
@@ -6044,23 +6287,23 @@
                 </a:solidFill>
                 <a:latin typeface="Montserrat"/>
               </a:rPr>
-              <a:t>Distribución europea: 12007, 1594, 12327</a:t>
+              <a:t>MOP = máxima presión de operación</a:t>
             </a:r>
           </a:p>
           <a:p>
             <a:pPr>
               <a:spcAft>
-                <a:spcPts val="1000"/>
+                <a:spcPts val="1100"/>
               </a:spcAft>
             </a:pPr>
             <a:r>
               <a:rPr sz="1600" b="1" i="0">
                 <a:solidFill>
-                  <a:srgbClr val="2E3A80"/>
-                </a:solidFill>
-                <a:latin typeface="Montserrat"/>
-              </a:rPr>
-              <a:t>•  </a:t>
+                  <a:srgbClr val="E8801A"/>
+                </a:solidFill>
+                <a:latin typeface="Montserrat"/>
+              </a:rPr>
+              <a:t>▸  </a:t>
             </a:r>
             <a:r>
               <a:rPr sz="1600" b="0" i="0">
@@ -6069,23 +6312,23 @@
                 </a:solidFill>
                 <a:latin typeface="Montserrat"/>
               </a:rPr>
-              <a:t>Chimeneas: 1856-1, 13384</a:t>
+              <a:t>60670: hasta 5 bar (lo tuyo)</a:t>
             </a:r>
           </a:p>
           <a:p>
             <a:pPr>
               <a:spcAft>
-                <a:spcPts val="1000"/>
+                <a:spcPts val="1100"/>
               </a:spcAft>
             </a:pPr>
             <a:r>
               <a:rPr sz="1600" b="1" i="0">
                 <a:solidFill>
-                  <a:srgbClr val="2E3A80"/>
-                </a:solidFill>
-                <a:latin typeface="Montserrat"/>
-              </a:rPr>
-              <a:t>•  </a:t>
+                  <a:srgbClr val="E8801A"/>
+                </a:solidFill>
+                <a:latin typeface="Montserrat"/>
+              </a:rPr>
+              <a:t>▸  </a:t>
             </a:r>
             <a:r>
               <a:rPr sz="1600" b="0" i="0">
@@ -6094,23 +6337,23 @@
                 </a:solidFill>
                 <a:latin typeface="Montserrat"/>
               </a:rPr>
-              <a:t>Fuego: 1363-1, 13501-1</a:t>
+              <a:t>60620: más de 5 bar (industrial)</a:t>
             </a:r>
           </a:p>
           <a:p>
             <a:pPr>
               <a:spcAft>
-                <a:spcPts val="1000"/>
+                <a:spcPts val="1100"/>
               </a:spcAft>
             </a:pPr>
             <a:r>
               <a:rPr sz="1600" b="1" i="0">
                 <a:solidFill>
-                  <a:srgbClr val="2E3A80"/>
-                </a:solidFill>
-                <a:latin typeface="Montserrat"/>
-              </a:rPr>
-              <a:t>•  </a:t>
+                  <a:srgbClr val="E8801A"/>
+                </a:solidFill>
+                <a:latin typeface="Montserrat"/>
+              </a:rPr>
+              <a:t>▸  </a:t>
             </a:r>
             <a:r>
               <a:rPr sz="1600" b="0" i="0">
@@ -6119,14 +6362,14 @@
                 </a:solidFill>
                 <a:latin typeface="Montserrat"/>
               </a:rPr>
-              <a:t>Calidad: EN ISO 9001</a:t>
-            </a:r>
-          </a:p>
-        </p:txBody>
-      </p:sp>
-      <p:sp>
-        <p:nvSpPr>
-          <p:cNvPr id="8" name="imgph" descr="IMGQ:gas distribution pipeline construction site"/>
+              <a:t>310/311/312: distribución, no receptora</a:t>
+            </a:r>
+          </a:p>
+        </p:txBody>
+      </p:sp>
+      <p:sp>
+        <p:nvSpPr>
+          <p:cNvPr id="9" name="imgph" descr="IMGQ:industrial gas pressure regulator station"/>
           <p:cNvSpPr/>
           <p:nvPr/>
         </p:nvSpPr>
@@ -6172,7 +6415,7 @@
       </p:sp>
       <p:sp>
         <p:nvSpPr>
-          <p:cNvPr id="9" name="TextBox 8"/>
+          <p:cNvPr id="10" name="TextBox 9"/>
           <p:cNvSpPr txBox="1"/>
           <p:nvPr/>
         </p:nvSpPr>
@@ -6212,7 +6455,7 @@
                 </a:solidFill>
                 <a:latin typeface="Montserrat"/>
               </a:rPr>
-              <a:t>gas distribution pipeline construction site</a:t>
+              <a:t>industrial gas pressure regulator station</a:t>
             </a:r>
           </a:p>
         </p:txBody>
@@ -6309,7 +6552,7 @@
                 </a:solidFill>
                 <a:latin typeface="Montserrat"/>
               </a:rPr>
-              <a:t>013 / 018</a:t>
+              <a:t>013 / 019</a:t>
             </a:r>
           </a:p>
         </p:txBody>
@@ -6357,7 +6600,7 @@
         <p:spPr>
           <a:xfrm>
             <a:off x="822960" y="457200"/>
-            <a:ext cx="8229600" cy="365760"/>
+            <a:ext cx="10058400" cy="365760"/>
           </a:xfrm>
           <a:prstGeom prst="rect">
             <a:avLst/>
@@ -6371,13 +6614,13 @@
           <a:lstStyle/>
           <a:p>
             <a:r>
-              <a:rPr sz="1200" b="1" i="0">
-                <a:solidFill>
-                  <a:srgbClr val="64748B"/>
-                </a:solidFill>
-                <a:latin typeface="Montserrat"/>
-              </a:rPr>
-              <a:t>LA REINA DE LAS CITAS</a:t>
+              <a:rPr sz="1300" b="1" i="0">
+                <a:solidFill>
+                  <a:srgbClr val="E8801A"/>
+                </a:solidFill>
+                <a:latin typeface="Montserrat"/>
+              </a:rPr>
+              <a:t>EUROPEAS E INTERNACIONALES</a:t>
             </a:r>
           </a:p>
         </p:txBody>
@@ -6405,26 +6648,70 @@
           <a:lstStyle/>
           <a:p>
             <a:r>
-              <a:rPr sz="2700" b="1" i="0">
+              <a:rPr sz="2800" b="1" i="0">
                 <a:solidFill>
                   <a:srgbClr val="1E2761"/>
                 </a:solidFill>
                 <a:latin typeface="Montserrat"/>
               </a:rPr>
-              <a:t>UNE-EN 437 y CEN/TR 1749</a:t>
-            </a:r>
-          </a:p>
-        </p:txBody>
-      </p:sp>
-      <p:sp>
-        <p:nvSpPr>
-          <p:cNvPr id="7" name="TextBox 6"/>
+              <a:t>Normas UNE-EN, ISO y CEN/TR</a:t>
+            </a:r>
+          </a:p>
+        </p:txBody>
+      </p:sp>
+      <p:sp>
+        <p:nvSpPr>
+          <p:cNvPr id="7" name="Rounded Rectangle 6"/>
+          <p:cNvSpPr/>
+          <p:nvPr/>
+        </p:nvSpPr>
+        <p:spPr>
+          <a:xfrm>
+            <a:off x="868680" y="1627632"/>
+            <a:ext cx="2011680" cy="73152"/>
+          </a:xfrm>
+          <a:prstGeom prst="roundRect">
+            <a:avLst/>
+          </a:prstGeom>
+          <a:solidFill>
+            <a:srgbClr val="E8801A"/>
+          </a:solidFill>
+          <a:ln>
+            <a:noFill/>
+          </a:ln>
+          <a:effectLst/>
+        </p:spPr>
+        <p:style>
+          <a:lnRef idx="1">
+            <a:schemeClr val="accent1"/>
+          </a:lnRef>
+          <a:fillRef idx="3">
+            <a:schemeClr val="accent1"/>
+          </a:fillRef>
+          <a:effectRef idx="2">
+            <a:schemeClr val="accent1"/>
+          </a:effectRef>
+          <a:fontRef idx="minor">
+            <a:schemeClr val="lt1"/>
+          </a:fontRef>
+        </p:style>
+        <p:txBody>
+          <a:bodyPr rtlCol="0" anchor="ctr"/>
+          <a:lstStyle/>
+          <a:p>
+            <a:pPr algn="ctr"/>
+          </a:p>
+        </p:txBody>
+      </p:sp>
+      <p:sp>
+        <p:nvSpPr>
+          <p:cNvPr id="8" name="TextBox 7"/>
           <p:cNvSpPr txBox="1"/>
           <p:nvPr/>
         </p:nvSpPr>
         <p:spPr>
           <a:xfrm>
-            <a:off x="822960" y="1920240"/>
+            <a:off x="822960" y="1965960"/>
             <a:ext cx="4983480" cy="4206240"/>
           </a:xfrm>
           <a:prstGeom prst="rect">
@@ -6440,17 +6727,17 @@
           <a:p>
             <a:pPr>
               <a:spcAft>
-                <a:spcPts val="1000"/>
+                <a:spcPts val="1100"/>
               </a:spcAft>
             </a:pPr>
             <a:r>
               <a:rPr sz="1600" b="1" i="0">
                 <a:solidFill>
-                  <a:srgbClr val="2E3A80"/>
-                </a:solidFill>
-                <a:latin typeface="Montserrat"/>
-              </a:rPr>
-              <a:t>•  </a:t>
+                  <a:srgbClr val="E8801A"/>
+                </a:solidFill>
+                <a:latin typeface="Montserrat"/>
+              </a:rPr>
+              <a:t>▸  </a:t>
             </a:r>
             <a:r>
               <a:rPr sz="1600" b="0" i="0">
@@ -6459,23 +6746,23 @@
                 </a:solidFill>
                 <a:latin typeface="Montserrat"/>
               </a:rPr>
-              <a:t>437: las 3 familias de gas</a:t>
+              <a:t>Distribución europea: 12007, 1594, 12327</a:t>
             </a:r>
           </a:p>
           <a:p>
             <a:pPr>
               <a:spcAft>
-                <a:spcPts val="1000"/>
+                <a:spcPts val="1100"/>
               </a:spcAft>
             </a:pPr>
             <a:r>
               <a:rPr sz="1600" b="1" i="0">
                 <a:solidFill>
-                  <a:srgbClr val="2E3A80"/>
-                </a:solidFill>
-                <a:latin typeface="Montserrat"/>
-              </a:rPr>
-              <a:t>•  </a:t>
+                  <a:srgbClr val="E8801A"/>
+                </a:solidFill>
+                <a:latin typeface="Montserrat"/>
+              </a:rPr>
+              <a:t>▸  </a:t>
             </a:r>
             <a:r>
               <a:rPr sz="1600" b="0" i="0">
@@ -6484,23 +6771,23 @@
                 </a:solidFill>
                 <a:latin typeface="Montserrat"/>
               </a:rPr>
-              <a:t>1.ª manufacturado · 2.ª natural · 3.ª GLP</a:t>
+              <a:t>Chimeneas: 1856-1, 13384</a:t>
             </a:r>
           </a:p>
           <a:p>
             <a:pPr>
               <a:spcAft>
-                <a:spcPts val="1000"/>
+                <a:spcPts val="1100"/>
               </a:spcAft>
             </a:pPr>
             <a:r>
               <a:rPr sz="1600" b="1" i="0">
                 <a:solidFill>
-                  <a:srgbClr val="2E3A80"/>
-                </a:solidFill>
-                <a:latin typeface="Montserrat"/>
-              </a:rPr>
-              <a:t>•  </a:t>
+                  <a:srgbClr val="E8801A"/>
+                </a:solidFill>
+                <a:latin typeface="Montserrat"/>
+              </a:rPr>
+              <a:t>▸  </a:t>
             </a:r>
             <a:r>
               <a:rPr sz="1600" b="0" i="0">
@@ -6509,23 +6796,23 @@
                 </a:solidFill>
                 <a:latin typeface="Montserrat"/>
               </a:rPr>
-              <a:t>1749: tipos de aparato A, B, C</a:t>
+              <a:t>Fuego: 1363-1, 13501-1</a:t>
             </a:r>
           </a:p>
           <a:p>
             <a:pPr>
               <a:spcAft>
-                <a:spcPts val="1000"/>
+                <a:spcPts val="1100"/>
               </a:spcAft>
             </a:pPr>
             <a:r>
               <a:rPr sz="1600" b="1" i="0">
                 <a:solidFill>
-                  <a:srgbClr val="2E3A80"/>
-                </a:solidFill>
-                <a:latin typeface="Montserrat"/>
-              </a:rPr>
-              <a:t>•  </a:t>
+                  <a:srgbClr val="E8801A"/>
+                </a:solidFill>
+                <a:latin typeface="Montserrat"/>
+              </a:rPr>
+              <a:t>▸  </a:t>
             </a:r>
             <a:r>
               <a:rPr sz="1600" b="0" i="0">
@@ -6534,14 +6821,14 @@
                 </a:solidFill>
                 <a:latin typeface="Montserrat"/>
               </a:rPr>
-              <a:t>Según cómo evacúan los humos</a:t>
-            </a:r>
-          </a:p>
-        </p:txBody>
-      </p:sp>
-      <p:sp>
-        <p:nvSpPr>
-          <p:cNvPr id="8" name="imgph" descr="IMGQ:blue gas flame on burner"/>
+              <a:t>Calidad: EN ISO 9001</a:t>
+            </a:r>
+          </a:p>
+        </p:txBody>
+      </p:sp>
+      <p:sp>
+        <p:nvSpPr>
+          <p:cNvPr id="9" name="imgph" descr="IMGQ:gas distribution pipeline construction site"/>
           <p:cNvSpPr/>
           <p:nvPr/>
         </p:nvSpPr>
@@ -6587,7 +6874,7 @@
       </p:sp>
       <p:sp>
         <p:nvSpPr>
-          <p:cNvPr id="9" name="TextBox 8"/>
+          <p:cNvPr id="10" name="TextBox 9"/>
           <p:cNvSpPr txBox="1"/>
           <p:nvPr/>
         </p:nvSpPr>
@@ -6627,7 +6914,7 @@
                 </a:solidFill>
                 <a:latin typeface="Montserrat"/>
               </a:rPr>
-              <a:t>blue gas flame on burner</a:t>
+              <a:t>gas distribution pipeline construction site</a:t>
             </a:r>
           </a:p>
         </p:txBody>
@@ -6724,7 +7011,7 @@
                 </a:solidFill>
                 <a:latin typeface="Montserrat"/>
               </a:rPr>
-              <a:t>014 / 018</a:t>
+              <a:t>014 / 019</a:t>
             </a:r>
           </a:p>
         </p:txBody>
@@ -6772,7 +7059,7 @@
         <p:spPr>
           <a:xfrm>
             <a:off x="822960" y="457200"/>
-            <a:ext cx="8229600" cy="365760"/>
+            <a:ext cx="10058400" cy="365760"/>
           </a:xfrm>
           <a:prstGeom prst="rect">
             <a:avLst/>
@@ -6786,13 +7073,13 @@
           <a:lstStyle/>
           <a:p>
             <a:r>
-              <a:rPr sz="1200" b="1" i="0">
-                <a:solidFill>
-                  <a:srgbClr val="64748B"/>
-                </a:solidFill>
-                <a:latin typeface="Montserrat"/>
-              </a:rPr>
-              <a:t>GLP · LO QUE TOCAS CON LAS MANOS</a:t>
+              <a:rPr sz="1300" b="1" i="0">
+                <a:solidFill>
+                  <a:srgbClr val="E8801A"/>
+                </a:solidFill>
+                <a:latin typeface="Montserrat"/>
+              </a:rPr>
+              <a:t>LA REINA DE LAS CITAS</a:t>
             </a:r>
           </a:p>
         </p:txBody>
@@ -6820,26 +7107,70 @@
           <a:lstStyle/>
           <a:p>
             <a:r>
-              <a:rPr sz="2700" b="1" i="0">
+              <a:rPr sz="2800" b="1" i="0">
                 <a:solidFill>
                   <a:srgbClr val="1E2761"/>
                 </a:solidFill>
                 <a:latin typeface="Montserrat"/>
               </a:rPr>
-              <a:t>Reguladores, inversores y mangueras</a:t>
-            </a:r>
-          </a:p>
-        </p:txBody>
-      </p:sp>
-      <p:sp>
-        <p:nvSpPr>
-          <p:cNvPr id="7" name="TextBox 6"/>
+              <a:t>UNE-EN 437 y CEN/TR 1749</a:t>
+            </a:r>
+          </a:p>
+        </p:txBody>
+      </p:sp>
+      <p:sp>
+        <p:nvSpPr>
+          <p:cNvPr id="7" name="Rounded Rectangle 6"/>
+          <p:cNvSpPr/>
+          <p:nvPr/>
+        </p:nvSpPr>
+        <p:spPr>
+          <a:xfrm>
+            <a:off x="868680" y="1627632"/>
+            <a:ext cx="2011680" cy="73152"/>
+          </a:xfrm>
+          <a:prstGeom prst="roundRect">
+            <a:avLst/>
+          </a:prstGeom>
+          <a:solidFill>
+            <a:srgbClr val="E8801A"/>
+          </a:solidFill>
+          <a:ln>
+            <a:noFill/>
+          </a:ln>
+          <a:effectLst/>
+        </p:spPr>
+        <p:style>
+          <a:lnRef idx="1">
+            <a:schemeClr val="accent1"/>
+          </a:lnRef>
+          <a:fillRef idx="3">
+            <a:schemeClr val="accent1"/>
+          </a:fillRef>
+          <a:effectRef idx="2">
+            <a:schemeClr val="accent1"/>
+          </a:effectRef>
+          <a:fontRef idx="minor">
+            <a:schemeClr val="lt1"/>
+          </a:fontRef>
+        </p:style>
+        <p:txBody>
+          <a:bodyPr rtlCol="0" anchor="ctr"/>
+          <a:lstStyle/>
+          <a:p>
+            <a:pPr algn="ctr"/>
+          </a:p>
+        </p:txBody>
+      </p:sp>
+      <p:sp>
+        <p:nvSpPr>
+          <p:cNvPr id="8" name="TextBox 7"/>
           <p:cNvSpPr txBox="1"/>
           <p:nvPr/>
         </p:nvSpPr>
         <p:spPr>
           <a:xfrm>
-            <a:off x="822960" y="1920240"/>
+            <a:off x="822960" y="1965960"/>
             <a:ext cx="4983480" cy="4206240"/>
           </a:xfrm>
           <a:prstGeom prst="rect">
@@ -6855,17 +7186,17 @@
           <a:p>
             <a:pPr>
               <a:spcAft>
-                <a:spcPts val="1000"/>
+                <a:spcPts val="1100"/>
               </a:spcAft>
             </a:pPr>
             <a:r>
               <a:rPr sz="1600" b="1" i="0">
                 <a:solidFill>
-                  <a:srgbClr val="2E3A80"/>
-                </a:solidFill>
-                <a:latin typeface="Montserrat"/>
-              </a:rPr>
-              <a:t>•  </a:t>
+                  <a:srgbClr val="E8801A"/>
+                </a:solidFill>
+                <a:latin typeface="Montserrat"/>
+              </a:rPr>
+              <a:t>▸  </a:t>
             </a:r>
             <a:r>
               <a:rPr sz="1600" b="0" i="0">
@@ -6874,23 +7205,23 @@
                 </a:solidFill>
                 <a:latin typeface="Montserrat"/>
               </a:rPr>
-              <a:t>12864: reguladores</a:t>
+              <a:t>437: las 3 familias de gas</a:t>
             </a:r>
           </a:p>
           <a:p>
             <a:pPr>
               <a:spcAft>
-                <a:spcPts val="1000"/>
+                <a:spcPts val="1100"/>
               </a:spcAft>
             </a:pPr>
             <a:r>
               <a:rPr sz="1600" b="1" i="0">
                 <a:solidFill>
-                  <a:srgbClr val="2E3A80"/>
-                </a:solidFill>
-                <a:latin typeface="Montserrat"/>
-              </a:rPr>
-              <a:t>•  </a:t>
+                  <a:srgbClr val="E8801A"/>
+                </a:solidFill>
+                <a:latin typeface="Montserrat"/>
+              </a:rPr>
+              <a:t>▸  </a:t>
             </a:r>
             <a:r>
               <a:rPr sz="1600" b="0" i="0">
@@ -6899,23 +7230,23 @@
                 </a:solidFill>
                 <a:latin typeface="Montserrat"/>
               </a:rPr>
-              <a:t>13786: inversores automáticos</a:t>
+              <a:t>1.ª manufacturado · 2.ª natural · 3.ª GLP</a:t>
             </a:r>
           </a:p>
           <a:p>
             <a:pPr>
               <a:spcAft>
-                <a:spcPts val="1000"/>
+                <a:spcPts val="1100"/>
               </a:spcAft>
             </a:pPr>
             <a:r>
               <a:rPr sz="1600" b="1" i="0">
                 <a:solidFill>
-                  <a:srgbClr val="2E3A80"/>
-                </a:solidFill>
-                <a:latin typeface="Montserrat"/>
-              </a:rPr>
-              <a:t>•  </a:t>
+                  <a:srgbClr val="E8801A"/>
+                </a:solidFill>
+                <a:latin typeface="Montserrat"/>
+              </a:rPr>
+              <a:t>▸  </a:t>
             </a:r>
             <a:r>
               <a:rPr sz="1600" b="0" i="0">
@@ -6924,23 +7255,23 @@
                 </a:solidFill>
                 <a:latin typeface="Montserrat"/>
               </a:rPr>
-              <a:t>16436: mangueras y tubos flexibles</a:t>
+              <a:t>1749: tipos de aparato A, B, C</a:t>
             </a:r>
           </a:p>
           <a:p>
             <a:pPr>
               <a:spcAft>
-                <a:spcPts val="1000"/>
+                <a:spcPts val="1100"/>
               </a:spcAft>
             </a:pPr>
             <a:r>
               <a:rPr sz="1600" b="1" i="0">
                 <a:solidFill>
-                  <a:srgbClr val="2E3A80"/>
-                </a:solidFill>
-                <a:latin typeface="Montserrat"/>
-              </a:rPr>
-              <a:t>•  </a:t>
+                  <a:srgbClr val="E8801A"/>
+                </a:solidFill>
+                <a:latin typeface="Montserrat"/>
+              </a:rPr>
+              <a:t>▸  </a:t>
             </a:r>
             <a:r>
               <a:rPr sz="1600" b="0" i="0">
@@ -6949,14 +7280,14 @@
                 </a:solidFill>
                 <a:latin typeface="Montserrat"/>
               </a:rPr>
-              <a:t>Manguera agrietada = fuga típica</a:t>
-            </a:r>
-          </a:p>
-        </p:txBody>
-      </p:sp>
-      <p:sp>
-        <p:nvSpPr>
-          <p:cNvPr id="8" name="imgph" descr="IMGQ:gas cylinder with regulator and hose"/>
+              <a:t>Según cómo evacúan los humos</a:t>
+            </a:r>
+          </a:p>
+        </p:txBody>
+      </p:sp>
+      <p:sp>
+        <p:nvSpPr>
+          <p:cNvPr id="9" name="imgph" descr="IMGQ:blue gas flame on burner"/>
           <p:cNvSpPr/>
           <p:nvPr/>
         </p:nvSpPr>
@@ -7002,7 +7333,7 @@
       </p:sp>
       <p:sp>
         <p:nvSpPr>
-          <p:cNvPr id="9" name="TextBox 8"/>
+          <p:cNvPr id="10" name="TextBox 9"/>
           <p:cNvSpPr txBox="1"/>
           <p:nvPr/>
         </p:nvSpPr>
@@ -7042,7 +7373,7 @@
                 </a:solidFill>
                 <a:latin typeface="Montserrat"/>
               </a:rPr>
-              <a:t>gas cylinder with regulator and hose</a:t>
+              <a:t>blue gas flame on burner</a:t>
             </a:r>
           </a:p>
         </p:txBody>
@@ -7139,7 +7470,7 @@
                 </a:solidFill>
                 <a:latin typeface="Montserrat"/>
               </a:rPr>
-              <a:t>015 / 018</a:t>
+              <a:t>015 / 019</a:t>
             </a:r>
           </a:p>
         </p:txBody>
@@ -7187,7 +7518,7 @@
         <p:spPr>
           <a:xfrm>
             <a:off x="822960" y="457200"/>
-            <a:ext cx="8229600" cy="365760"/>
+            <a:ext cx="10058400" cy="365760"/>
           </a:xfrm>
           <a:prstGeom prst="rect">
             <a:avLst/>
@@ -7201,13 +7532,13 @@
           <a:lstStyle/>
           <a:p>
             <a:r>
-              <a:rPr sz="1200" b="1" i="0">
-                <a:solidFill>
-                  <a:srgbClr val="64748B"/>
-                </a:solidFill>
-                <a:latin typeface="Montserrat"/>
-              </a:rPr>
-              <a:t>QUE NO TE LÍEN</a:t>
+              <a:rPr sz="1300" b="1" i="0">
+                <a:solidFill>
+                  <a:srgbClr val="E8801A"/>
+                </a:solidFill>
+                <a:latin typeface="Montserrat"/>
+              </a:rPr>
+              <a:t>GLP · LO QUE TOCAS CON LAS MANOS</a:t>
             </a:r>
           </a:p>
         </p:txBody>
@@ -7235,26 +7566,70 @@
           <a:lstStyle/>
           <a:p>
             <a:r>
-              <a:rPr sz="2700" b="1" i="0">
+              <a:rPr sz="2800" b="1" i="0">
                 <a:solidFill>
                   <a:srgbClr val="1E2761"/>
                 </a:solidFill>
                 <a:latin typeface="Montserrat"/>
               </a:rPr>
-              <a:t>Modificaciones y enmiendas</a:t>
-            </a:r>
-          </a:p>
-        </p:txBody>
-      </p:sp>
-      <p:sp>
-        <p:nvSpPr>
-          <p:cNvPr id="7" name="TextBox 6"/>
+              <a:t>Reguladores, inversores y mangueras</a:t>
+            </a:r>
+          </a:p>
+        </p:txBody>
+      </p:sp>
+      <p:sp>
+        <p:nvSpPr>
+          <p:cNvPr id="7" name="Rounded Rectangle 6"/>
+          <p:cNvSpPr/>
+          <p:nvPr/>
+        </p:nvSpPr>
+        <p:spPr>
+          <a:xfrm>
+            <a:off x="868680" y="1627632"/>
+            <a:ext cx="2011680" cy="73152"/>
+          </a:xfrm>
+          <a:prstGeom prst="roundRect">
+            <a:avLst/>
+          </a:prstGeom>
+          <a:solidFill>
+            <a:srgbClr val="E8801A"/>
+          </a:solidFill>
+          <a:ln>
+            <a:noFill/>
+          </a:ln>
+          <a:effectLst/>
+        </p:spPr>
+        <p:style>
+          <a:lnRef idx="1">
+            <a:schemeClr val="accent1"/>
+          </a:lnRef>
+          <a:fillRef idx="3">
+            <a:schemeClr val="accent1"/>
+          </a:fillRef>
+          <a:effectRef idx="2">
+            <a:schemeClr val="accent1"/>
+          </a:effectRef>
+          <a:fontRef idx="minor">
+            <a:schemeClr val="lt1"/>
+          </a:fontRef>
+        </p:style>
+        <p:txBody>
+          <a:bodyPr rtlCol="0" anchor="ctr"/>
+          <a:lstStyle/>
+          <a:p>
+            <a:pPr algn="ctr"/>
+          </a:p>
+        </p:txBody>
+      </p:sp>
+      <p:sp>
+        <p:nvSpPr>
+          <p:cNvPr id="8" name="TextBox 7"/>
           <p:cNvSpPr txBox="1"/>
           <p:nvPr/>
         </p:nvSpPr>
         <p:spPr>
           <a:xfrm>
-            <a:off x="822960" y="1920240"/>
+            <a:off x="822960" y="1965960"/>
             <a:ext cx="4983480" cy="4206240"/>
           </a:xfrm>
           <a:prstGeom prst="rect">
@@ -7270,17 +7645,17 @@
           <a:p>
             <a:pPr>
               <a:spcAft>
-                <a:spcPts val="1000"/>
+                <a:spcPts val="1100"/>
               </a:spcAft>
             </a:pPr>
             <a:r>
               <a:rPr sz="1600" b="1" i="0">
                 <a:solidFill>
-                  <a:srgbClr val="2E3A80"/>
-                </a:solidFill>
-                <a:latin typeface="Montserrat"/>
-              </a:rPr>
-              <a:t>•  </a:t>
+                  <a:srgbClr val="E8801A"/>
+                </a:solidFill>
+                <a:latin typeface="Montserrat"/>
+              </a:rPr>
+              <a:t>▸  </a:t>
             </a:r>
             <a:r>
               <a:rPr sz="1600" b="0" i="0">
@@ -7289,23 +7664,23 @@
                 </a:solidFill>
                 <a:latin typeface="Montserrat"/>
               </a:rPr>
-              <a:t>/1M y /A1: parche a la norma base</a:t>
+              <a:t>12864: reguladores</a:t>
             </a:r>
           </a:p>
           <a:p>
             <a:pPr>
               <a:spcAft>
-                <a:spcPts val="1000"/>
+                <a:spcPts val="1100"/>
               </a:spcAft>
             </a:pPr>
             <a:r>
               <a:rPr sz="1600" b="1" i="0">
                 <a:solidFill>
-                  <a:srgbClr val="2E3A80"/>
-                </a:solidFill>
-                <a:latin typeface="Montserrat"/>
-              </a:rPr>
-              <a:t>•  </a:t>
+                  <a:srgbClr val="E8801A"/>
+                </a:solidFill>
+                <a:latin typeface="Montserrat"/>
+              </a:rPr>
+              <a:t>▸  </a:t>
             </a:r>
             <a:r>
               <a:rPr sz="1600" b="0" i="0">
@@ -7314,23 +7689,23 @@
                 </a:solidFill>
                 <a:latin typeface="Montserrat"/>
               </a:rPr>
-              <a:t>+A1 y +A2: ya vienen incorporadas</a:t>
+              <a:t>13786: inversores automáticos</a:t>
             </a:r>
           </a:p>
           <a:p>
             <a:pPr>
               <a:spcAft>
-                <a:spcPts val="1000"/>
+                <a:spcPts val="1100"/>
               </a:spcAft>
             </a:pPr>
             <a:r>
               <a:rPr sz="1600" b="1" i="0">
                 <a:solidFill>
-                  <a:srgbClr val="2E3A80"/>
-                </a:solidFill>
-                <a:latin typeface="Montserrat"/>
-              </a:rPr>
-              <a:t>•  </a:t>
+                  <a:srgbClr val="E8801A"/>
+                </a:solidFill>
+                <a:latin typeface="Montserrat"/>
+              </a:rPr>
+              <a:t>▸  </a:t>
             </a:r>
             <a:r>
               <a:rPr sz="1600" b="0" i="0">
@@ -7339,23 +7714,23 @@
                 </a:solidFill>
                 <a:latin typeface="Montserrat"/>
               </a:rPr>
-              <a:t>No son normas nuevas</a:t>
+              <a:t>16436: mangueras y tubos flexibles</a:t>
             </a:r>
           </a:p>
           <a:p>
             <a:pPr>
               <a:spcAft>
-                <a:spcPts val="1000"/>
+                <a:spcPts val="1100"/>
               </a:spcAft>
             </a:pPr>
             <a:r>
               <a:rPr sz="1600" b="1" i="0">
                 <a:solidFill>
-                  <a:srgbClr val="2E3A80"/>
-                </a:solidFill>
-                <a:latin typeface="Montserrat"/>
-              </a:rPr>
-              <a:t>•  </a:t>
+                  <a:srgbClr val="E8801A"/>
+                </a:solidFill>
+                <a:latin typeface="Montserrat"/>
+              </a:rPr>
+              <a:t>▸  </a:t>
             </a:r>
             <a:r>
               <a:rPr sz="1600" b="0" i="0">
@@ -7364,14 +7739,14 @@
                 </a:solidFill>
                 <a:latin typeface="Montserrat"/>
               </a:rPr>
-              <a:t>En el boletín citas la norma base</a:t>
-            </a:r>
-          </a:p>
-        </p:txBody>
-      </p:sp>
-      <p:sp>
-        <p:nvSpPr>
-          <p:cNvPr id="8" name="imgph" descr="IMGQ:hand writing corrections on document"/>
+              <a:t>Manguera agrietada = fuga típica</a:t>
+            </a:r>
+          </a:p>
+        </p:txBody>
+      </p:sp>
+      <p:sp>
+        <p:nvSpPr>
+          <p:cNvPr id="9" name="imgph" descr="IMGQ:gas cylinder with regulator and hose"/>
           <p:cNvSpPr/>
           <p:nvPr/>
         </p:nvSpPr>
@@ -7417,7 +7792,7 @@
       </p:sp>
       <p:sp>
         <p:nvSpPr>
-          <p:cNvPr id="9" name="TextBox 8"/>
+          <p:cNvPr id="10" name="TextBox 9"/>
           <p:cNvSpPr txBox="1"/>
           <p:nvPr/>
         </p:nvSpPr>
@@ -7457,7 +7832,7 @@
                 </a:solidFill>
                 <a:latin typeface="Montserrat"/>
               </a:rPr>
-              <a:t>hand writing corrections on document</a:t>
+              <a:t>gas cylinder with regulator and hose</a:t>
             </a:r>
           </a:p>
         </p:txBody>
@@ -7554,7 +7929,7 @@
                 </a:solidFill>
                 <a:latin typeface="Montserrat"/>
               </a:rPr>
-              <a:t>016 / 018</a:t>
+              <a:t>016 / 019</a:t>
             </a:r>
           </a:p>
         </p:txBody>
@@ -7602,7 +7977,7 @@
         <p:spPr>
           <a:xfrm>
             <a:off x="822960" y="457200"/>
-            <a:ext cx="8229600" cy="365760"/>
+            <a:ext cx="10058400" cy="365760"/>
           </a:xfrm>
           <a:prstGeom prst="rect">
             <a:avLst/>
@@ -7616,13 +7991,13 @@
           <a:lstStyle/>
           <a:p>
             <a:r>
-              <a:rPr sz="1200" b="1" i="0">
-                <a:solidFill>
-                  <a:srgbClr val="64748B"/>
-                </a:solidFill>
-                <a:latin typeface="Montserrat"/>
-              </a:rPr>
-              <a:t>EL MÉTODO RÁPIDO</a:t>
+              <a:rPr sz="1300" b="1" i="0">
+                <a:solidFill>
+                  <a:srgbClr val="E8801A"/>
+                </a:solidFill>
+                <a:latin typeface="Montserrat"/>
+              </a:rPr>
+              <a:t>QUE NO TE LÍEN</a:t>
             </a:r>
           </a:p>
         </p:txBody>
@@ -7650,26 +8025,70 @@
           <a:lstStyle/>
           <a:p>
             <a:r>
-              <a:rPr sz="2700" b="1" i="0">
+              <a:rPr sz="2800" b="1" i="0">
                 <a:solidFill>
                   <a:srgbClr val="1E2761"/>
                 </a:solidFill>
                 <a:latin typeface="Montserrat"/>
               </a:rPr>
-              <a:t>Cómo localizar la norma en un vistazo</a:t>
-            </a:r>
-          </a:p>
-        </p:txBody>
-      </p:sp>
-      <p:sp>
-        <p:nvSpPr>
-          <p:cNvPr id="7" name="TextBox 6"/>
+              <a:t>Modificaciones y enmiendas</a:t>
+            </a:r>
+          </a:p>
+        </p:txBody>
+      </p:sp>
+      <p:sp>
+        <p:nvSpPr>
+          <p:cNvPr id="7" name="Rounded Rectangle 6"/>
+          <p:cNvSpPr/>
+          <p:nvPr/>
+        </p:nvSpPr>
+        <p:spPr>
+          <a:xfrm>
+            <a:off x="868680" y="1627632"/>
+            <a:ext cx="2011680" cy="73152"/>
+          </a:xfrm>
+          <a:prstGeom prst="roundRect">
+            <a:avLst/>
+          </a:prstGeom>
+          <a:solidFill>
+            <a:srgbClr val="E8801A"/>
+          </a:solidFill>
+          <a:ln>
+            <a:noFill/>
+          </a:ln>
+          <a:effectLst/>
+        </p:spPr>
+        <p:style>
+          <a:lnRef idx="1">
+            <a:schemeClr val="accent1"/>
+          </a:lnRef>
+          <a:fillRef idx="3">
+            <a:schemeClr val="accent1"/>
+          </a:fillRef>
+          <a:effectRef idx="2">
+            <a:schemeClr val="accent1"/>
+          </a:effectRef>
+          <a:fontRef idx="minor">
+            <a:schemeClr val="lt1"/>
+          </a:fontRef>
+        </p:style>
+        <p:txBody>
+          <a:bodyPr rtlCol="0" anchor="ctr"/>
+          <a:lstStyle/>
+          <a:p>
+            <a:pPr algn="ctr"/>
+          </a:p>
+        </p:txBody>
+      </p:sp>
+      <p:sp>
+        <p:nvSpPr>
+          <p:cNvPr id="8" name="TextBox 7"/>
           <p:cNvSpPr txBox="1"/>
           <p:nvPr/>
         </p:nvSpPr>
         <p:spPr>
           <a:xfrm>
-            <a:off x="822960" y="1920240"/>
+            <a:off x="822960" y="1965960"/>
             <a:ext cx="4983480" cy="4206240"/>
           </a:xfrm>
           <a:prstGeom prst="rect">
@@ -7685,17 +8104,17 @@
           <a:p>
             <a:pPr>
               <a:spcAft>
-                <a:spcPts val="1000"/>
+                <a:spcPts val="1100"/>
               </a:spcAft>
             </a:pPr>
             <a:r>
               <a:rPr sz="1600" b="1" i="0">
                 <a:solidFill>
-                  <a:srgbClr val="2E3A80"/>
-                </a:solidFill>
-                <a:latin typeface="Montserrat"/>
-              </a:rPr>
-              <a:t>•  </a:t>
+                  <a:srgbClr val="E8801A"/>
+                </a:solidFill>
+                <a:latin typeface="Montserrat"/>
+              </a:rPr>
+              <a:t>▸  </a:t>
             </a:r>
             <a:r>
               <a:rPr sz="1600" b="0" i="0">
@@ -7704,23 +8123,23 @@
                 </a:solidFill>
                 <a:latin typeface="Montserrat"/>
               </a:rPr>
-              <a:t>Calle (distribución): 310/311/312, 12007</a:t>
+              <a:t>/1M y /A1: parche a la norma base</a:t>
             </a:r>
           </a:p>
           <a:p>
             <a:pPr>
               <a:spcAft>
-                <a:spcPts val="1000"/>
+                <a:spcPts val="1100"/>
               </a:spcAft>
             </a:pPr>
             <a:r>
               <a:rPr sz="1600" b="1" i="0">
                 <a:solidFill>
-                  <a:srgbClr val="2E3A80"/>
-                </a:solidFill>
-                <a:latin typeface="Montserrat"/>
-              </a:rPr>
-              <a:t>•  </a:t>
+                  <a:srgbClr val="E8801A"/>
+                </a:solidFill>
+                <a:latin typeface="Montserrat"/>
+              </a:rPr>
+              <a:t>▸  </a:t>
             </a:r>
             <a:r>
               <a:rPr sz="1600" b="0" i="0">
@@ -7729,23 +8148,23 @@
                 </a:solidFill>
                 <a:latin typeface="Montserrat"/>
               </a:rPr>
-              <a:t>Dentro hasta 5 bar: 60670</a:t>
+              <a:t>+A1 y +A2: ya vienen incorporadas</a:t>
             </a:r>
           </a:p>
           <a:p>
             <a:pPr>
               <a:spcAft>
-                <a:spcPts val="1000"/>
+                <a:spcPts val="1100"/>
               </a:spcAft>
             </a:pPr>
             <a:r>
               <a:rPr sz="1600" b="1" i="0">
                 <a:solidFill>
-                  <a:srgbClr val="2E3A80"/>
-                </a:solidFill>
-                <a:latin typeface="Montserrat"/>
-              </a:rPr>
-              <a:t>•  </a:t>
+                  <a:srgbClr val="E8801A"/>
+                </a:solidFill>
+                <a:latin typeface="Montserrat"/>
+              </a:rPr>
+              <a:t>▸  </a:t>
             </a:r>
             <a:r>
               <a:rPr sz="1600" b="0" i="0">
@@ -7754,23 +8173,23 @@
                 </a:solidFill>
                 <a:latin typeface="Montserrat"/>
               </a:rPr>
-              <a:t>Chimeneas y humos: 123001, 13384</a:t>
+              <a:t>No son normas nuevas</a:t>
             </a:r>
           </a:p>
           <a:p>
             <a:pPr>
               <a:spcAft>
-                <a:spcPts val="1000"/>
+                <a:spcPts val="1100"/>
               </a:spcAft>
             </a:pPr>
             <a:r>
               <a:rPr sz="1600" b="1" i="0">
                 <a:solidFill>
-                  <a:srgbClr val="2E3A80"/>
-                </a:solidFill>
-                <a:latin typeface="Montserrat"/>
-              </a:rPr>
-              <a:t>•  </a:t>
+                  <a:srgbClr val="E8801A"/>
+                </a:solidFill>
+                <a:latin typeface="Montserrat"/>
+              </a:rPr>
+              <a:t>▸  </a:t>
             </a:r>
             <a:r>
               <a:rPr sz="1600" b="0" i="0">
@@ -7779,14 +8198,14 @@
                 </a:solidFill>
                 <a:latin typeface="Montserrat"/>
               </a:rPr>
-              <a:t>GLP: 12864, 13786, 16436</a:t>
-            </a:r>
-          </a:p>
-        </p:txBody>
-      </p:sp>
-      <p:sp>
-        <p:nvSpPr>
-          <p:cNvPr id="8" name="imgph" descr="IMGQ:installer sorting technical folders on site"/>
+              <a:t>En el boletín citas la norma base</a:t>
+            </a:r>
+          </a:p>
+        </p:txBody>
+      </p:sp>
+      <p:sp>
+        <p:nvSpPr>
+          <p:cNvPr id="9" name="imgph" descr="IMGQ:hand writing corrections on document"/>
           <p:cNvSpPr/>
           <p:nvPr/>
         </p:nvSpPr>
@@ -7832,7 +8251,7 @@
       </p:sp>
       <p:sp>
         <p:nvSpPr>
-          <p:cNvPr id="9" name="TextBox 8"/>
+          <p:cNvPr id="10" name="TextBox 9"/>
           <p:cNvSpPr txBox="1"/>
           <p:nvPr/>
         </p:nvSpPr>
@@ -7872,7 +8291,7 @@
                 </a:solidFill>
                 <a:latin typeface="Montserrat"/>
               </a:rPr>
-              <a:t>installer sorting technical folders on site</a:t>
+              <a:t>hand writing corrections on document</a:t>
             </a:r>
           </a:p>
         </p:txBody>
@@ -7969,7 +8388,7 @@
                 </a:solidFill>
                 <a:latin typeface="Montserrat"/>
               </a:rPr>
-              <a:t>017 / 018</a:t>
+              <a:t>017 / 019</a:t>
             </a:r>
           </a:p>
         </p:txBody>
@@ -8017,7 +8436,7 @@
         <p:spPr>
           <a:xfrm>
             <a:off x="822960" y="457200"/>
-            <a:ext cx="8229600" cy="365760"/>
+            <a:ext cx="10058400" cy="365760"/>
           </a:xfrm>
           <a:prstGeom prst="rect">
             <a:avLst/>
@@ -8031,13 +8450,13 @@
           <a:lstStyle/>
           <a:p>
             <a:r>
-              <a:rPr sz="1200" b="1" i="0">
-                <a:solidFill>
-                  <a:srgbClr val="64748B"/>
-                </a:solidFill>
-                <a:latin typeface="Montserrat"/>
-              </a:rPr>
-              <a:t>DONDE ATERRIZA TODO</a:t>
+              <a:rPr sz="1300" b="1" i="0">
+                <a:solidFill>
+                  <a:srgbClr val="E8801A"/>
+                </a:solidFill>
+                <a:latin typeface="Montserrat"/>
+              </a:rPr>
+              <a:t>EL MÉTODO RÁPIDO</a:t>
             </a:r>
           </a:p>
         </p:txBody>
@@ -8065,26 +8484,70 @@
           <a:lstStyle/>
           <a:p>
             <a:r>
-              <a:rPr sz="2700" b="1" i="0">
+              <a:rPr sz="2800" b="1" i="0">
                 <a:solidFill>
                   <a:srgbClr val="1E2761"/>
                 </a:solidFill>
                 <a:latin typeface="Montserrat"/>
               </a:rPr>
-              <a:t>El boletín: aquí se juega la norma</a:t>
-            </a:r>
-          </a:p>
-        </p:txBody>
-      </p:sp>
-      <p:sp>
-        <p:nvSpPr>
-          <p:cNvPr id="7" name="TextBox 6"/>
+              <a:t>Cómo localizar la norma en un vistazo</a:t>
+            </a:r>
+          </a:p>
+        </p:txBody>
+      </p:sp>
+      <p:sp>
+        <p:nvSpPr>
+          <p:cNvPr id="7" name="Rounded Rectangle 6"/>
+          <p:cNvSpPr/>
+          <p:nvPr/>
+        </p:nvSpPr>
+        <p:spPr>
+          <a:xfrm>
+            <a:off x="868680" y="1627632"/>
+            <a:ext cx="2011680" cy="73152"/>
+          </a:xfrm>
+          <a:prstGeom prst="roundRect">
+            <a:avLst/>
+          </a:prstGeom>
+          <a:solidFill>
+            <a:srgbClr val="E8801A"/>
+          </a:solidFill>
+          <a:ln>
+            <a:noFill/>
+          </a:ln>
+          <a:effectLst/>
+        </p:spPr>
+        <p:style>
+          <a:lnRef idx="1">
+            <a:schemeClr val="accent1"/>
+          </a:lnRef>
+          <a:fillRef idx="3">
+            <a:schemeClr val="accent1"/>
+          </a:fillRef>
+          <a:effectRef idx="2">
+            <a:schemeClr val="accent1"/>
+          </a:effectRef>
+          <a:fontRef idx="minor">
+            <a:schemeClr val="lt1"/>
+          </a:fontRef>
+        </p:style>
+        <p:txBody>
+          <a:bodyPr rtlCol="0" anchor="ctr"/>
+          <a:lstStyle/>
+          <a:p>
+            <a:pPr algn="ctr"/>
+          </a:p>
+        </p:txBody>
+      </p:sp>
+      <p:sp>
+        <p:nvSpPr>
+          <p:cNvPr id="8" name="TextBox 7"/>
           <p:cNvSpPr txBox="1"/>
           <p:nvPr/>
         </p:nvSpPr>
         <p:spPr>
           <a:xfrm>
-            <a:off x="822960" y="1920240"/>
+            <a:off x="822960" y="1965960"/>
             <a:ext cx="4983480" cy="4206240"/>
           </a:xfrm>
           <a:prstGeom prst="rect">
@@ -8100,17 +8563,17 @@
           <a:p>
             <a:pPr>
               <a:spcAft>
-                <a:spcPts val="1000"/>
+                <a:spcPts val="1100"/>
               </a:spcAft>
             </a:pPr>
             <a:r>
               <a:rPr sz="1600" b="1" i="0">
                 <a:solidFill>
-                  <a:srgbClr val="2E3A80"/>
-                </a:solidFill>
-                <a:latin typeface="Montserrat"/>
-              </a:rPr>
-              <a:t>•  </a:t>
+                  <a:srgbClr val="E8801A"/>
+                </a:solidFill>
+                <a:latin typeface="Montserrat"/>
+              </a:rPr>
+              <a:t>▸  </a:t>
             </a:r>
             <a:r>
               <a:rPr sz="1600" b="0" i="0">
@@ -8119,23 +8582,23 @@
                 </a:solidFill>
                 <a:latin typeface="Montserrat"/>
               </a:rPr>
-              <a:t>Certificado de instalación (el boletín)</a:t>
+              <a:t>Calle (distribución): 310/311/312, 12007</a:t>
             </a:r>
           </a:p>
           <a:p>
             <a:pPr>
               <a:spcAft>
-                <a:spcPts val="1000"/>
+                <a:spcPts val="1100"/>
               </a:spcAft>
             </a:pPr>
             <a:r>
               <a:rPr sz="1600" b="1" i="0">
                 <a:solidFill>
-                  <a:srgbClr val="2E3A80"/>
-                </a:solidFill>
-                <a:latin typeface="Montserrat"/>
-              </a:rPr>
-              <a:t>•  </a:t>
+                  <a:srgbClr val="E8801A"/>
+                </a:solidFill>
+                <a:latin typeface="Montserrat"/>
+              </a:rPr>
+              <a:t>▸  </a:t>
             </a:r>
             <a:r>
               <a:rPr sz="1600" b="0" i="0">
@@ -8144,23 +8607,23 @@
                 </a:solidFill>
                 <a:latin typeface="Montserrat"/>
               </a:rPr>
-              <a:t>Lo firma el instalador habilitado</a:t>
+              <a:t>Dentro hasta 5 bar: 60670</a:t>
             </a:r>
           </a:p>
           <a:p>
             <a:pPr>
               <a:spcAft>
-                <a:spcPts val="1000"/>
+                <a:spcPts val="1100"/>
               </a:spcAft>
             </a:pPr>
             <a:r>
               <a:rPr sz="1600" b="1" i="0">
                 <a:solidFill>
-                  <a:srgbClr val="2E3A80"/>
-                </a:solidFill>
-                <a:latin typeface="Montserrat"/>
-              </a:rPr>
-              <a:t>•  </a:t>
+                  <a:srgbClr val="E8801A"/>
+                </a:solidFill>
+                <a:latin typeface="Montserrat"/>
+              </a:rPr>
+              <a:t>▸  </a:t>
             </a:r>
             <a:r>
               <a:rPr sz="1600" b="0" i="0">
@@ -8169,23 +8632,23 @@
                 </a:solidFill>
                 <a:latin typeface="Montserrat"/>
               </a:rPr>
-              <a:t>Va a la distribuidora para el alta</a:t>
+              <a:t>Chimeneas y humos: 123001, 13384</a:t>
             </a:r>
           </a:p>
           <a:p>
             <a:pPr>
               <a:spcAft>
-                <a:spcPts val="1000"/>
+                <a:spcPts val="1100"/>
               </a:spcAft>
             </a:pPr>
             <a:r>
               <a:rPr sz="1600" b="1" i="0">
                 <a:solidFill>
-                  <a:srgbClr val="2E3A80"/>
-                </a:solidFill>
-                <a:latin typeface="Montserrat"/>
-              </a:rPr>
-              <a:t>•  </a:t>
+                  <a:srgbClr val="E8801A"/>
+                </a:solidFill>
+                <a:latin typeface="Montserrat"/>
+              </a:rPr>
+              <a:t>▸  </a:t>
             </a:r>
             <a:r>
               <a:rPr sz="1600" b="0" i="0">
@@ -8194,14 +8657,14 @@
                 </a:solidFill>
                 <a:latin typeface="Montserrat"/>
               </a:rPr>
-              <a:t>Norma mal citada = alta rechazada</a:t>
-            </a:r>
-          </a:p>
-        </p:txBody>
-      </p:sp>
-      <p:sp>
-        <p:nvSpPr>
-          <p:cNvPr id="8" name="imgph" descr="IMGQ:technician filling installation certificate paperwork"/>
+              <a:t>GLP: 12864, 13786, 16436</a:t>
+            </a:r>
+          </a:p>
+        </p:txBody>
+      </p:sp>
+      <p:sp>
+        <p:nvSpPr>
+          <p:cNvPr id="9" name="imgph" descr="IMGQ:installer sorting technical folders on site"/>
           <p:cNvSpPr/>
           <p:nvPr/>
         </p:nvSpPr>
@@ -8247,7 +8710,7 @@
       </p:sp>
       <p:sp>
         <p:nvSpPr>
-          <p:cNvPr id="9" name="TextBox 8"/>
+          <p:cNvPr id="10" name="TextBox 9"/>
           <p:cNvSpPr txBox="1"/>
           <p:nvPr/>
         </p:nvSpPr>
@@ -8287,7 +8750,7 @@
                 </a:solidFill>
                 <a:latin typeface="Montserrat"/>
               </a:rPr>
-              <a:t>technician filling installation certificate paperwork</a:t>
+              <a:t>installer sorting technical folders on site</a:t>
             </a:r>
           </a:p>
         </p:txBody>
@@ -8325,6 +8788,465 @@
             <a:avLst/>
           </a:prstGeom>
           <a:solidFill>
+            <a:srgbClr val="FFFFFF"/>
+          </a:solidFill>
+          <a:ln>
+            <a:noFill/>
+          </a:ln>
+          <a:effectLst/>
+        </p:spPr>
+        <p:style>
+          <a:lnRef idx="1">
+            <a:schemeClr val="accent1"/>
+          </a:lnRef>
+          <a:fillRef idx="3">
+            <a:schemeClr val="accent1"/>
+          </a:fillRef>
+          <a:effectRef idx="2">
+            <a:schemeClr val="accent1"/>
+          </a:effectRef>
+          <a:fontRef idx="minor">
+            <a:schemeClr val="lt1"/>
+          </a:fontRef>
+        </p:style>
+        <p:txBody>
+          <a:bodyPr rtlCol="0" anchor="ctr"/>
+          <a:lstStyle/>
+          <a:p>
+            <a:pPr algn="ctr"/>
+          </a:p>
+        </p:txBody>
+      </p:sp>
+      <p:sp>
+        <p:nvSpPr>
+          <p:cNvPr id="3" name="TextBox 2"/>
+          <p:cNvSpPr txBox="1"/>
+          <p:nvPr/>
+        </p:nvSpPr>
+        <p:spPr>
+          <a:xfrm>
+            <a:off x="10607040" y="320040"/>
+            <a:ext cx="1371600" cy="365760"/>
+          </a:xfrm>
+          <a:prstGeom prst="rect">
+            <a:avLst/>
+          </a:prstGeom>
+          <a:noFill/>
+        </p:spPr>
+        <p:txBody>
+          <a:bodyPr wrap="square">
+            <a:spAutoFit/>
+          </a:bodyPr>
+          <a:lstStyle/>
+          <a:p>
+            <a:pPr algn="r"/>
+            <a:r>
+              <a:rPr sz="1000" b="1" i="0">
+                <a:solidFill>
+                  <a:srgbClr val="64748B"/>
+                </a:solidFill>
+                <a:latin typeface="Montserrat"/>
+              </a:rPr>
+              <a:t>018 / 019</a:t>
+            </a:r>
+          </a:p>
+        </p:txBody>
+      </p:sp>
+      <p:sp>
+        <p:nvSpPr>
+          <p:cNvPr id="4" name="TextBox 3"/>
+          <p:cNvSpPr txBox="1"/>
+          <p:nvPr/>
+        </p:nvSpPr>
+        <p:spPr>
+          <a:xfrm>
+            <a:off x="457200" y="6419088"/>
+            <a:ext cx="8229600" cy="365760"/>
+          </a:xfrm>
+          <a:prstGeom prst="rect">
+            <a:avLst/>
+          </a:prstGeom>
+          <a:noFill/>
+        </p:spPr>
+        <p:txBody>
+          <a:bodyPr wrap="square">
+            <a:spAutoFit/>
+          </a:bodyPr>
+          <a:lstStyle/>
+          <a:p>
+            <a:r>
+              <a:rPr sz="900" b="0" i="0">
+                <a:solidFill>
+                  <a:srgbClr val="64748B"/>
+                </a:solidFill>
+                <a:latin typeface="Montserrat"/>
+              </a:rPr>
+              <a:t>Curso Gas B · Tema 08 · ITC-ICG 11 · Relación de normas UNE</a:t>
+            </a:r>
+          </a:p>
+        </p:txBody>
+      </p:sp>
+      <p:sp>
+        <p:nvSpPr>
+          <p:cNvPr id="5" name="TextBox 4"/>
+          <p:cNvSpPr txBox="1"/>
+          <p:nvPr/>
+        </p:nvSpPr>
+        <p:spPr>
+          <a:xfrm>
+            <a:off x="822960" y="457200"/>
+            <a:ext cx="10058400" cy="365760"/>
+          </a:xfrm>
+          <a:prstGeom prst="rect">
+            <a:avLst/>
+          </a:prstGeom>
+          <a:noFill/>
+        </p:spPr>
+        <p:txBody>
+          <a:bodyPr wrap="square">
+            <a:spAutoFit/>
+          </a:bodyPr>
+          <a:lstStyle/>
+          <a:p>
+            <a:r>
+              <a:rPr sz="1300" b="1" i="0">
+                <a:solidFill>
+                  <a:srgbClr val="E8801A"/>
+                </a:solidFill>
+                <a:latin typeface="Montserrat"/>
+              </a:rPr>
+              <a:t>DONDE ATERRIZA TODO</a:t>
+            </a:r>
+          </a:p>
+        </p:txBody>
+      </p:sp>
+      <p:sp>
+        <p:nvSpPr>
+          <p:cNvPr id="6" name="TextBox 5"/>
+          <p:cNvSpPr txBox="1"/>
+          <p:nvPr/>
+        </p:nvSpPr>
+        <p:spPr>
+          <a:xfrm>
+            <a:off x="822960" y="868680"/>
+            <a:ext cx="10515600" cy="914400"/>
+          </a:xfrm>
+          <a:prstGeom prst="rect">
+            <a:avLst/>
+          </a:prstGeom>
+          <a:noFill/>
+        </p:spPr>
+        <p:txBody>
+          <a:bodyPr wrap="square">
+            <a:spAutoFit/>
+          </a:bodyPr>
+          <a:lstStyle/>
+          <a:p>
+            <a:r>
+              <a:rPr sz="2800" b="1" i="0">
+                <a:solidFill>
+                  <a:srgbClr val="1E2761"/>
+                </a:solidFill>
+                <a:latin typeface="Montserrat"/>
+              </a:rPr>
+              <a:t>El boletín: aquí se juega la norma</a:t>
+            </a:r>
+          </a:p>
+        </p:txBody>
+      </p:sp>
+      <p:sp>
+        <p:nvSpPr>
+          <p:cNvPr id="7" name="Rounded Rectangle 6"/>
+          <p:cNvSpPr/>
+          <p:nvPr/>
+        </p:nvSpPr>
+        <p:spPr>
+          <a:xfrm>
+            <a:off x="868680" y="1627632"/>
+            <a:ext cx="2011680" cy="73152"/>
+          </a:xfrm>
+          <a:prstGeom prst="roundRect">
+            <a:avLst/>
+          </a:prstGeom>
+          <a:solidFill>
+            <a:srgbClr val="E8801A"/>
+          </a:solidFill>
+          <a:ln>
+            <a:noFill/>
+          </a:ln>
+          <a:effectLst/>
+        </p:spPr>
+        <p:style>
+          <a:lnRef idx="1">
+            <a:schemeClr val="accent1"/>
+          </a:lnRef>
+          <a:fillRef idx="3">
+            <a:schemeClr val="accent1"/>
+          </a:fillRef>
+          <a:effectRef idx="2">
+            <a:schemeClr val="accent1"/>
+          </a:effectRef>
+          <a:fontRef idx="minor">
+            <a:schemeClr val="lt1"/>
+          </a:fontRef>
+        </p:style>
+        <p:txBody>
+          <a:bodyPr rtlCol="0" anchor="ctr"/>
+          <a:lstStyle/>
+          <a:p>
+            <a:pPr algn="ctr"/>
+          </a:p>
+        </p:txBody>
+      </p:sp>
+      <p:sp>
+        <p:nvSpPr>
+          <p:cNvPr id="8" name="TextBox 7"/>
+          <p:cNvSpPr txBox="1"/>
+          <p:nvPr/>
+        </p:nvSpPr>
+        <p:spPr>
+          <a:xfrm>
+            <a:off x="822960" y="1965960"/>
+            <a:ext cx="4983480" cy="4206240"/>
+          </a:xfrm>
+          <a:prstGeom prst="rect">
+            <a:avLst/>
+          </a:prstGeom>
+          <a:noFill/>
+        </p:spPr>
+        <p:txBody>
+          <a:bodyPr wrap="square">
+            <a:spAutoFit/>
+          </a:bodyPr>
+          <a:lstStyle/>
+          <a:p>
+            <a:pPr>
+              <a:spcAft>
+                <a:spcPts val="1100"/>
+              </a:spcAft>
+            </a:pPr>
+            <a:r>
+              <a:rPr sz="1600" b="1" i="0">
+                <a:solidFill>
+                  <a:srgbClr val="E8801A"/>
+                </a:solidFill>
+                <a:latin typeface="Montserrat"/>
+              </a:rPr>
+              <a:t>▸  </a:t>
+            </a:r>
+            <a:r>
+              <a:rPr sz="1600" b="0" i="0">
+                <a:solidFill>
+                  <a:srgbClr val="1B2330"/>
+                </a:solidFill>
+                <a:latin typeface="Montserrat"/>
+              </a:rPr>
+              <a:t>Certificado de instalación (el boletín)</a:t>
+            </a:r>
+          </a:p>
+          <a:p>
+            <a:pPr>
+              <a:spcAft>
+                <a:spcPts val="1100"/>
+              </a:spcAft>
+            </a:pPr>
+            <a:r>
+              <a:rPr sz="1600" b="1" i="0">
+                <a:solidFill>
+                  <a:srgbClr val="E8801A"/>
+                </a:solidFill>
+                <a:latin typeface="Montserrat"/>
+              </a:rPr>
+              <a:t>▸  </a:t>
+            </a:r>
+            <a:r>
+              <a:rPr sz="1600" b="0" i="0">
+                <a:solidFill>
+                  <a:srgbClr val="1B2330"/>
+                </a:solidFill>
+                <a:latin typeface="Montserrat"/>
+              </a:rPr>
+              <a:t>Lo firma el instalador habilitado</a:t>
+            </a:r>
+          </a:p>
+          <a:p>
+            <a:pPr>
+              <a:spcAft>
+                <a:spcPts val="1100"/>
+              </a:spcAft>
+            </a:pPr>
+            <a:r>
+              <a:rPr sz="1600" b="1" i="0">
+                <a:solidFill>
+                  <a:srgbClr val="E8801A"/>
+                </a:solidFill>
+                <a:latin typeface="Montserrat"/>
+              </a:rPr>
+              <a:t>▸  </a:t>
+            </a:r>
+            <a:r>
+              <a:rPr sz="1600" b="0" i="0">
+                <a:solidFill>
+                  <a:srgbClr val="1B2330"/>
+                </a:solidFill>
+                <a:latin typeface="Montserrat"/>
+              </a:rPr>
+              <a:t>Va a la distribuidora para el alta</a:t>
+            </a:r>
+          </a:p>
+          <a:p>
+            <a:pPr>
+              <a:spcAft>
+                <a:spcPts val="1100"/>
+              </a:spcAft>
+            </a:pPr>
+            <a:r>
+              <a:rPr sz="1600" b="1" i="0">
+                <a:solidFill>
+                  <a:srgbClr val="E8801A"/>
+                </a:solidFill>
+                <a:latin typeface="Montserrat"/>
+              </a:rPr>
+              <a:t>▸  </a:t>
+            </a:r>
+            <a:r>
+              <a:rPr sz="1600" b="0" i="0">
+                <a:solidFill>
+                  <a:srgbClr val="1B2330"/>
+                </a:solidFill>
+                <a:latin typeface="Montserrat"/>
+              </a:rPr>
+              <a:t>Norma mal citada = alta rechazada</a:t>
+            </a:r>
+          </a:p>
+        </p:txBody>
+      </p:sp>
+      <p:sp>
+        <p:nvSpPr>
+          <p:cNvPr id="9" name="imgph" descr="IMGQ:technician filling installation certificate paperwork"/>
+          <p:cNvSpPr/>
+          <p:nvPr/>
+        </p:nvSpPr>
+        <p:spPr>
+          <a:xfrm>
+            <a:off x="5806440" y="1051560"/>
+            <a:ext cx="5298947" cy="4629150"/>
+          </a:xfrm>
+          <a:prstGeom prst="roundRect">
+            <a:avLst/>
+          </a:prstGeom>
+          <a:solidFill>
+            <a:srgbClr val="F3F6FB"/>
+          </a:solidFill>
+          <a:ln w="12700">
+            <a:solidFill>
+              <a:srgbClr val="C7D2E6"/>
+            </a:solidFill>
+          </a:ln>
+          <a:effectLst/>
+        </p:spPr>
+        <p:style>
+          <a:lnRef idx="1">
+            <a:schemeClr val="accent1"/>
+          </a:lnRef>
+          <a:fillRef idx="3">
+            <a:schemeClr val="accent1"/>
+          </a:fillRef>
+          <a:effectRef idx="2">
+            <a:schemeClr val="accent1"/>
+          </a:effectRef>
+          <a:fontRef idx="minor">
+            <a:schemeClr val="lt1"/>
+          </a:fontRef>
+        </p:style>
+        <p:txBody>
+          <a:bodyPr rtlCol="0" anchor="ctr"/>
+          <a:lstStyle/>
+          <a:p>
+            <a:pPr algn="ctr"/>
+          </a:p>
+        </p:txBody>
+      </p:sp>
+      <p:sp>
+        <p:nvSpPr>
+          <p:cNvPr id="10" name="TextBox 9"/>
+          <p:cNvSpPr txBox="1"/>
+          <p:nvPr/>
+        </p:nvSpPr>
+        <p:spPr>
+          <a:xfrm>
+            <a:off x="6080760" y="2726055"/>
+            <a:ext cx="4750307" cy="1280160"/>
+          </a:xfrm>
+          <a:prstGeom prst="rect">
+            <a:avLst/>
+          </a:prstGeom>
+          <a:noFill/>
+        </p:spPr>
+        <p:txBody>
+          <a:bodyPr wrap="square">
+            <a:spAutoFit/>
+          </a:bodyPr>
+          <a:lstStyle/>
+          <a:p>
+            <a:pPr algn="ctr"/>
+            <a:r>
+              <a:rPr sz="1400" b="1" i="0">
+                <a:solidFill>
+                  <a:srgbClr val="64748B"/>
+                </a:solidFill>
+                <a:latin typeface="Montserrat"/>
+              </a:rPr>
+              <a:t>IMAGEN REALISTA</a:t>
+            </a:r>
+          </a:p>
+          <a:p>
+            <a:pPr algn="ctr"/>
+            <a:r>
+              <a:rPr sz="1100" b="0" i="1">
+                <a:solidFill>
+                  <a:srgbClr val="64748B"/>
+                </a:solidFill>
+                <a:latin typeface="Montserrat"/>
+              </a:rPr>
+              <a:t>technician filling installation certificate paperwork</a:t>
+            </a:r>
+          </a:p>
+        </p:txBody>
+      </p:sp>
+    </p:spTree>
+  </p:cSld>
+  <p:clrMapOvr>
+    <a:masterClrMapping/>
+  </p:clrMapOvr>
+</p:sld>
+</file>
+
+<file path=ppt/slides/slide19.xml><?xml version="1.0" encoding="utf-8"?>
+<p:sld xmlns:a="http://schemas.openxmlformats.org/drawingml/2006/main" xmlns:p="http://schemas.openxmlformats.org/presentationml/2006/main" xmlns:r="http://schemas.openxmlformats.org/officeDocument/2006/relationships">
+  <p:cSld>
+    <p:spTree>
+      <p:nvGrpSpPr>
+        <p:cNvPr id="1" name=""/>
+        <p:cNvGrpSpPr/>
+        <p:nvPr/>
+      </p:nvGrpSpPr>
+      <p:grpSpPr/>
+      <p:sp>
+        <p:nvSpPr>
+          <p:cNvPr id="2" name="Rectangle 1"/>
+          <p:cNvSpPr/>
+          <p:nvPr/>
+        </p:nvSpPr>
+        <p:spPr>
+          <a:xfrm>
+            <a:off x="0" y="0"/>
+            <a:ext cx="12191695" cy="6858000"/>
+          </a:xfrm>
+          <a:prstGeom prst="rect">
+            <a:avLst/>
+          </a:prstGeom>
+          <a:solidFill>
             <a:srgbClr val="1E2761"/>
           </a:solidFill>
           <a:ln>
@@ -8379,7 +9301,7 @@
             <a:r>
               <a:rPr sz="1400" b="1" i="0">
                 <a:solidFill>
-                  <a:srgbClr val="CADCFC"/>
+                  <a:srgbClr val="F4A24C"/>
                 </a:solidFill>
                 <a:latin typeface="Montserrat"/>
               </a:rPr>
@@ -8390,13 +9312,57 @@
       </p:sp>
       <p:sp>
         <p:nvSpPr>
-          <p:cNvPr id="4" name="TextBox 3"/>
+          <p:cNvPr id="4" name="Rounded Rectangle 3"/>
+          <p:cNvSpPr/>
+          <p:nvPr/>
+        </p:nvSpPr>
+        <p:spPr>
+          <a:xfrm>
+            <a:off x="868680" y="1051560"/>
+            <a:ext cx="1463040" cy="82296"/>
+          </a:xfrm>
+          <a:prstGeom prst="roundRect">
+            <a:avLst/>
+          </a:prstGeom>
+          <a:solidFill>
+            <a:srgbClr val="E8801A"/>
+          </a:solidFill>
+          <a:ln>
+            <a:noFill/>
+          </a:ln>
+          <a:effectLst/>
+        </p:spPr>
+        <p:style>
+          <a:lnRef idx="1">
+            <a:schemeClr val="accent1"/>
+          </a:lnRef>
+          <a:fillRef idx="3">
+            <a:schemeClr val="accent1"/>
+          </a:fillRef>
+          <a:effectRef idx="2">
+            <a:schemeClr val="accent1"/>
+          </a:effectRef>
+          <a:fontRef idx="minor">
+            <a:schemeClr val="lt1"/>
+          </a:fontRef>
+        </p:style>
+        <p:txBody>
+          <a:bodyPr rtlCol="0" anchor="ctr"/>
+          <a:lstStyle/>
+          <a:p>
+            <a:pPr algn="ctr"/>
+          </a:p>
+        </p:txBody>
+      </p:sp>
+      <p:sp>
+        <p:nvSpPr>
+          <p:cNvPr id="5" name="TextBox 4"/>
           <p:cNvSpPr txBox="1"/>
           <p:nvPr/>
         </p:nvSpPr>
         <p:spPr>
           <a:xfrm>
-            <a:off x="822960" y="1143000"/>
+            <a:off x="822960" y="1234440"/>
             <a:ext cx="10515600" cy="1097280"/>
           </a:xfrm>
           <a:prstGeom prst="rect">
@@ -8424,14 +9390,14 @@
       </p:sp>
       <p:sp>
         <p:nvSpPr>
-          <p:cNvPr id="5" name="TextBox 4"/>
+          <p:cNvPr id="6" name="TextBox 5"/>
           <p:cNvSpPr txBox="1"/>
           <p:nvPr/>
         </p:nvSpPr>
         <p:spPr>
           <a:xfrm>
-            <a:off x="822960" y="2514600"/>
-            <a:ext cx="10515600" cy="2834640"/>
+            <a:off x="822960" y="2606040"/>
+            <a:ext cx="10515600" cy="2743200"/>
           </a:xfrm>
           <a:prstGeom prst="rect">
             <a:avLst/>
@@ -8452,7 +9418,7 @@
             <a:r>
               <a:rPr sz="2000" b="1" i="0">
                 <a:solidFill>
-                  <a:srgbClr val="CADCFC"/>
+                  <a:srgbClr val="F4A24C"/>
                 </a:solidFill>
                 <a:latin typeface="Montserrat"/>
               </a:rPr>
@@ -8477,7 +9443,7 @@
             <a:r>
               <a:rPr sz="2000" b="1" i="0">
                 <a:solidFill>
-                  <a:srgbClr val="CADCFC"/>
+                  <a:srgbClr val="F4A24C"/>
                 </a:solidFill>
                 <a:latin typeface="Montserrat"/>
               </a:rPr>
@@ -8502,7 +9468,7 @@
             <a:r>
               <a:rPr sz="2000" b="1" i="0">
                 <a:solidFill>
-                  <a:srgbClr val="CADCFC"/>
+                  <a:srgbClr val="F4A24C"/>
                 </a:solidFill>
                 <a:latin typeface="Montserrat"/>
               </a:rPr>
@@ -8527,7 +9493,7 @@
             <a:r>
               <a:rPr sz="2000" b="1" i="0">
                 <a:solidFill>
-                  <a:srgbClr val="CADCFC"/>
+                  <a:srgbClr val="F4A24C"/>
                 </a:solidFill>
                 <a:latin typeface="Montserrat"/>
               </a:rPr>
@@ -8547,20 +9513,20 @@
       </p:sp>
       <p:sp>
         <p:nvSpPr>
-          <p:cNvPr id="6" name="Rounded Rectangle 5"/>
+          <p:cNvPr id="7" name="Rounded Rectangle 6"/>
           <p:cNvSpPr/>
           <p:nvPr/>
         </p:nvSpPr>
         <p:spPr>
           <a:xfrm>
             <a:off x="822960" y="5532120"/>
-            <a:ext cx="10515600" cy="777240"/>
+            <a:ext cx="10515600" cy="822960"/>
           </a:xfrm>
           <a:prstGeom prst="roundRect">
             <a:avLst/>
           </a:prstGeom>
           <a:solidFill>
-            <a:srgbClr val="2E3A80"/>
+            <a:srgbClr val="E8801A"/>
           </a:solidFill>
           <a:ln>
             <a:noFill/>
@@ -8591,13 +9557,13 @@
       </p:sp>
       <p:sp>
         <p:nvSpPr>
-          <p:cNvPr id="7" name="TextBox 6"/>
+          <p:cNvPr id="8" name="TextBox 7"/>
           <p:cNvSpPr txBox="1"/>
           <p:nvPr/>
         </p:nvSpPr>
         <p:spPr>
           <a:xfrm>
-            <a:off x="1051560" y="5605272"/>
+            <a:off x="1051560" y="5623560"/>
             <a:ext cx="10058400" cy="640080"/>
           </a:xfrm>
           <a:prstGeom prst="rect">
@@ -8614,7 +9580,7 @@
             <a:r>
               <a:rPr sz="1500" b="1" i="1">
                 <a:solidFill>
-                  <a:srgbClr val="CADCFC"/>
+                  <a:srgbClr val="1E2761"/>
                 </a:solidFill>
                 <a:latin typeface="Montserrat"/>
               </a:rPr>
@@ -8715,7 +9681,7 @@
                 </a:solidFill>
                 <a:latin typeface="Montserrat"/>
               </a:rPr>
-              <a:t>002 / 018</a:t>
+              <a:t>002 / 019</a:t>
             </a:r>
           </a:p>
         </p:txBody>
@@ -8779,7 +9745,7 @@
             <a:r>
               <a:rPr sz="2700" b="1" i="0">
                 <a:solidFill>
-                  <a:srgbClr val="1E2761"/>
+                  <a:srgbClr val="E8801A"/>
                 </a:solidFill>
                 <a:latin typeface="Montserrat"/>
               </a:rPr>
@@ -8791,6 +9757,50 @@
       <p:sp>
         <p:nvSpPr>
           <p:cNvPr id="6" name="Rounded Rectangle 5"/>
+          <p:cNvSpPr/>
+          <p:nvPr/>
+        </p:nvSpPr>
+        <p:spPr>
+          <a:xfrm>
+            <a:off x="868680" y="1234440"/>
+            <a:ext cx="1463040" cy="73152"/>
+          </a:xfrm>
+          <a:prstGeom prst="roundRect">
+            <a:avLst/>
+          </a:prstGeom>
+          <a:solidFill>
+            <a:srgbClr val="1E2761"/>
+          </a:solidFill>
+          <a:ln>
+            <a:noFill/>
+          </a:ln>
+          <a:effectLst/>
+        </p:spPr>
+        <p:style>
+          <a:lnRef idx="1">
+            <a:schemeClr val="accent1"/>
+          </a:lnRef>
+          <a:fillRef idx="3">
+            <a:schemeClr val="accent1"/>
+          </a:fillRef>
+          <a:effectRef idx="2">
+            <a:schemeClr val="accent1"/>
+          </a:effectRef>
+          <a:fontRef idx="minor">
+            <a:schemeClr val="lt1"/>
+          </a:fontRef>
+        </p:style>
+        <p:txBody>
+          <a:bodyPr rtlCol="0" anchor="ctr"/>
+          <a:lstStyle/>
+          <a:p>
+            <a:pPr algn="ctr"/>
+          </a:p>
+        </p:txBody>
+      </p:sp>
+      <p:sp>
+        <p:nvSpPr>
+          <p:cNvPr id="7" name="Rounded Rectangle 6"/>
           <p:cNvSpPr/>
           <p:nvPr/>
         </p:nvSpPr>
@@ -8836,7 +9846,7 @@
       </p:sp>
       <p:sp>
         <p:nvSpPr>
-          <p:cNvPr id="7" name="TextBox 6"/>
+          <p:cNvPr id="8" name="TextBox 7"/>
           <p:cNvSpPr txBox="1"/>
           <p:nvPr/>
         </p:nvSpPr>
@@ -8871,7 +9881,7 @@
       </p:sp>
       <p:sp>
         <p:nvSpPr>
-          <p:cNvPr id="8" name="TextBox 7"/>
+          <p:cNvPr id="9" name="TextBox 8"/>
           <p:cNvSpPr txBox="1"/>
           <p:nvPr/>
         </p:nvSpPr>
@@ -8906,7 +9916,7 @@
       </p:sp>
       <p:sp>
         <p:nvSpPr>
-          <p:cNvPr id="9" name="Rounded Rectangle 8"/>
+          <p:cNvPr id="10" name="Rounded Rectangle 9"/>
           <p:cNvSpPr/>
           <p:nvPr/>
         </p:nvSpPr>
@@ -8952,7 +9962,7 @@
       </p:sp>
       <p:sp>
         <p:nvSpPr>
-          <p:cNvPr id="10" name="TextBox 9"/>
+          <p:cNvPr id="11" name="TextBox 10"/>
           <p:cNvSpPr txBox="1"/>
           <p:nvPr/>
         </p:nvSpPr>
@@ -8987,7 +9997,7 @@
       </p:sp>
       <p:sp>
         <p:nvSpPr>
-          <p:cNvPr id="11" name="TextBox 10"/>
+          <p:cNvPr id="12" name="TextBox 11"/>
           <p:cNvSpPr txBox="1"/>
           <p:nvPr/>
         </p:nvSpPr>
@@ -9022,7 +10032,7 @@
       </p:sp>
       <p:sp>
         <p:nvSpPr>
-          <p:cNvPr id="12" name="Rounded Rectangle 11"/>
+          <p:cNvPr id="13" name="Rounded Rectangle 12"/>
           <p:cNvSpPr/>
           <p:nvPr/>
         </p:nvSpPr>
@@ -9068,7 +10078,7 @@
       </p:sp>
       <p:sp>
         <p:nvSpPr>
-          <p:cNvPr id="13" name="TextBox 12"/>
+          <p:cNvPr id="14" name="TextBox 13"/>
           <p:cNvSpPr txBox="1"/>
           <p:nvPr/>
         </p:nvSpPr>
@@ -9103,7 +10113,7 @@
       </p:sp>
       <p:sp>
         <p:nvSpPr>
-          <p:cNvPr id="14" name="TextBox 13"/>
+          <p:cNvPr id="15" name="TextBox 14"/>
           <p:cNvSpPr txBox="1"/>
           <p:nvPr/>
         </p:nvSpPr>
@@ -9228,7 +10238,7 @@
                 </a:solidFill>
                 <a:latin typeface="Montserrat"/>
               </a:rPr>
-              <a:t>003 / 018</a:t>
+              <a:t>003 / 019</a:t>
             </a:r>
           </a:p>
         </p:txBody>
@@ -9275,7 +10285,7 @@
         </p:nvSpPr>
         <p:spPr>
           <a:xfrm>
-            <a:off x="822960" y="457200"/>
+            <a:off x="822960" y="502920"/>
             <a:ext cx="8229600" cy="365760"/>
           </a:xfrm>
           <a:prstGeom prst="rect">
@@ -9290,13 +10300,13 @@
           <a:lstStyle/>
           <a:p>
             <a:r>
-              <a:rPr sz="1200" b="1" i="0">
-                <a:solidFill>
-                  <a:srgbClr val="64748B"/>
-                </a:solidFill>
-                <a:latin typeface="Montserrat"/>
-              </a:rPr>
-              <a:t>OBJETO · ARTÍCULO 12</a:t>
+              <a:rPr sz="1300" b="1" i="0">
+                <a:solidFill>
+                  <a:srgbClr val="E8801A"/>
+                </a:solidFill>
+                <a:latin typeface="Montserrat"/>
+              </a:rPr>
+              <a:t>PARTES DE ESTE VÍDEO</a:t>
             </a:r>
           </a:p>
         </p:txBody>
@@ -9309,7 +10319,7 @@
         </p:nvSpPr>
         <p:spPr>
           <a:xfrm>
-            <a:off x="822960" y="868680"/>
+            <a:off x="822960" y="914400"/>
             <a:ext cx="10515600" cy="914400"/>
           </a:xfrm>
           <a:prstGeom prst="rect">
@@ -9330,130 +10340,30 @@
                 </a:solidFill>
                 <a:latin typeface="Montserrat"/>
               </a:rPr>
-              <a:t>¿Qué es la ITC-ICG 11?</a:t>
-            </a:r>
-          </a:p>
-        </p:txBody>
-      </p:sp>
-      <p:sp>
-        <p:nvSpPr>
-          <p:cNvPr id="7" name="TextBox 6"/>
-          <p:cNvSpPr txBox="1"/>
-          <p:nvPr/>
-        </p:nvSpPr>
-        <p:spPr>
-          <a:xfrm>
-            <a:off x="822960" y="1920240"/>
-            <a:ext cx="4983480" cy="4206240"/>
-          </a:xfrm>
-          <a:prstGeom prst="rect">
-            <a:avLst/>
-          </a:prstGeom>
-          <a:noFill/>
-        </p:spPr>
-        <p:txBody>
-          <a:bodyPr wrap="square">
-            <a:spAutoFit/>
-          </a:bodyPr>
-          <a:lstStyle/>
-          <a:p>
-            <a:pPr>
-              <a:spcAft>
-                <a:spcPts val="1000"/>
-              </a:spcAft>
-            </a:pPr>
-            <a:r>
-              <a:rPr sz="1600" b="1" i="0">
-                <a:solidFill>
-                  <a:srgbClr val="2E3A80"/>
-                </a:solidFill>
-                <a:latin typeface="Montserrat"/>
-              </a:rPr>
-              <a:t>•  </a:t>
-            </a:r>
-            <a:r>
-              <a:rPr sz="1600" b="0" i="0">
-                <a:solidFill>
-                  <a:srgbClr val="1B2330"/>
-                </a:solidFill>
-                <a:latin typeface="Montserrat"/>
-              </a:rPr>
-              <a:t>El listado oficial de normas UNE</a:t>
-            </a:r>
-          </a:p>
-          <a:p>
-            <a:pPr>
-              <a:spcAft>
-                <a:spcPts val="1000"/>
-              </a:spcAft>
-            </a:pPr>
-            <a:r>
-              <a:rPr sz="1600" b="1" i="0">
-                <a:solidFill>
-                  <a:srgbClr val="2E3A80"/>
-                </a:solidFill>
-                <a:latin typeface="Montserrat"/>
-              </a:rPr>
-              <a:t>•  </a:t>
-            </a:r>
-            <a:r>
-              <a:rPr sz="1600" b="0" i="0">
-                <a:solidFill>
-                  <a:srgbClr val="1B2330"/>
-                </a:solidFill>
-                <a:latin typeface="Montserrat"/>
-              </a:rPr>
-              <a:t>Remite el artículo 12 del Reglamento</a:t>
-            </a:r>
-          </a:p>
-          <a:p>
-            <a:pPr>
-              <a:spcAft>
-                <a:spcPts val="1000"/>
-              </a:spcAft>
-            </a:pPr>
-            <a:r>
-              <a:rPr sz="1600" b="1" i="0">
-                <a:solidFill>
-                  <a:srgbClr val="2E3A80"/>
-                </a:solidFill>
-                <a:latin typeface="Montserrat"/>
-              </a:rPr>
-              <a:t>•  </a:t>
-            </a:r>
-            <a:r>
-              <a:rPr sz="1600" b="0" i="0">
-                <a:solidFill>
-                  <a:srgbClr val="1B2330"/>
-                </a:solidFill>
-                <a:latin typeface="Montserrat"/>
-              </a:rPr>
-              <a:t>No añade requisitos técnicos nuevos</a:t>
-            </a:r>
-          </a:p>
-        </p:txBody>
-      </p:sp>
-      <p:sp>
-        <p:nvSpPr>
-          <p:cNvPr id="8" name="imgph" descr="IMGQ:technical standards documents binder on desk"/>
+              <a:t>En este vídeo</a:t>
+            </a:r>
+          </a:p>
+        </p:txBody>
+      </p:sp>
+      <p:sp>
+        <p:nvSpPr>
+          <p:cNvPr id="7" name="Rounded Rectangle 6"/>
           <p:cNvSpPr/>
           <p:nvPr/>
         </p:nvSpPr>
         <p:spPr>
           <a:xfrm>
-            <a:off x="5806440" y="1051560"/>
-            <a:ext cx="5298947" cy="4629150"/>
+            <a:off x="868680" y="1673352"/>
+            <a:ext cx="2011680" cy="73152"/>
           </a:xfrm>
           <a:prstGeom prst="roundRect">
             <a:avLst/>
           </a:prstGeom>
           <a:solidFill>
-            <a:srgbClr val="F3F6FB"/>
+            <a:srgbClr val="E8801A"/>
           </a:solidFill>
-          <a:ln w="12700">
-            <a:solidFill>
-              <a:srgbClr val="C7D2E6"/>
-            </a:solidFill>
+          <a:ln>
+            <a:noFill/>
           </a:ln>
           <a:effectLst/>
         </p:spPr>
@@ -9481,14 +10391,14 @@
       </p:sp>
       <p:sp>
         <p:nvSpPr>
-          <p:cNvPr id="9" name="TextBox 8"/>
+          <p:cNvPr id="8" name="TextBox 7"/>
           <p:cNvSpPr txBox="1"/>
           <p:nvPr/>
         </p:nvSpPr>
         <p:spPr>
           <a:xfrm>
-            <a:off x="6080760" y="2726055"/>
-            <a:ext cx="4750307" cy="1280160"/>
+            <a:off x="822960" y="2103120"/>
+            <a:ext cx="10515600" cy="4023360"/>
           </a:xfrm>
           <a:prstGeom prst="rect">
             <a:avLst/>
@@ -9501,27 +10411,228 @@
           </a:bodyPr>
           <a:lstStyle/>
           <a:p>
-            <a:pPr algn="ctr"/>
-            <a:r>
-              <a:rPr sz="1400" b="1" i="0">
-                <a:solidFill>
-                  <a:srgbClr val="64748B"/>
-                </a:solidFill>
-                <a:latin typeface="Montserrat"/>
-              </a:rPr>
-              <a:t>IMAGEN REALISTA</a:t>
-            </a:r>
-          </a:p>
-          <a:p>
-            <a:pPr algn="ctr"/>
-            <a:r>
-              <a:rPr sz="1100" b="0" i="1">
-                <a:solidFill>
-                  <a:srgbClr val="64748B"/>
-                </a:solidFill>
-                <a:latin typeface="Montserrat"/>
-              </a:rPr>
-              <a:t>technical standards documents binder on desk</a:t>
+            <a:pPr>
+              <a:spcAft>
+                <a:spcPts val="900"/>
+              </a:spcAft>
+            </a:pPr>
+            <a:r>
+              <a:rPr sz="1800" b="1" i="0">
+                <a:solidFill>
+                  <a:srgbClr val="E8801A"/>
+                </a:solidFill>
+                <a:latin typeface="Montserrat"/>
+              </a:rPr>
+              <a:t>01   </a:t>
+            </a:r>
+            <a:r>
+              <a:rPr sz="1700" b="0" i="0">
+                <a:solidFill>
+                  <a:srgbClr val="1B2330"/>
+                </a:solidFill>
+                <a:latin typeface="Montserrat"/>
+              </a:rPr>
+              <a:t>Objeto</a:t>
+            </a:r>
+          </a:p>
+          <a:p>
+            <a:pPr>
+              <a:spcAft>
+                <a:spcPts val="900"/>
+              </a:spcAft>
+            </a:pPr>
+            <a:r>
+              <a:rPr sz="1800" b="1" i="0">
+                <a:solidFill>
+                  <a:srgbClr val="E8801A"/>
+                </a:solidFill>
+                <a:latin typeface="Montserrat"/>
+              </a:rPr>
+              <a:t>02   </a:t>
+            </a:r>
+            <a:r>
+              <a:rPr sz="1700" b="0" i="0">
+                <a:solidFill>
+                  <a:srgbClr val="1B2330"/>
+                </a:solidFill>
+                <a:latin typeface="Montserrat"/>
+              </a:rPr>
+              <a:t>Cómo entenderla</a:t>
+            </a:r>
+          </a:p>
+          <a:p>
+            <a:pPr>
+              <a:spcAft>
+                <a:spcPts val="900"/>
+              </a:spcAft>
+            </a:pPr>
+            <a:r>
+              <a:rPr sz="1800" b="1" i="0">
+                <a:solidFill>
+                  <a:srgbClr val="E8801A"/>
+                </a:solidFill>
+                <a:latin typeface="Montserrat"/>
+              </a:rPr>
+              <a:t>03   </a:t>
+            </a:r>
+            <a:r>
+              <a:rPr sz="1700" b="0" i="0">
+                <a:solidFill>
+                  <a:srgbClr val="1B2330"/>
+                </a:solidFill>
+                <a:latin typeface="Montserrat"/>
+              </a:rPr>
+              <a:t>Por qué existe</a:t>
+            </a:r>
+          </a:p>
+          <a:p>
+            <a:pPr>
+              <a:spcAft>
+                <a:spcPts val="900"/>
+              </a:spcAft>
+            </a:pPr>
+            <a:r>
+              <a:rPr sz="1800" b="1" i="0">
+                <a:solidFill>
+                  <a:srgbClr val="E8801A"/>
+                </a:solidFill>
+                <a:latin typeface="Montserrat"/>
+              </a:rPr>
+              <a:t>04   </a:t>
+            </a:r>
+            <a:r>
+              <a:rPr sz="1700" b="0" i="0">
+                <a:solidFill>
+                  <a:srgbClr val="1B2330"/>
+                </a:solidFill>
+                <a:latin typeface="Montserrat"/>
+              </a:rPr>
+              <a:t>Artículo 12</a:t>
+            </a:r>
+          </a:p>
+          <a:p>
+            <a:pPr>
+              <a:spcAft>
+                <a:spcPts val="900"/>
+              </a:spcAft>
+            </a:pPr>
+            <a:r>
+              <a:rPr sz="1800" b="1" i="0">
+                <a:solidFill>
+                  <a:srgbClr val="E8801A"/>
+                </a:solidFill>
+                <a:latin typeface="Montserrat"/>
+              </a:rPr>
+              <a:t>05   </a:t>
+            </a:r>
+            <a:r>
+              <a:rPr sz="1700" b="0" i="0">
+                <a:solidFill>
+                  <a:srgbClr val="1B2330"/>
+                </a:solidFill>
+                <a:latin typeface="Montserrat"/>
+              </a:rPr>
+              <a:t>Cuando cambia una norma</a:t>
+            </a:r>
+          </a:p>
+          <a:p>
+            <a:pPr>
+              <a:spcAft>
+                <a:spcPts val="900"/>
+              </a:spcAft>
+            </a:pPr>
+            <a:r>
+              <a:rPr sz="1800" b="1" i="0">
+                <a:solidFill>
+                  <a:srgbClr val="E8801A"/>
+                </a:solidFill>
+                <a:latin typeface="Montserrat"/>
+              </a:rPr>
+              <a:t>06   </a:t>
+            </a:r>
+            <a:r>
+              <a:rPr sz="1700" b="0" i="0">
+                <a:solidFill>
+                  <a:srgbClr val="1B2330"/>
+                </a:solidFill>
+                <a:latin typeface="Montserrat"/>
+              </a:rPr>
+              <a:t>Los prefijos</a:t>
+            </a:r>
+          </a:p>
+          <a:p>
+            <a:pPr>
+              <a:spcAft>
+                <a:spcPts val="900"/>
+              </a:spcAft>
+            </a:pPr>
+            <a:r>
+              <a:rPr sz="1800" b="1" i="0">
+                <a:solidFill>
+                  <a:srgbClr val="E8801A"/>
+                </a:solidFill>
+                <a:latin typeface="Montserrat"/>
+              </a:rPr>
+              <a:t>07   </a:t>
+            </a:r>
+            <a:r>
+              <a:rPr sz="1700" b="0" i="0">
+                <a:solidFill>
+                  <a:srgbClr val="1B2330"/>
+                </a:solidFill>
+                <a:latin typeface="Montserrat"/>
+              </a:rPr>
+              <a:t>Serie 60xxx y 123xxx</a:t>
+            </a:r>
+          </a:p>
+          <a:p>
+            <a:pPr>
+              <a:spcAft>
+                <a:spcPts val="900"/>
+              </a:spcAft>
+            </a:pPr>
+            <a:r>
+              <a:rPr sz="1800" b="1" i="0">
+                <a:solidFill>
+                  <a:srgbClr val="E8801A"/>
+                </a:solidFill>
+                <a:latin typeface="Montserrat"/>
+              </a:rPr>
+              <a:t>08   </a:t>
+            </a:r>
+            <a:r>
+              <a:rPr sz="1700" b="0" i="0">
+                <a:solidFill>
+                  <a:srgbClr val="1B2330"/>
+                </a:solidFill>
+                <a:latin typeface="Montserrat"/>
+              </a:rPr>
+              <a:t>Tu categoría B</a:t>
+            </a:r>
+          </a:p>
+          <a:p>
+            <a:pPr>
+              <a:spcAft>
+                <a:spcPts val="900"/>
+              </a:spcAft>
+            </a:pPr>
+            <a:r>
+              <a:rPr sz="1800" b="1" i="0">
+                <a:solidFill>
+                  <a:srgbClr val="E8801A"/>
+                </a:solidFill>
+                <a:latin typeface="Montserrat"/>
+              </a:rPr>
+              <a:t>09   </a:t>
+            </a:r>
+            <a:r>
+              <a:rPr sz="1700" b="0" i="0">
+                <a:solidFill>
+                  <a:srgbClr val="1B2330"/>
+                </a:solidFill>
+                <a:latin typeface="Montserrat"/>
+              </a:rPr>
+              <a:t>No las confundas</a:t>
             </a:r>
           </a:p>
         </p:txBody>
@@ -9618,7 +10729,7 @@
                 </a:solidFill>
                 <a:latin typeface="Montserrat"/>
               </a:rPr>
-              <a:t>004 / 018</a:t>
+              <a:t>004 / 019</a:t>
             </a:r>
           </a:p>
         </p:txBody>
@@ -9666,7 +10777,7 @@
         <p:spPr>
           <a:xfrm>
             <a:off x="822960" y="457200"/>
-            <a:ext cx="8229600" cy="365760"/>
+            <a:ext cx="10058400" cy="365760"/>
           </a:xfrm>
           <a:prstGeom prst="rect">
             <a:avLst/>
@@ -9680,13 +10791,13 @@
           <a:lstStyle/>
           <a:p>
             <a:r>
-              <a:rPr sz="1200" b="1" i="0">
-                <a:solidFill>
-                  <a:srgbClr val="64748B"/>
-                </a:solidFill>
-                <a:latin typeface="Montserrat"/>
-              </a:rPr>
-              <a:t>CÓMO ENTENDERLA</a:t>
+              <a:rPr sz="1300" b="1" i="0">
+                <a:solidFill>
+                  <a:srgbClr val="E8801A"/>
+                </a:solidFill>
+                <a:latin typeface="Montserrat"/>
+              </a:rPr>
+              <a:t>OBJETO · ARTÍCULO 12</a:t>
             </a:r>
           </a:p>
         </p:txBody>
@@ -9714,26 +10825,70 @@
           <a:lstStyle/>
           <a:p>
             <a:r>
-              <a:rPr sz="2700" b="1" i="0">
+              <a:rPr sz="2800" b="1" i="0">
                 <a:solidFill>
                   <a:srgbClr val="1E2761"/>
                 </a:solidFill>
                 <a:latin typeface="Montserrat"/>
               </a:rPr>
-              <a:t>Un índice, no un manual</a:t>
-            </a:r>
-          </a:p>
-        </p:txBody>
-      </p:sp>
-      <p:sp>
-        <p:nvSpPr>
-          <p:cNvPr id="7" name="TextBox 6"/>
+              <a:t>¿Qué es la ITC-ICG 11?</a:t>
+            </a:r>
+          </a:p>
+        </p:txBody>
+      </p:sp>
+      <p:sp>
+        <p:nvSpPr>
+          <p:cNvPr id="7" name="Rounded Rectangle 6"/>
+          <p:cNvSpPr/>
+          <p:nvPr/>
+        </p:nvSpPr>
+        <p:spPr>
+          <a:xfrm>
+            <a:off x="868680" y="1627632"/>
+            <a:ext cx="2011680" cy="73152"/>
+          </a:xfrm>
+          <a:prstGeom prst="roundRect">
+            <a:avLst/>
+          </a:prstGeom>
+          <a:solidFill>
+            <a:srgbClr val="E8801A"/>
+          </a:solidFill>
+          <a:ln>
+            <a:noFill/>
+          </a:ln>
+          <a:effectLst/>
+        </p:spPr>
+        <p:style>
+          <a:lnRef idx="1">
+            <a:schemeClr val="accent1"/>
+          </a:lnRef>
+          <a:fillRef idx="3">
+            <a:schemeClr val="accent1"/>
+          </a:fillRef>
+          <a:effectRef idx="2">
+            <a:schemeClr val="accent1"/>
+          </a:effectRef>
+          <a:fontRef idx="minor">
+            <a:schemeClr val="lt1"/>
+          </a:fontRef>
+        </p:style>
+        <p:txBody>
+          <a:bodyPr rtlCol="0" anchor="ctr"/>
+          <a:lstStyle/>
+          <a:p>
+            <a:pPr algn="ctr"/>
+          </a:p>
+        </p:txBody>
+      </p:sp>
+      <p:sp>
+        <p:nvSpPr>
+          <p:cNvPr id="8" name="TextBox 7"/>
           <p:cNvSpPr txBox="1"/>
           <p:nvPr/>
         </p:nvSpPr>
         <p:spPr>
           <a:xfrm>
-            <a:off x="822960" y="1920240"/>
+            <a:off x="822960" y="1965960"/>
             <a:ext cx="4983480" cy="4206240"/>
           </a:xfrm>
           <a:prstGeom prst="rect">
@@ -9749,17 +10904,17 @@
           <a:p>
             <a:pPr>
               <a:spcAft>
-                <a:spcPts val="1000"/>
+                <a:spcPts val="1100"/>
               </a:spcAft>
             </a:pPr>
             <a:r>
               <a:rPr sz="1600" b="1" i="0">
                 <a:solidFill>
-                  <a:srgbClr val="2E3A80"/>
-                </a:solidFill>
-                <a:latin typeface="Montserrat"/>
-              </a:rPr>
-              <a:t>•  </a:t>
+                  <a:srgbClr val="E8801A"/>
+                </a:solidFill>
+                <a:latin typeface="Montserrat"/>
+              </a:rPr>
+              <a:t>▸  </a:t>
             </a:r>
             <a:r>
               <a:rPr sz="1600" b="0" i="0">
@@ -9768,23 +10923,23 @@
                 </a:solidFill>
                 <a:latin typeface="Montserrat"/>
               </a:rPr>
-              <a:t>Dice qué normas existen</a:t>
+              <a:t>El listado oficial de normas UNE</a:t>
             </a:r>
           </a:p>
           <a:p>
             <a:pPr>
               <a:spcAft>
-                <a:spcPts val="1000"/>
+                <a:spcPts val="1100"/>
               </a:spcAft>
             </a:pPr>
             <a:r>
               <a:rPr sz="1600" b="1" i="0">
                 <a:solidFill>
-                  <a:srgbClr val="2E3A80"/>
-                </a:solidFill>
-                <a:latin typeface="Montserrat"/>
-              </a:rPr>
-              <a:t>•  </a:t>
+                  <a:srgbClr val="E8801A"/>
+                </a:solidFill>
+                <a:latin typeface="Montserrat"/>
+              </a:rPr>
+              <a:t>▸  </a:t>
             </a:r>
             <a:r>
               <a:rPr sz="1600" b="0" i="0">
@@ -9793,23 +10948,23 @@
                 </a:solidFill>
                 <a:latin typeface="Montserrat"/>
               </a:rPr>
-              <a:t>No explica cómo se hace cada cosa</a:t>
+              <a:t>Remite el artículo 12 del Reglamento</a:t>
             </a:r>
           </a:p>
           <a:p>
             <a:pPr>
               <a:spcAft>
-                <a:spcPts val="1000"/>
+                <a:spcPts val="1100"/>
               </a:spcAft>
             </a:pPr>
             <a:r>
               <a:rPr sz="1600" b="1" i="0">
                 <a:solidFill>
-                  <a:srgbClr val="2E3A80"/>
-                </a:solidFill>
-                <a:latin typeface="Montserrat"/>
-              </a:rPr>
-              <a:t>•  </a:t>
+                  <a:srgbClr val="E8801A"/>
+                </a:solidFill>
+                <a:latin typeface="Montserrat"/>
+              </a:rPr>
+              <a:t>▸  </a:t>
             </a:r>
             <a:r>
               <a:rPr sz="1600" b="0" i="0">
@@ -9818,14 +10973,14 @@
                 </a:solidFill>
                 <a:latin typeface="Montserrat"/>
               </a:rPr>
-              <a:t>El contenido está en cada UNE</a:t>
-            </a:r>
-          </a:p>
-        </p:txBody>
-      </p:sp>
-      <p:sp>
-        <p:nvSpPr>
-          <p:cNvPr id="8" name="imgph" descr="IMGQ:person reading table of contents in book"/>
+              <a:t>No añade requisitos técnicos nuevos</a:t>
+            </a:r>
+          </a:p>
+        </p:txBody>
+      </p:sp>
+      <p:sp>
+        <p:nvSpPr>
+          <p:cNvPr id="9" name="imgph" descr="IMGQ:technical standards documents binder on desk"/>
           <p:cNvSpPr/>
           <p:nvPr/>
         </p:nvSpPr>
@@ -9871,7 +11026,7 @@
       </p:sp>
       <p:sp>
         <p:nvSpPr>
-          <p:cNvPr id="9" name="TextBox 8"/>
+          <p:cNvPr id="10" name="TextBox 9"/>
           <p:cNvSpPr txBox="1"/>
           <p:nvPr/>
         </p:nvSpPr>
@@ -9911,7 +11066,7 @@
                 </a:solidFill>
                 <a:latin typeface="Montserrat"/>
               </a:rPr>
-              <a:t>person reading table of contents in book</a:t>
+              <a:t>technical standards documents binder on desk</a:t>
             </a:r>
           </a:p>
         </p:txBody>
@@ -10008,7 +11163,7 @@
                 </a:solidFill>
                 <a:latin typeface="Montserrat"/>
               </a:rPr>
-              <a:t>005 / 018</a:t>
+              <a:t>005 / 019</a:t>
             </a:r>
           </a:p>
         </p:txBody>
@@ -10056,7 +11211,7 @@
         <p:spPr>
           <a:xfrm>
             <a:off x="822960" y="457200"/>
-            <a:ext cx="8229600" cy="365760"/>
+            <a:ext cx="10058400" cy="365760"/>
           </a:xfrm>
           <a:prstGeom prst="rect">
             <a:avLst/>
@@ -10070,13 +11225,13 @@
           <a:lstStyle/>
           <a:p>
             <a:r>
-              <a:rPr sz="1200" b="1" i="0">
-                <a:solidFill>
-                  <a:srgbClr val="64748B"/>
-                </a:solidFill>
-                <a:latin typeface="Montserrat"/>
-              </a:rPr>
-              <a:t>POR QUÉ EXISTE</a:t>
+              <a:rPr sz="1300" b="1" i="0">
+                <a:solidFill>
+                  <a:srgbClr val="E8801A"/>
+                </a:solidFill>
+                <a:latin typeface="Montserrat"/>
+              </a:rPr>
+              <a:t>CÓMO ENTENDERLA</a:t>
             </a:r>
           </a:p>
         </p:txBody>
@@ -10104,26 +11259,70 @@
           <a:lstStyle/>
           <a:p>
             <a:r>
-              <a:rPr sz="2700" b="1" i="0">
+              <a:rPr sz="2800" b="1" i="0">
                 <a:solidFill>
                   <a:srgbClr val="1E2761"/>
                 </a:solidFill>
                 <a:latin typeface="Montserrat"/>
               </a:rPr>
-              <a:t>Una ITC solo para la lista</a:t>
-            </a:r>
-          </a:p>
-        </p:txBody>
-      </p:sp>
-      <p:sp>
-        <p:nvSpPr>
-          <p:cNvPr id="7" name="TextBox 6"/>
+              <a:t>Un índice, no un manual</a:t>
+            </a:r>
+          </a:p>
+        </p:txBody>
+      </p:sp>
+      <p:sp>
+        <p:nvSpPr>
+          <p:cNvPr id="7" name="Rounded Rectangle 6"/>
+          <p:cNvSpPr/>
+          <p:nvPr/>
+        </p:nvSpPr>
+        <p:spPr>
+          <a:xfrm>
+            <a:off x="868680" y="1627632"/>
+            <a:ext cx="2011680" cy="73152"/>
+          </a:xfrm>
+          <a:prstGeom prst="roundRect">
+            <a:avLst/>
+          </a:prstGeom>
+          <a:solidFill>
+            <a:srgbClr val="E8801A"/>
+          </a:solidFill>
+          <a:ln>
+            <a:noFill/>
+          </a:ln>
+          <a:effectLst/>
+        </p:spPr>
+        <p:style>
+          <a:lnRef idx="1">
+            <a:schemeClr val="accent1"/>
+          </a:lnRef>
+          <a:fillRef idx="3">
+            <a:schemeClr val="accent1"/>
+          </a:fillRef>
+          <a:effectRef idx="2">
+            <a:schemeClr val="accent1"/>
+          </a:effectRef>
+          <a:fontRef idx="minor">
+            <a:schemeClr val="lt1"/>
+          </a:fontRef>
+        </p:style>
+        <p:txBody>
+          <a:bodyPr rtlCol="0" anchor="ctr"/>
+          <a:lstStyle/>
+          <a:p>
+            <a:pPr algn="ctr"/>
+          </a:p>
+        </p:txBody>
+      </p:sp>
+      <p:sp>
+        <p:nvSpPr>
+          <p:cNvPr id="8" name="TextBox 7"/>
           <p:cNvSpPr txBox="1"/>
           <p:nvPr/>
         </p:nvSpPr>
         <p:spPr>
           <a:xfrm>
-            <a:off x="822960" y="1920240"/>
+            <a:off x="822960" y="1965960"/>
             <a:ext cx="4983480" cy="4206240"/>
           </a:xfrm>
           <a:prstGeom prst="rect">
@@ -10139,17 +11338,17 @@
           <a:p>
             <a:pPr>
               <a:spcAft>
-                <a:spcPts val="1000"/>
+                <a:spcPts val="1100"/>
               </a:spcAft>
             </a:pPr>
             <a:r>
               <a:rPr sz="1600" b="1" i="0">
                 <a:solidFill>
-                  <a:srgbClr val="2E3A80"/>
-                </a:solidFill>
-                <a:latin typeface="Montserrat"/>
-              </a:rPr>
-              <a:t>•  </a:t>
+                  <a:srgbClr val="E8801A"/>
+                </a:solidFill>
+                <a:latin typeface="Montserrat"/>
+              </a:rPr>
+              <a:t>▸  </a:t>
             </a:r>
             <a:r>
               <a:rPr sz="1600" b="0" i="0">
@@ -10158,23 +11357,23 @@
                 </a:solidFill>
                 <a:latin typeface="Montserrat"/>
               </a:rPr>
-              <a:t>Las normas se revisan a menudo</a:t>
+              <a:t>Dice qué normas existen</a:t>
             </a:r>
           </a:p>
           <a:p>
             <a:pPr>
               <a:spcAft>
-                <a:spcPts val="1000"/>
+                <a:spcPts val="1100"/>
               </a:spcAft>
             </a:pPr>
             <a:r>
               <a:rPr sz="1600" b="1" i="0">
                 <a:solidFill>
-                  <a:srgbClr val="2E3A80"/>
-                </a:solidFill>
-                <a:latin typeface="Montserrat"/>
-              </a:rPr>
-              <a:t>•  </a:t>
+                  <a:srgbClr val="E8801A"/>
+                </a:solidFill>
+                <a:latin typeface="Montserrat"/>
+              </a:rPr>
+              <a:t>▸  </a:t>
             </a:r>
             <a:r>
               <a:rPr sz="1600" b="0" i="0">
@@ -10183,23 +11382,23 @@
                 </a:solidFill>
                 <a:latin typeface="Montserrat"/>
               </a:rPr>
-              <a:t>Se actualiza por Resolución</a:t>
+              <a:t>No explica cómo se hace cada cosa</a:t>
             </a:r>
           </a:p>
           <a:p>
             <a:pPr>
               <a:spcAft>
-                <a:spcPts val="1000"/>
+                <a:spcPts val="1100"/>
               </a:spcAft>
             </a:pPr>
             <a:r>
               <a:rPr sz="1600" b="1" i="0">
                 <a:solidFill>
-                  <a:srgbClr val="2E3A80"/>
-                </a:solidFill>
-                <a:latin typeface="Montserrat"/>
-              </a:rPr>
-              <a:t>•  </a:t>
+                  <a:srgbClr val="E8801A"/>
+                </a:solidFill>
+                <a:latin typeface="Montserrat"/>
+              </a:rPr>
+              <a:t>▸  </a:t>
             </a:r>
             <a:r>
               <a:rPr sz="1600" b="0" i="0">
@@ -10208,14 +11407,14 @@
                 </a:solidFill>
                 <a:latin typeface="Montserrat"/>
               </a:rPr>
-              <a:t>Sin tocar el Reglamento entero</a:t>
-            </a:r>
-          </a:p>
-        </p:txBody>
-      </p:sp>
-      <p:sp>
-        <p:nvSpPr>
-          <p:cNvPr id="8" name="imgph" descr="IMGQ:government official gazette documents"/>
+              <a:t>El contenido está en cada UNE</a:t>
+            </a:r>
+          </a:p>
+        </p:txBody>
+      </p:sp>
+      <p:sp>
+        <p:nvSpPr>
+          <p:cNvPr id="9" name="imgph" descr="IMGQ:person reading table of contents in book"/>
           <p:cNvSpPr/>
           <p:nvPr/>
         </p:nvSpPr>
@@ -10261,7 +11460,7 @@
       </p:sp>
       <p:sp>
         <p:nvSpPr>
-          <p:cNvPr id="9" name="TextBox 8"/>
+          <p:cNvPr id="10" name="TextBox 9"/>
           <p:cNvSpPr txBox="1"/>
           <p:nvPr/>
         </p:nvSpPr>
@@ -10301,7 +11500,7 @@
                 </a:solidFill>
                 <a:latin typeface="Montserrat"/>
               </a:rPr>
-              <a:t>government official gazette documents</a:t>
+              <a:t>person reading table of contents in book</a:t>
             </a:r>
           </a:p>
         </p:txBody>
@@ -10398,7 +11597,7 @@
                 </a:solidFill>
                 <a:latin typeface="Montserrat"/>
               </a:rPr>
-              <a:t>006 / 018</a:t>
+              <a:t>006 / 019</a:t>
             </a:r>
           </a:p>
         </p:txBody>
@@ -10446,7 +11645,7 @@
         <p:spPr>
           <a:xfrm>
             <a:off x="822960" y="457200"/>
-            <a:ext cx="8229600" cy="365760"/>
+            <a:ext cx="10058400" cy="365760"/>
           </a:xfrm>
           <a:prstGeom prst="rect">
             <a:avLst/>
@@ -10460,13 +11659,13 @@
           <a:lstStyle/>
           <a:p>
             <a:r>
-              <a:rPr sz="1200" b="1" i="0">
-                <a:solidFill>
-                  <a:srgbClr val="64748B"/>
-                </a:solidFill>
-                <a:latin typeface="Montserrat"/>
-              </a:rPr>
-              <a:t>ARTÍCULO 12 · LA CITA</a:t>
+              <a:rPr sz="1300" b="1" i="0">
+                <a:solidFill>
+                  <a:srgbClr val="E8801A"/>
+                </a:solidFill>
+                <a:latin typeface="Montserrat"/>
+              </a:rPr>
+              <a:t>POR QUÉ EXISTE</a:t>
             </a:r>
           </a:p>
         </p:txBody>
@@ -10494,26 +11693,70 @@
           <a:lstStyle/>
           <a:p>
             <a:r>
-              <a:rPr sz="2700" b="1" i="0">
+              <a:rPr sz="2800" b="1" i="0">
                 <a:solidFill>
                   <a:srgbClr val="1E2761"/>
                 </a:solidFill>
                 <a:latin typeface="Montserrat"/>
               </a:rPr>
-              <a:t>Las normas se citan sin año</a:t>
-            </a:r>
-          </a:p>
-        </p:txBody>
-      </p:sp>
-      <p:sp>
-        <p:nvSpPr>
-          <p:cNvPr id="7" name="TextBox 6"/>
+              <a:t>Una ITC solo para la lista</a:t>
+            </a:r>
+          </a:p>
+        </p:txBody>
+      </p:sp>
+      <p:sp>
+        <p:nvSpPr>
+          <p:cNvPr id="7" name="Rounded Rectangle 6"/>
+          <p:cNvSpPr/>
+          <p:nvPr/>
+        </p:nvSpPr>
+        <p:spPr>
+          <a:xfrm>
+            <a:off x="868680" y="1627632"/>
+            <a:ext cx="2011680" cy="73152"/>
+          </a:xfrm>
+          <a:prstGeom prst="roundRect">
+            <a:avLst/>
+          </a:prstGeom>
+          <a:solidFill>
+            <a:srgbClr val="E8801A"/>
+          </a:solidFill>
+          <a:ln>
+            <a:noFill/>
+          </a:ln>
+          <a:effectLst/>
+        </p:spPr>
+        <p:style>
+          <a:lnRef idx="1">
+            <a:schemeClr val="accent1"/>
+          </a:lnRef>
+          <a:fillRef idx="3">
+            <a:schemeClr val="accent1"/>
+          </a:fillRef>
+          <a:effectRef idx="2">
+            <a:schemeClr val="accent1"/>
+          </a:effectRef>
+          <a:fontRef idx="minor">
+            <a:schemeClr val="lt1"/>
+          </a:fontRef>
+        </p:style>
+        <p:txBody>
+          <a:bodyPr rtlCol="0" anchor="ctr"/>
+          <a:lstStyle/>
+          <a:p>
+            <a:pPr algn="ctr"/>
+          </a:p>
+        </p:txBody>
+      </p:sp>
+      <p:sp>
+        <p:nvSpPr>
+          <p:cNvPr id="8" name="TextBox 7"/>
           <p:cNvSpPr txBox="1"/>
           <p:nvPr/>
         </p:nvSpPr>
         <p:spPr>
           <a:xfrm>
-            <a:off x="822960" y="1920240"/>
+            <a:off x="822960" y="1965960"/>
             <a:ext cx="4983480" cy="4206240"/>
           </a:xfrm>
           <a:prstGeom prst="rect">
@@ -10529,17 +11772,17 @@
           <a:p>
             <a:pPr>
               <a:spcAft>
-                <a:spcPts val="1000"/>
+                <a:spcPts val="1100"/>
               </a:spcAft>
             </a:pPr>
             <a:r>
               <a:rPr sz="1600" b="1" i="0">
                 <a:solidFill>
-                  <a:srgbClr val="2E3A80"/>
-                </a:solidFill>
-                <a:latin typeface="Montserrat"/>
-              </a:rPr>
-              <a:t>•  </a:t>
+                  <a:srgbClr val="E8801A"/>
+                </a:solidFill>
+                <a:latin typeface="Montserrat"/>
+              </a:rPr>
+              <a:t>▸  </a:t>
             </a:r>
             <a:r>
               <a:rPr sz="1600" b="0" i="0">
@@ -10548,23 +11791,23 @@
                 </a:solidFill>
                 <a:latin typeface="Montserrat"/>
               </a:rPr>
-              <a:t>Las ITC citan la UNE sin fecha</a:t>
+              <a:t>Las normas se revisan a menudo</a:t>
             </a:r>
           </a:p>
           <a:p>
             <a:pPr>
               <a:spcAft>
-                <a:spcPts val="1000"/>
+                <a:spcPts val="1100"/>
               </a:spcAft>
             </a:pPr>
             <a:r>
               <a:rPr sz="1600" b="1" i="0">
                 <a:solidFill>
-                  <a:srgbClr val="2E3A80"/>
-                </a:solidFill>
-                <a:latin typeface="Montserrat"/>
-              </a:rPr>
-              <a:t>•  </a:t>
+                  <a:srgbClr val="E8801A"/>
+                </a:solidFill>
+                <a:latin typeface="Montserrat"/>
+              </a:rPr>
+              <a:t>▸  </a:t>
             </a:r>
             <a:r>
               <a:rPr sz="1600" b="0" i="0">
@@ -10573,23 +11816,23 @@
                 </a:solidFill>
                 <a:latin typeface="Montserrat"/>
               </a:rPr>
-              <a:t>El año figura solo en la ICG 11</a:t>
+              <a:t>Se actualiza por Resolución</a:t>
             </a:r>
           </a:p>
           <a:p>
             <a:pPr>
               <a:spcAft>
-                <a:spcPts val="1000"/>
+                <a:spcPts val="1100"/>
               </a:spcAft>
             </a:pPr>
             <a:r>
               <a:rPr sz="1600" b="1" i="0">
                 <a:solidFill>
-                  <a:srgbClr val="2E3A80"/>
-                </a:solidFill>
-                <a:latin typeface="Montserrat"/>
-              </a:rPr>
-              <a:t>•  </a:t>
+                  <a:srgbClr val="E8801A"/>
+                </a:solidFill>
+                <a:latin typeface="Montserrat"/>
+              </a:rPr>
+              <a:t>▸  </a:t>
             </a:r>
             <a:r>
               <a:rPr sz="1600" b="0" i="0">
@@ -10598,14 +11841,14 @@
                 </a:solidFill>
                 <a:latin typeface="Montserrat"/>
               </a:rPr>
-              <a:t>Regla: usa la edición vigente</a:t>
-            </a:r>
-          </a:p>
-        </p:txBody>
-      </p:sp>
-      <p:sp>
-        <p:nvSpPr>
-          <p:cNvPr id="8" name="imgph" descr="IMGQ:copper gas pipe wall installation"/>
+              <a:t>Sin tocar el Reglamento entero</a:t>
+            </a:r>
+          </a:p>
+        </p:txBody>
+      </p:sp>
+      <p:sp>
+        <p:nvSpPr>
+          <p:cNvPr id="9" name="imgph" descr="IMGQ:government official gazette documents"/>
           <p:cNvSpPr/>
           <p:nvPr/>
         </p:nvSpPr>
@@ -10651,7 +11894,7 @@
       </p:sp>
       <p:sp>
         <p:nvSpPr>
-          <p:cNvPr id="9" name="TextBox 8"/>
+          <p:cNvPr id="10" name="TextBox 9"/>
           <p:cNvSpPr txBox="1"/>
           <p:nvPr/>
         </p:nvSpPr>
@@ -10691,7 +11934,7 @@
                 </a:solidFill>
                 <a:latin typeface="Montserrat"/>
               </a:rPr>
-              <a:t>copper gas pipe wall installation</a:t>
+              <a:t>government official gazette documents</a:t>
             </a:r>
           </a:p>
         </p:txBody>
@@ -10788,7 +12031,7 @@
                 </a:solidFill>
                 <a:latin typeface="Montserrat"/>
               </a:rPr>
-              <a:t>007 / 018</a:t>
+              <a:t>007 / 019</a:t>
             </a:r>
           </a:p>
         </p:txBody>
@@ -10836,7 +12079,7 @@
         <p:spPr>
           <a:xfrm>
             <a:off x="822960" y="457200"/>
-            <a:ext cx="8229600" cy="365760"/>
+            <a:ext cx="10058400" cy="365760"/>
           </a:xfrm>
           <a:prstGeom prst="rect">
             <a:avLst/>
@@ -10850,13 +12093,13 @@
           <a:lstStyle/>
           <a:p>
             <a:r>
-              <a:rPr sz="1200" b="1" i="0">
-                <a:solidFill>
-                  <a:srgbClr val="64748B"/>
-                </a:solidFill>
-                <a:latin typeface="Montserrat"/>
-              </a:rPr>
-              <a:t>CUANDO CAMBIA UNA NORMA</a:t>
+              <a:rPr sz="1300" b="1" i="0">
+                <a:solidFill>
+                  <a:srgbClr val="E8801A"/>
+                </a:solidFill>
+                <a:latin typeface="Montserrat"/>
+              </a:rPr>
+              <a:t>ARTÍCULO 12 · LA CITA</a:t>
             </a:r>
           </a:p>
         </p:txBody>
@@ -10884,26 +12127,70 @@
           <a:lstStyle/>
           <a:p>
             <a:r>
-              <a:rPr sz="2700" b="1" i="0">
+              <a:rPr sz="2800" b="1" i="0">
                 <a:solidFill>
                   <a:srgbClr val="1E2761"/>
                 </a:solidFill>
                 <a:latin typeface="Montserrat"/>
               </a:rPr>
-              <a:t>El periodo de coexistencia</a:t>
-            </a:r>
-          </a:p>
-        </p:txBody>
-      </p:sp>
-      <p:sp>
-        <p:nvSpPr>
-          <p:cNvPr id="7" name="TextBox 6"/>
+              <a:t>Las normas se citan sin año</a:t>
+            </a:r>
+          </a:p>
+        </p:txBody>
+      </p:sp>
+      <p:sp>
+        <p:nvSpPr>
+          <p:cNvPr id="7" name="Rounded Rectangle 6"/>
+          <p:cNvSpPr/>
+          <p:nvPr/>
+        </p:nvSpPr>
+        <p:spPr>
+          <a:xfrm>
+            <a:off x="868680" y="1627632"/>
+            <a:ext cx="2011680" cy="73152"/>
+          </a:xfrm>
+          <a:prstGeom prst="roundRect">
+            <a:avLst/>
+          </a:prstGeom>
+          <a:solidFill>
+            <a:srgbClr val="E8801A"/>
+          </a:solidFill>
+          <a:ln>
+            <a:noFill/>
+          </a:ln>
+          <a:effectLst/>
+        </p:spPr>
+        <p:style>
+          <a:lnRef idx="1">
+            <a:schemeClr val="accent1"/>
+          </a:lnRef>
+          <a:fillRef idx="3">
+            <a:schemeClr val="accent1"/>
+          </a:fillRef>
+          <a:effectRef idx="2">
+            <a:schemeClr val="accent1"/>
+          </a:effectRef>
+          <a:fontRef idx="minor">
+            <a:schemeClr val="lt1"/>
+          </a:fontRef>
+        </p:style>
+        <p:txBody>
+          <a:bodyPr rtlCol="0" anchor="ctr"/>
+          <a:lstStyle/>
+          <a:p>
+            <a:pPr algn="ctr"/>
+          </a:p>
+        </p:txBody>
+      </p:sp>
+      <p:sp>
+        <p:nvSpPr>
+          <p:cNvPr id="8" name="TextBox 7"/>
           <p:cNvSpPr txBox="1"/>
           <p:nvPr/>
         </p:nvSpPr>
         <p:spPr>
           <a:xfrm>
-            <a:off x="822960" y="1920240"/>
+            <a:off x="822960" y="1965960"/>
             <a:ext cx="4983480" cy="4206240"/>
           </a:xfrm>
           <a:prstGeom prst="rect">
@@ -10919,17 +12206,17 @@
           <a:p>
             <a:pPr>
               <a:spcAft>
-                <a:spcPts val="1000"/>
+                <a:spcPts val="1100"/>
               </a:spcAft>
             </a:pPr>
             <a:r>
               <a:rPr sz="1600" b="1" i="0">
                 <a:solidFill>
-                  <a:srgbClr val="2E3A80"/>
-                </a:solidFill>
-                <a:latin typeface="Montserrat"/>
-              </a:rPr>
-              <a:t>•  </a:t>
+                  <a:srgbClr val="E8801A"/>
+                </a:solidFill>
+                <a:latin typeface="Montserrat"/>
+              </a:rPr>
+              <a:t>▸  </a:t>
             </a:r>
             <a:r>
               <a:rPr sz="1600" b="0" i="0">
@@ -10938,23 +12225,23 @@
                 </a:solidFill>
                 <a:latin typeface="Montserrat"/>
               </a:rPr>
-              <a:t>La nueva edición no mata a la antigua</a:t>
+              <a:t>Las ITC citan la UNE sin fecha</a:t>
             </a:r>
           </a:p>
           <a:p>
             <a:pPr>
               <a:spcAft>
-                <a:spcPts val="1000"/>
+                <a:spcPts val="1100"/>
               </a:spcAft>
             </a:pPr>
             <a:r>
               <a:rPr sz="1600" b="1" i="0">
                 <a:solidFill>
-                  <a:srgbClr val="2E3A80"/>
-                </a:solidFill>
-                <a:latin typeface="Montserrat"/>
-              </a:rPr>
-              <a:t>•  </a:t>
+                  <a:srgbClr val="E8801A"/>
+                </a:solidFill>
+                <a:latin typeface="Montserrat"/>
+              </a:rPr>
+              <a:t>▸  </a:t>
             </a:r>
             <a:r>
               <a:rPr sz="1600" b="0" i="0">
@@ -10963,23 +12250,23 @@
                 </a:solidFill>
                 <a:latin typeface="Montserrat"/>
               </a:rPr>
-              <a:t>Un tramo valen las dos</a:t>
+              <a:t>El año figura solo en la ICG 11</a:t>
             </a:r>
           </a:p>
           <a:p>
             <a:pPr>
               <a:spcAft>
-                <a:spcPts val="1000"/>
+                <a:spcPts val="1100"/>
               </a:spcAft>
             </a:pPr>
             <a:r>
               <a:rPr sz="1600" b="1" i="0">
                 <a:solidFill>
-                  <a:srgbClr val="2E3A80"/>
-                </a:solidFill>
-                <a:latin typeface="Montserrat"/>
-              </a:rPr>
-              <a:t>•  </a:t>
+                  <a:srgbClr val="E8801A"/>
+                </a:solidFill>
+                <a:latin typeface="Montserrat"/>
+              </a:rPr>
+              <a:t>▸  </a:t>
             </a:r>
             <a:r>
               <a:rPr sz="1600" b="0" i="0">
@@ -10988,14 +12275,14 @@
                 </a:solidFill>
                 <a:latin typeface="Montserrat"/>
               </a:rPr>
-              <a:t>La Resolución fija las fechas</a:t>
-            </a:r>
-          </a:p>
-        </p:txBody>
-      </p:sp>
-      <p:sp>
-        <p:nvSpPr>
-          <p:cNvPr id="8" name="imgph" descr="IMGQ:calendar planning on office wall"/>
+              <a:t>Regla: usa la edición vigente</a:t>
+            </a:r>
+          </a:p>
+        </p:txBody>
+      </p:sp>
+      <p:sp>
+        <p:nvSpPr>
+          <p:cNvPr id="9" name="imgph" descr="IMGQ:copper gas pipe wall installation"/>
           <p:cNvSpPr/>
           <p:nvPr/>
         </p:nvSpPr>
@@ -11041,7 +12328,7 @@
       </p:sp>
       <p:sp>
         <p:nvSpPr>
-          <p:cNvPr id="9" name="TextBox 8"/>
+          <p:cNvPr id="10" name="TextBox 9"/>
           <p:cNvSpPr txBox="1"/>
           <p:nvPr/>
         </p:nvSpPr>
@@ -11081,7 +12368,7 @@
                 </a:solidFill>
                 <a:latin typeface="Montserrat"/>
               </a:rPr>
-              <a:t>calendar planning on office wall</a:t>
+              <a:t>copper gas pipe wall installation</a:t>
             </a:r>
           </a:p>
         </p:txBody>
@@ -11178,7 +12465,7 @@
                 </a:solidFill>
                 <a:latin typeface="Montserrat"/>
               </a:rPr>
-              <a:t>008 / 018</a:t>
+              <a:t>008 / 019</a:t>
             </a:r>
           </a:p>
         </p:txBody>
@@ -11226,7 +12513,7 @@
         <p:spPr>
           <a:xfrm>
             <a:off x="822960" y="457200"/>
-            <a:ext cx="8229600" cy="365760"/>
+            <a:ext cx="10058400" cy="365760"/>
           </a:xfrm>
           <a:prstGeom prst="rect">
             <a:avLst/>
@@ -11240,13 +12527,13 @@
           <a:lstStyle/>
           <a:p>
             <a:r>
-              <a:rPr sz="1200" b="1" i="0">
-                <a:solidFill>
-                  <a:srgbClr val="64748B"/>
-                </a:solidFill>
-                <a:latin typeface="Montserrat"/>
-              </a:rPr>
-              <a:t>LOS PREFIJOS</a:t>
+              <a:rPr sz="1300" b="1" i="0">
+                <a:solidFill>
+                  <a:srgbClr val="E8801A"/>
+                </a:solidFill>
+                <a:latin typeface="Montserrat"/>
+              </a:rPr>
+              <a:t>CUANDO CAMBIA UNA NORMA</a:t>
             </a:r>
           </a:p>
         </p:txBody>
@@ -11274,26 +12561,70 @@
           <a:lstStyle/>
           <a:p>
             <a:r>
-              <a:rPr sz="2700" b="1" i="0">
+              <a:rPr sz="2800" b="1" i="0">
                 <a:solidFill>
                   <a:srgbClr val="1E2761"/>
                 </a:solidFill>
                 <a:latin typeface="Montserrat"/>
               </a:rPr>
-              <a:t>De dónde viene cada norma</a:t>
-            </a:r>
-          </a:p>
-        </p:txBody>
-      </p:sp>
-      <p:sp>
-        <p:nvSpPr>
-          <p:cNvPr id="7" name="TextBox 6"/>
+              <a:t>El periodo de coexistencia</a:t>
+            </a:r>
+          </a:p>
+        </p:txBody>
+      </p:sp>
+      <p:sp>
+        <p:nvSpPr>
+          <p:cNvPr id="7" name="Rounded Rectangle 6"/>
+          <p:cNvSpPr/>
+          <p:nvPr/>
+        </p:nvSpPr>
+        <p:spPr>
+          <a:xfrm>
+            <a:off x="868680" y="1627632"/>
+            <a:ext cx="2011680" cy="73152"/>
+          </a:xfrm>
+          <a:prstGeom prst="roundRect">
+            <a:avLst/>
+          </a:prstGeom>
+          <a:solidFill>
+            <a:srgbClr val="E8801A"/>
+          </a:solidFill>
+          <a:ln>
+            <a:noFill/>
+          </a:ln>
+          <a:effectLst/>
+        </p:spPr>
+        <p:style>
+          <a:lnRef idx="1">
+            <a:schemeClr val="accent1"/>
+          </a:lnRef>
+          <a:fillRef idx="3">
+            <a:schemeClr val="accent1"/>
+          </a:fillRef>
+          <a:effectRef idx="2">
+            <a:schemeClr val="accent1"/>
+          </a:effectRef>
+          <a:fontRef idx="minor">
+            <a:schemeClr val="lt1"/>
+          </a:fontRef>
+        </p:style>
+        <p:txBody>
+          <a:bodyPr rtlCol="0" anchor="ctr"/>
+          <a:lstStyle/>
+          <a:p>
+            <a:pPr algn="ctr"/>
+          </a:p>
+        </p:txBody>
+      </p:sp>
+      <p:sp>
+        <p:nvSpPr>
+          <p:cNvPr id="8" name="TextBox 7"/>
           <p:cNvSpPr txBox="1"/>
           <p:nvPr/>
         </p:nvSpPr>
         <p:spPr>
           <a:xfrm>
-            <a:off x="822960" y="1920240"/>
+            <a:off x="822960" y="1965960"/>
             <a:ext cx="4983480" cy="4206240"/>
           </a:xfrm>
           <a:prstGeom prst="rect">
@@ -11309,17 +12640,17 @@
           <a:p>
             <a:pPr>
               <a:spcAft>
-                <a:spcPts val="1000"/>
+                <a:spcPts val="1100"/>
               </a:spcAft>
             </a:pPr>
             <a:r>
               <a:rPr sz="1600" b="1" i="0">
                 <a:solidFill>
-                  <a:srgbClr val="2E3A80"/>
-                </a:solidFill>
-                <a:latin typeface="Montserrat"/>
-              </a:rPr>
-              <a:t>•  </a:t>
+                  <a:srgbClr val="E8801A"/>
+                </a:solidFill>
+                <a:latin typeface="Montserrat"/>
+              </a:rPr>
+              <a:t>▸  </a:t>
             </a:r>
             <a:r>
               <a:rPr sz="1600" b="0" i="0">
@@ -11328,23 +12659,23 @@
                 </a:solidFill>
                 <a:latin typeface="Montserrat"/>
               </a:rPr>
-              <a:t>UNE: española (AENOR)</a:t>
+              <a:t>La nueva edición no mata a la antigua</a:t>
             </a:r>
           </a:p>
           <a:p>
             <a:pPr>
               <a:spcAft>
-                <a:spcPts val="1000"/>
+                <a:spcPts val="1100"/>
               </a:spcAft>
             </a:pPr>
             <a:r>
               <a:rPr sz="1600" b="1" i="0">
                 <a:solidFill>
-                  <a:srgbClr val="2E3A80"/>
-                </a:solidFill>
-                <a:latin typeface="Montserrat"/>
-              </a:rPr>
-              <a:t>•  </a:t>
+                  <a:srgbClr val="E8801A"/>
+                </a:solidFill>
+                <a:latin typeface="Montserrat"/>
+              </a:rPr>
+              <a:t>▸  </a:t>
             </a:r>
             <a:r>
               <a:rPr sz="1600" b="0" i="0">
@@ -11353,23 +12684,23 @@
                 </a:solidFill>
                 <a:latin typeface="Montserrat"/>
               </a:rPr>
-              <a:t>UNE-EN: europea adoptada</a:t>
+              <a:t>Un tramo valen las dos</a:t>
             </a:r>
           </a:p>
           <a:p>
             <a:pPr>
               <a:spcAft>
-                <a:spcPts val="1000"/>
+                <a:spcPts val="1100"/>
               </a:spcAft>
             </a:pPr>
             <a:r>
               <a:rPr sz="1600" b="1" i="0">
                 <a:solidFill>
-                  <a:srgbClr val="2E3A80"/>
-                </a:solidFill>
-                <a:latin typeface="Montserrat"/>
-              </a:rPr>
-              <a:t>•  </a:t>
+                  <a:srgbClr val="E8801A"/>
+                </a:solidFill>
+                <a:latin typeface="Montserrat"/>
+              </a:rPr>
+              <a:t>▸  </a:t>
             </a:r>
             <a:r>
               <a:rPr sz="1600" b="0" i="0">
@@ -11378,39 +12709,14 @@
                 </a:solidFill>
                 <a:latin typeface="Montserrat"/>
               </a:rPr>
-              <a:t>UNE-EN ISO: internacional</a:t>
-            </a:r>
-          </a:p>
-          <a:p>
-            <a:pPr>
-              <a:spcAft>
-                <a:spcPts val="1000"/>
-              </a:spcAft>
-            </a:pPr>
-            <a:r>
-              <a:rPr sz="1600" b="1" i="0">
-                <a:solidFill>
-                  <a:srgbClr val="2E3A80"/>
-                </a:solidFill>
-                <a:latin typeface="Montserrat"/>
-              </a:rPr>
-              <a:t>•  </a:t>
-            </a:r>
-            <a:r>
-              <a:rPr sz="1600" b="0" i="0">
-                <a:solidFill>
-                  <a:srgbClr val="1B2330"/>
-                </a:solidFill>
-                <a:latin typeface="Montserrat"/>
-              </a:rPr>
-              <a:t>UNE-CEN/TR: informe técnico</a:t>
-            </a:r>
-          </a:p>
-        </p:txBody>
-      </p:sp>
-      <p:sp>
-        <p:nvSpPr>
-          <p:cNvPr id="8" name="imgph" descr="IMGQ:european union flags row"/>
+              <a:t>La Resolución fija las fechas</a:t>
+            </a:r>
+          </a:p>
+        </p:txBody>
+      </p:sp>
+      <p:sp>
+        <p:nvSpPr>
+          <p:cNvPr id="9" name="imgph" descr="IMGQ:calendar planning on office wall"/>
           <p:cNvSpPr/>
           <p:nvPr/>
         </p:nvSpPr>
@@ -11456,7 +12762,7 @@
       </p:sp>
       <p:sp>
         <p:nvSpPr>
-          <p:cNvPr id="9" name="TextBox 8"/>
+          <p:cNvPr id="10" name="TextBox 9"/>
           <p:cNvSpPr txBox="1"/>
           <p:nvPr/>
         </p:nvSpPr>
@@ -11496,7 +12802,7 @@
                 </a:solidFill>
                 <a:latin typeface="Montserrat"/>
               </a:rPr>
-              <a:t>european union flags row</a:t>
+              <a:t>calendar planning on office wall</a:t>
             </a:r>
           </a:p>
         </p:txBody>
@@ -11593,7 +12899,7 @@
                 </a:solidFill>
                 <a:latin typeface="Montserrat"/>
               </a:rPr>
-              <a:t>009 / 018</a:t>
+              <a:t>009 / 019</a:t>
             </a:r>
           </a:p>
         </p:txBody>
@@ -11641,7 +12947,7 @@
         <p:spPr>
           <a:xfrm>
             <a:off x="822960" y="457200"/>
-            <a:ext cx="8229600" cy="365760"/>
+            <a:ext cx="10058400" cy="365760"/>
           </a:xfrm>
           <a:prstGeom prst="rect">
             <a:avLst/>
@@ -11655,13 +12961,13 @@
           <a:lstStyle/>
           <a:p>
             <a:r>
-              <a:rPr sz="1200" b="1" i="0">
-                <a:solidFill>
-                  <a:srgbClr val="64748B"/>
-                </a:solidFill>
-                <a:latin typeface="Montserrat"/>
-              </a:rPr>
-              <a:t>SERIE 60XXX Y 123XXX</a:t>
+              <a:rPr sz="1300" b="1" i="0">
+                <a:solidFill>
+                  <a:srgbClr val="E8801A"/>
+                </a:solidFill>
+                <a:latin typeface="Montserrat"/>
+              </a:rPr>
+              <a:t>LOS PREFIJOS</a:t>
             </a:r>
           </a:p>
         </p:txBody>
@@ -11689,26 +12995,70 @@
           <a:lstStyle/>
           <a:p>
             <a:r>
-              <a:rPr sz="2700" b="1" i="0">
+              <a:rPr sz="2800" b="1" i="0">
                 <a:solidFill>
                   <a:srgbClr val="1E2761"/>
                 </a:solidFill>
                 <a:latin typeface="Montserrat"/>
               </a:rPr>
-              <a:t>Normas UNE nacionales</a:t>
-            </a:r>
-          </a:p>
-        </p:txBody>
-      </p:sp>
-      <p:sp>
-        <p:nvSpPr>
-          <p:cNvPr id="7" name="TextBox 6"/>
+              <a:t>De dónde viene cada norma</a:t>
+            </a:r>
+          </a:p>
+        </p:txBody>
+      </p:sp>
+      <p:sp>
+        <p:nvSpPr>
+          <p:cNvPr id="7" name="Rounded Rectangle 6"/>
+          <p:cNvSpPr/>
+          <p:nvPr/>
+        </p:nvSpPr>
+        <p:spPr>
+          <a:xfrm>
+            <a:off x="868680" y="1627632"/>
+            <a:ext cx="2011680" cy="73152"/>
+          </a:xfrm>
+          <a:prstGeom prst="roundRect">
+            <a:avLst/>
+          </a:prstGeom>
+          <a:solidFill>
+            <a:srgbClr val="E8801A"/>
+          </a:solidFill>
+          <a:ln>
+            <a:noFill/>
+          </a:ln>
+          <a:effectLst/>
+        </p:spPr>
+        <p:style>
+          <a:lnRef idx="1">
+            <a:schemeClr val="accent1"/>
+          </a:lnRef>
+          <a:fillRef idx="3">
+            <a:schemeClr val="accent1"/>
+          </a:fillRef>
+          <a:effectRef idx="2">
+            <a:schemeClr val="accent1"/>
+          </a:effectRef>
+          <a:fontRef idx="minor">
+            <a:schemeClr val="lt1"/>
+          </a:fontRef>
+        </p:style>
+        <p:txBody>
+          <a:bodyPr rtlCol="0" anchor="ctr"/>
+          <a:lstStyle/>
+          <a:p>
+            <a:pPr algn="ctr"/>
+          </a:p>
+        </p:txBody>
+      </p:sp>
+      <p:sp>
+        <p:nvSpPr>
+          <p:cNvPr id="8" name="TextBox 7"/>
           <p:cNvSpPr txBox="1"/>
           <p:nvPr/>
         </p:nvSpPr>
         <p:spPr>
           <a:xfrm>
-            <a:off x="822960" y="1920240"/>
+            <a:off x="822960" y="1965960"/>
             <a:ext cx="4983480" cy="4206240"/>
           </a:xfrm>
           <a:prstGeom prst="rect">
@@ -11724,17 +13074,17 @@
           <a:p>
             <a:pPr>
               <a:spcAft>
-                <a:spcPts val="1000"/>
+                <a:spcPts val="1100"/>
               </a:spcAft>
             </a:pPr>
             <a:r>
               <a:rPr sz="1600" b="1" i="0">
                 <a:solidFill>
-                  <a:srgbClr val="2E3A80"/>
-                </a:solidFill>
-                <a:latin typeface="Montserrat"/>
-              </a:rPr>
-              <a:t>•  </a:t>
+                  <a:srgbClr val="E8801A"/>
+                </a:solidFill>
+                <a:latin typeface="Montserrat"/>
+              </a:rPr>
+              <a:t>▸  </a:t>
             </a:r>
             <a:r>
               <a:rPr sz="1600" b="0" i="0">
@@ -11743,23 +13093,23 @@
                 </a:solidFill>
                 <a:latin typeface="Montserrat"/>
               </a:rPr>
-              <a:t>60xxx: núcleo nacional del gas</a:t>
+              <a:t>UNE: española (AENOR)</a:t>
             </a:r>
           </a:p>
           <a:p>
             <a:pPr>
               <a:spcAft>
-                <a:spcPts val="1000"/>
+                <a:spcPts val="1100"/>
               </a:spcAft>
             </a:pPr>
             <a:r>
               <a:rPr sz="1600" b="1" i="0">
                 <a:solidFill>
-                  <a:srgbClr val="2E3A80"/>
-                </a:solidFill>
-                <a:latin typeface="Montserrat"/>
-              </a:rPr>
-              <a:t>•  </a:t>
+                  <a:srgbClr val="E8801A"/>
+                </a:solidFill>
+                <a:latin typeface="Montserrat"/>
+              </a:rPr>
+              <a:t>▸  </a:t>
             </a:r>
             <a:r>
               <a:rPr sz="1600" b="0" i="0">
@@ -11768,23 +13118,23 @@
                 </a:solidFill>
                 <a:latin typeface="Montserrat"/>
               </a:rPr>
-              <a:t>Distribución: 60310 / 60311 / 60312</a:t>
+              <a:t>UNE-EN: europea adoptada</a:t>
             </a:r>
           </a:p>
           <a:p>
             <a:pPr>
               <a:spcAft>
-                <a:spcPts val="1000"/>
+                <a:spcPts val="1100"/>
               </a:spcAft>
             </a:pPr>
             <a:r>
               <a:rPr sz="1600" b="1" i="0">
                 <a:solidFill>
-                  <a:srgbClr val="2E3A80"/>
-                </a:solidFill>
-                <a:latin typeface="Montserrat"/>
-              </a:rPr>
-              <a:t>•  </a:t>
+                  <a:srgbClr val="E8801A"/>
+                </a:solidFill>
+                <a:latin typeface="Montserrat"/>
+              </a:rPr>
+              <a:t>▸  </a:t>
             </a:r>
             <a:r>
               <a:rPr sz="1600" b="0" i="0">
@@ -11793,23 +13143,23 @@
                 </a:solidFill>
                 <a:latin typeface="Montserrat"/>
               </a:rPr>
-              <a:t>Receptoras y GLP: 60620, 60670, 60250</a:t>
+              <a:t>UNE-EN ISO: internacional</a:t>
             </a:r>
           </a:p>
           <a:p>
             <a:pPr>
               <a:spcAft>
-                <a:spcPts val="1000"/>
+                <a:spcPts val="1100"/>
               </a:spcAft>
             </a:pPr>
             <a:r>
               <a:rPr sz="1600" b="1" i="0">
                 <a:solidFill>
-                  <a:srgbClr val="2E3A80"/>
-                </a:solidFill>
-                <a:latin typeface="Montserrat"/>
-              </a:rPr>
-              <a:t>•  </a:t>
+                  <a:srgbClr val="E8801A"/>
+                </a:solidFill>
+                <a:latin typeface="Montserrat"/>
+              </a:rPr>
+              <a:t>▸  </a:t>
             </a:r>
             <a:r>
               <a:rPr sz="1600" b="0" i="0">
@@ -11818,14 +13168,14 @@
                 </a:solidFill>
                 <a:latin typeface="Montserrat"/>
               </a:rPr>
-              <a:t>Chimeneas: 123001</a:t>
-            </a:r>
-          </a:p>
-        </p:txBody>
-      </p:sp>
-      <p:sp>
-        <p:nvSpPr>
-          <p:cNvPr id="8" name="imgph" descr="IMGQ:gas meter cabinet outdoor wall"/>
+              <a:t>UNE-CEN/TR: informe técnico</a:t>
+            </a:r>
+          </a:p>
+        </p:txBody>
+      </p:sp>
+      <p:sp>
+        <p:nvSpPr>
+          <p:cNvPr id="9" name="imgph" descr="IMGQ:european union flags row"/>
           <p:cNvSpPr/>
           <p:nvPr/>
         </p:nvSpPr>
@@ -11871,7 +13221,7 @@
       </p:sp>
       <p:sp>
         <p:nvSpPr>
-          <p:cNvPr id="9" name="TextBox 8"/>
+          <p:cNvPr id="10" name="TextBox 9"/>
           <p:cNvSpPr txBox="1"/>
           <p:nvPr/>
         </p:nvSpPr>
@@ -11911,7 +13261,7 @@
                 </a:solidFill>
                 <a:latin typeface="Montserrat"/>
               </a:rPr>
-              <a:t>gas meter cabinet outdoor wall</a:t>
+              <a:t>european union flags row</a:t>
             </a:r>
           </a:p>
         </p:txBody>

--- a/Curso Gas B/08 - ITC-ICG 11 - Relacion de normas UNE de referencia/08 - ITC-ICG 11 - Relacion de normas UNE de referencia - Vídeo 1.pptx
+++ b/Curso Gas B/08 - ITC-ICG 11 - Relacion de normas UNE de referencia/08 - ITC-ICG 11 - Relacion de normas UNE de referencia - Vídeo 1.pptx
@@ -680,12 +680,12 @@
           <a:lstStyle/>
           <a:p>
             <a:r>
-              <a:t>N1: ¿Por dónde empieza el listado nacional?</a:t>
-            </a:r>
-          </a:p>
-          <a:p>
-            <a:r>
-              <a:t>N2: Esta es la primera mitad de las normas de casa, las de la serie sesenta mil. Léela por bloques, no de memoria. Arriba tienes la de plantas satélite y la de depósitos de GLP. Luego el bloque de distribución, la red de la calle: la trescientos diez para presiones altas, la trescientos once para presiones bajas y la trescientos doce para las estaciones de regulación. Fíjate en que algunas llevan barra uno eme: es la misma norma con un parche, no una norma nueva. Después vienen las receptoras de gas natural por encima de cinco bar, la serie seiscientos veinte, troceada en cinco partes. Un ejemplo de obra: si vas a una nave con gas natural a presión alta, tu norma de receptora es la seiscientos veinte, no la seiscientos setenta.</a:t>
+              <a:t>N1: ¿Por dónde empieza el listado nacional? Léemela, que voy conduciendo y no veo la tabla.</a:t>
+            </a:r>
+          </a:p>
+          <a:p>
+            <a:r>
+              <a:t>N2: Claro, te la cuento fila a fila, quédate con el número y el tema de cada una. Abre con la seis mil doscientos diez, plantas satélite de gas natural licuado. Sigue la seis mil doscientos cincuenta, la de los depósitos fijos de GLP para consumo en instalaciones receptoras. Luego el bloque de distribución, la red de la calle: la seis mil trescientos diez, canalizaciones de más de cinco bar y hasta dieciséis; la seis mil trescientos once, canalizaciones de hasta cinco bar; y la seis mil trescientos doce, las estaciones de regulación con entrada hasta dieciséis bar. Verás que la trescientos diez y la trescientos once aparecen también con barra uno eme: es la misma norma con un parche, no una nueva. Después, la seis mil seiscientos uno, salas de máquinas y equipos de generación de calor o frío. Y el bloque grande, la serie seiscientos veinte, receptoras de gas natural por encima de cinco bar, troceada en cinco partes: la uno generalidades, la dos acometidas interiores, la tres estaciones de regulación y medida, la cuatro grupos de regulación y la cinco control periódico. Cierra la seis mil seiscientos treinta, estaciones de servicio de GLP para vehículos. Un apunte que igual no ves en pantalla: al pie recuerda que eme o pe es la máxima presión de operación, la presión más alta a la que la instalación trabaja de forma normal. Ejemplo de obra: si vas a una nave con gas natural a presión alta, tu norma de receptora es la seiscientos veinte, no la seiscientos setenta.</a:t>
             </a:r>
           </a:p>
         </p:txBody>
@@ -755,12 +755,12 @@
           <a:lstStyle/>
           <a:p>
             <a:r>
-              <a:t>N1: Y esta segunda mitad, ¿por qué es la importante para mí?</a:t>
-            </a:r>
-          </a:p>
-          <a:p>
-            <a:r>
-              <a:t>N2: Porque aquí está la familia seis mil seiscientos setenta al completo, la que más vas a manejar: instalaciones receptoras hasta cinco bar, lo doméstico y lo comercial. Mira cómo está troceada en trece partes y liga cada una a una avería. La parte ocho son las pruebas de estanquidad, la que evita la fuga. La parte seis, la ventilación y evacuación de humos, la que evita la intoxicación por monóxido. La parte siete, la conexión de aparatos. La parte nueve, las pruebas previas para dar gas por primera vez. Y al final tienes la del marcado y la ciento veintitrés mil uno de chimeneas modulares. Un ejemplo: te llaman por una caldera que ennegrece la rejilla; tu norma de cabecera es la parte seis, la de ventilación.</a:t>
+              <a:t>N1: Y esta segunda mitad del listado nacional, ¿qué trae? Léemela.</a:t>
+            </a:r>
+          </a:p>
+          <a:p>
+            <a:r>
+              <a:t>N2: Aquí está la familia seis mil seiscientos setenta al completo, la que más vas a manejar: instalaciones receptoras hasta cinco bar, lo doméstico y lo comercial. Está troceada en trece partes y te las ligo a averías para que no se te olviden. Parte uno, generalidades. Parte dos, terminología. Parte tres, tuberías, elementos, accesorios y sus uniones. Parte cuatro, diseño y construcción. Parte cinco, los recintos para los contadores. Parte seis, muy importante, configuración, ventilación y evacuación de los productos de la combustión: la que evita la intoxicación por monóxido. Parte siete, instalación y conexión de los aparatos. Parte ocho, la estrella, pruebas de estanquidad para la entrega: la que evita la fuga. Parte nueve, pruebas previas al suministro y puesta en servicio, para dar gas por primera vez. Parte diez, verificación del mantenimiento de la seguridad de los aparatos. Parte once, operaciones en instalaciones en servicio. Parte doce, control periódico de las instalaciones. Y parte trece, control periódico de los aparatos. Debajo hay dos normas más: la seis mil setecientos cincuenta, del marcado indeleble de aparatos y componentes, y la ciento veintitrés mil uno, cálculo, diseño e instalación de chimeneas modulares. Un ejemplo: te llaman por una caldera que ennegrece la rejilla; tu norma de cabecera es la parte seis, la de ventilación.</a:t>
             </a:r>
           </a:p>
         </p:txBody>
@@ -830,12 +830,12 @@
           <a:lstStyle/>
           <a:p>
             <a:r>
-              <a:t>N1: Ahora que tienes la tabla delante, afinemos con la estrella de tu categoría.</a:t>
-            </a:r>
-          </a:p>
-          <a:p>
-            <a:r>
-              <a:t>N2: Pista: la estanquidad es asegurarte de que no se escapa ni una burbuja de gas, y se comprueba justo antes de entregar la instalación. No es la de la ventilación ni la de conectar aparatos.</a:t>
+              <a:t>N1: Vamos con una pregunta, y ojo que esta cae fijo. Escucha con atención, que te leo la pregunta entera y luego las cuatro opciones. La pregunta es: ¿qué parte de la une seis mil seiscientos setenta trata las pruebas de estanquidad para la entrega de la instalación? Opción A, la une seis mil seiscientos setenta guion seis. Opción B, la une seis mil seiscientos setenta guion siete. Opción C, la une seis mil seiscientos setenta guion ocho. Opción D, la une seis mil seiscientos setenta guion nueve.</a:t>
+            </a:r>
+          </a:p>
+          <a:p>
+            <a:r>
+              <a:t>N2: Párala un momento y piénsalo. Como pista: la estanquidad es asegurarte de que no se escapa ni una burbuja de gas, y se comprueba justo antes de entregar la instalación. No es la de la ventilación ni la de conectar aparatos. ¿Ya tienes tu opción? Vamos con la respuesta.</a:t>
             </a:r>
           </a:p>
         </p:txBody>
@@ -905,12 +905,12 @@
           <a:lstStyle/>
           <a:p>
             <a:r>
-              <a:t>N1: ¿Por qué la ce, la parte ocho?</a:t>
-            </a:r>
-          </a:p>
-          <a:p>
-            <a:r>
-              <a:t>N2: Porque la parte ocho de la seis mil seiscientos setenta son las pruebas de estanquidad para la entrega de la instalación receptora: la que evita la fuga. Cuidado con las vecinas: la parte seis es ventilación y evacuación de humos, la parte siete la conexión de aparatos, y la parte nueve las pruebas previas al suministro. Truco: liga cada parte a la avería que previene y no las confundirás.</a:t>
+              <a:t>N2: La respuesta correcta es la opción C: la une seis mil seiscientos setenta guion ocho. Es la de las pruebas de estanquidad para la entrega de la instalación receptora, la que evita la fuga. Cuidado con las vecinas, que es justo donde se falla: la parte seis es ventilación y evacuación de humos, la parte siete la conexión de aparatos, y la parte nueve las pruebas previas al suministro. El truco para no confundirlas es ligar cada parte a la avería que previene, y la parte ocho es la que sella contra fugas.</a:t>
+            </a:r>
+          </a:p>
+          <a:p>
+            <a:r>
+              <a:t>N1: Liga el número a la avería y no fallas.</a:t>
             </a:r>
           </a:p>
         </p:txBody>
@@ -1130,12 +1130,12 @@
           <a:lstStyle/>
           <a:p>
             <a:r>
-              <a:t>N1: Vamos con una de examen, que esta cae fijo. Fíjate bien en la presión.</a:t>
-            </a:r>
-          </a:p>
-          <a:p>
-            <a:r>
-              <a:t>N2: Pista: piensa en la presión de una vivienda normal y en cuál de las dos series de receptoras cubre ese tramo. Ojo, que dos de las opciones ni siquiera son receptoras, son de distribución.</a:t>
+              <a:t>N1: Otra de examen, que esta también cae. Te leo la pregunta y luego las cuatro opciones, y fíjate bien en la presión. La pregunta es: ¿qué serie de normas une aplica a una instalación receptora doméstica con eme o pe inferior o igual a cinco bar? Opción A, la une seis mil seiscientos veinte. Opción B, la une seis mil seiscientos setenta. Opción C, la une seis mil trescientos once. Opción D, la une seis mil trescientos doce.</a:t>
+            </a:r>
+          </a:p>
+          <a:p>
+            <a:r>
+              <a:t>N2: Tómate un segundo. Como pista: piensa en la presión de una vivienda normal y en cuál de las series de receptoras cubre ese tramo. Y ojo, que dos de las opciones ni siquiera son receptoras, son de distribución, la red de la calle. ¿Lo tienes? Te doy la respuesta.</a:t>
             </a:r>
           </a:p>
         </p:txBody>
@@ -1205,12 +1205,12 @@
           <a:lstStyle/>
           <a:p>
             <a:r>
-              <a:t>N1: ¿Por qué la be?</a:t>
-            </a:r>
-          </a:p>
-          <a:p>
-            <a:r>
-              <a:t>N2: Porque la serie seis mil seiscientos setenta es la de las instalaciones receptoras hasta cinco bar, lo doméstico y comercial, el núcleo de tu categoría. La seis mil seiscientos veinte es para más de cinco bar, industrial, y la trescientos once y la trescientos doce son de distribución, la red de la calle. El truco para no fallar: el número más alto, seiscientos setenta, es la presión más baja.</a:t>
+              <a:t>N2: La respuesta correcta es la opción B: la une seis mil seiscientos setenta. Es la serie de las instalaciones receptoras hasta cinco bar, lo doméstico y lo comercial, el núcleo de tu categoría. La opción A, la seis mil seiscientos veinte, es para más de cinco bar, industrial. Y la ce y la de, la trescientos once y la trescientos doce, son de distribución, la red de la calle, no receptoras. El truco para no fallar: el número más alto, seiscientos setenta, es la presión más baja.</a:t>
+            </a:r>
+          </a:p>
+          <a:p>
+            <a:r>
+              <a:t>N1: Número más alto, presión más baja. Con eso lo clavas.</a:t>
             </a:r>
           </a:p>
         </p:txBody>
@@ -1430,12 +1430,12 @@
           <a:lstStyle/>
           <a:p>
             <a:r>
-              <a:t>N1: Pasamos a las de origen europeo. ¿Cómo las ordeno?</a:t>
-            </a:r>
-          </a:p>
-          <a:p>
-            <a:r>
-              <a:t>N2: Esta primera mitad la agrupas por temas. Arriba tienes las de fuego: la de extintores, la mil trescientos sesenta y tres de resistencia al fuego y, más adelante, la de reacción al fuego de los materiales. La cuatrocientos treinta y siete es la reina, la que define las familias de gas y las categorías de aparatos; la vas a citar sin parar. Luego el bloque de distribución europea: la mil quinientos noventa y cuatro para presiones muy altas, la familia doce mil siete troceada por materiales, con la parte dos del polietileno, y la doce mil trescientos veintisiete de ensayos de presión y puesta en servicio de la red. Un ejemplo de obra: si tiendes tubería de polietileno enterrada, tu referencia europea es la doce mil siete parte dos.</a:t>
+              <a:t>N1: Pasamos a las de origen europeo, las une-en. ¿Me las lees por temas?</a:t>
+            </a:r>
+          </a:p>
+          <a:p>
+            <a:r>
+              <a:t>N2: Te las agrupo, que son un buen puñado. Empieza el bloque de fuego: la une-en tres guion siete, extintores portátiles de incendios; la mil trescientos sesenta y tres guion uno, ensayos de resistencia al fuego, requisitos generales. En medio, la reina: la cuatrocientos treinta y siete, gases de ensayo, presiones de ensayo y categorías de aparatos; esta la vas a citar sin parar. Luego el bloque de distribución europea: la mil quinientos noventa y cuatro, canalizaciones de más de dieciséis bar; la familia doce mil siete, canalizaciones de hasta dieciséis bar, troceada por materiales, y fíjate en la parte dos, que es la del polietileno hasta diez bar; la doce mil ciento ochenta y seis, estaciones de regulación de presión para transporte y distribución; y la doce mil trescientos veintisiete, ensayos de presión y puesta en servicio de la red. Se cuela también la mil novecientos cuarenta y nueve, instalaciones de GLP en vehículos habitables de recreo, las autocaravanas. Al pie te recuerda que las une-en son normas europeas adoptadas como españolas y valen igual en todos los países que las adoptan. Un ejemplo de obra: si tiendes tubería de polietileno enterrada, tu referencia europea es la doce mil siete, parte dos.</a:t>
             </a:r>
           </a:p>
         </p:txBody>
@@ -1505,12 +1505,12 @@
           <a:lstStyle/>
           <a:p>
             <a:r>
-              <a:t>N1: Y esta segunda mitad, ¿qué me aporta en el día a día?</a:t>
-            </a:r>
-          </a:p>
-          <a:p>
-            <a:r>
-              <a:t>N2: Aquí está lo del GLP que tocas con las manos. La doce mil ochocientos sesenta y cuatro es la de los reguladores, esos que bajan la presión de la bombona; verás que aparece varias veces con barra a uno, a dos y a tres, pero es la misma norma con parches sucesivos, no cuatro normas. La trece mil setecientos ochenta y seis es la de los inversores automáticos y la dieciséis mil cuatrocientos treinta y seis, la de las mangueras y tubos flexibles, la avería más típica de una cocina de butano. Cierran la lista la nueve mil uno de calidad y, muy importante, la cen barra te erre mil setecientos cuarenta y nueve, que clasifica los aparatos por tipos según cómo echan los humos. Un ejemplo: si cambias la manguera agrietada de una bombona, la norma detrás es la dieciséis mil cuatrocientos treinta y seis.</a:t>
+              <a:t>N1: Y esta segunda mitad de las europeas, ¿qué me aporta en el día a día? Léemela.</a:t>
+            </a:r>
+          </a:p>
+          <a:p>
+            <a:r>
+              <a:t>N2: Aquí está lo del GLP que tocas con las manos. Abre la doce mil ochocientos sesenta y cuatro, reguladores de reglaje fijo hasta doscientos milibares y cuatro kilos por hora, para butano y propano; esa pieza que baja la presión de la bombona. La verás repetida con barra a uno, a dos y a tres, pero es la misma norma con parches sucesivos, no cuatro normas. Sigue el bloque de chimeneas: la trece mil trescientos ochenta y cuatro, métodos de cálculo, parte uno para un solo aparato y parte dos para varios generadores. La trece mil quinientos uno guion uno, clasificación frente al fuego de los productos de construcción. La trece mil setecientos ochenta y seis, inversores automáticos hasta cuatro bar y cien kilos por hora, los que cambian solos de una bombona vacía a otra llena. La dieciséis mil cuatrocientos treinta y seis, mangueras y tubos flexibles para butano y propano, con su parte uno de mangueras y su parte dos de conjuntos con accesorios. Y cierran la nueve mil uno, gestión de la calidad; la dieciséis mil novecientos veintitrés, estaciones de gas natural comprimido para repostaje; y muy importante, la cen barra te erre mil setecientos cuarenta y nueve, que clasifica los aparatos por tipos según cómo evacúan los humos. Al pie te avisa: las marcas barra a uno, a dos, a tres y más a uno son la misma norma retocada, en el boletín citas la norma base. Un ejemplo: si cambias la manguera agrietada de una bombona, la norma detrás es la dieciséis mil cuatrocientos treinta y seis.</a:t>
             </a:r>
           </a:p>
         </p:txBody>
@@ -1655,12 +1655,12 @@
           <a:lstStyle/>
           <a:p>
             <a:r>
-              <a:t>N1: Última pregunta, y va sobre la norma que más vas a citar.</a:t>
-            </a:r>
-          </a:p>
-          <a:p>
-            <a:r>
-              <a:t>N2: Pista: buscas la que reparte el gas en tres familias, la primera, la segunda y la tercera. Otra opción, muy parecida, clasifica los aparatos por tipos según cómo echan los humos; esa no es.</a:t>
+              <a:t>N1: Última pregunta, y va sobre la norma que más vas a citar en todo el curso. Te leo la pregunta y luego las cuatro opciones. La pregunta es: ¿qué norma define las tres familias de gas y las categorías de aparatos? Opción A, la une-en cuatrocientos treinta y siete. Opción B, la une-cen barra te erre mil setecientos cuarenta y nueve. Opción C, la une-en iso nueve mil uno. Opción D, la une-en doce mil ochocientos sesenta y cuatro.</a:t>
+            </a:r>
+          </a:p>
+          <a:p>
+            <a:r>
+              <a:t>N2: Piénsalo un momento. Como pista: buscas la que reparte el gas en tres familias, la primera, la segunda y la tercera. Cuidado con la opción B, que es muy parecida pero clasifica los aparatos por tipos según cómo echan los humos; esa no es. ¿Ya la tienes? Vamos con la respuesta.</a:t>
             </a:r>
           </a:p>
         </p:txBody>
@@ -1730,12 +1730,12 @@
           <a:lstStyle/>
           <a:p>
             <a:r>
-              <a:t>N1: ¿Por qué la a, la cuatrocientos treinta y siete?</a:t>
-            </a:r>
-          </a:p>
-          <a:p>
-            <a:r>
-              <a:t>N2: Porque la cuatrocientos treinta y siete define las tres familias de gas, la primera de manufacturados y aire propanado, la segunda de gas natural y la tercera de los GLP, y también las categorías de aparatos. No la confundas con su compañera, la cen barra te erre mil setecientos cuarenta y nueve, que clasifica los aparatos por tipos a, be y ce según cómo evacúan los humos. La nueve mil uno es calidad y la doce mil ochocientos sesenta y cuatro, reguladores.</a:t>
+              <a:t>N2: La respuesta correcta es la opción A: la une-en cuatrocientos treinta y siete. Es la que define las tres familias de gas, la primera de gases manufacturados y aire propanado, la segunda de gas natural y la tercera de los GLP, y además fija las categorías de aparatos. No la confundas con su compañera, la opción B, la cen barra te erre mil setecientos cuarenta y nueve, que clasifica los aparatos por tipos a, be y ce según cómo evacúan los humos. La opción C, la nueve mil uno, es de calidad, y la de, la doce mil ochocientos sesenta y cuatro, de reguladores.</a:t>
+            </a:r>
+          </a:p>
+          <a:p>
+            <a:r>
+              <a:t>N1: Tres familias, siempre la cuatrocientos treinta y siete.</a:t>
             </a:r>
           </a:p>
         </p:txBody>
